--- a/Binanotlar.pptx
+++ b/Binanotlar.pptx
@@ -13,6 +13,18 @@
     <p:sldId id="260" r:id="rId7"/>
     <p:sldId id="261" r:id="rId8"/>
     <p:sldId id="263" r:id="rId9"/>
+    <p:sldId id="264" r:id="rId10"/>
+    <p:sldId id="265" r:id="rId11"/>
+    <p:sldId id="266" r:id="rId12"/>
+    <p:sldId id="267" r:id="rId13"/>
+    <p:sldId id="268" r:id="rId14"/>
+    <p:sldId id="269" r:id="rId15"/>
+    <p:sldId id="271" r:id="rId16"/>
+    <p:sldId id="270" r:id="rId17"/>
+    <p:sldId id="272" r:id="rId18"/>
+    <p:sldId id="273" r:id="rId19"/>
+    <p:sldId id="274" r:id="rId20"/>
+    <p:sldId id="275" r:id="rId21"/>
   </p:sldIdLst>
   <p:sldSz cx="12192000" cy="6858000"/>
   <p:notesSz cx="6858000" cy="9144000"/>
@@ -119,6 +131,655 @@
 </p:presentation>
 </file>
 
+<file path=ppt/changesInfos/changesInfo1.xml><?xml version="1.0" encoding="utf-8"?>
+<pc:chgInfo xmlns:a="http://schemas.openxmlformats.org/drawingml/2006/main" xmlns:r="http://schemas.openxmlformats.org/officeDocument/2006/relationships" xmlns:ac="http://schemas.microsoft.com/office/drawing/2013/main/command" xmlns:pc="http://schemas.microsoft.com/office/powerpoint/2013/main/command">
+  <pc:docChgLst>
+    <pc:chgData name="Ayhan Karaman" userId="ec277a7f08761a62" providerId="LiveId" clId="{186F258A-E1B5-480C-AF8B-DFC9F8D7C6CF}"/>
+    <pc:docChg chg="undo custSel addSld modSld sldOrd">
+      <pc:chgData name="Ayhan Karaman" userId="ec277a7f08761a62" providerId="LiveId" clId="{186F258A-E1B5-480C-AF8B-DFC9F8D7C6CF}" dt="2026-08-23T20:24:25.455" v="2964" actId="14100"/>
+      <pc:docMkLst>
+        <pc:docMk/>
+      </pc:docMkLst>
+      <pc:sldChg chg="addSp modSp mod">
+        <pc:chgData name="Ayhan Karaman" userId="ec277a7f08761a62" providerId="LiveId" clId="{186F258A-E1B5-480C-AF8B-DFC9F8D7C6CF}" dt="2026-08-23T15:39:19.384" v="98" actId="20577"/>
+        <pc:sldMkLst>
+          <pc:docMk/>
+          <pc:sldMk cId="2392851602" sldId="263"/>
+        </pc:sldMkLst>
+        <pc:spChg chg="add mod">
+          <ac:chgData name="Ayhan Karaman" userId="ec277a7f08761a62" providerId="LiveId" clId="{186F258A-E1B5-480C-AF8B-DFC9F8D7C6CF}" dt="2026-08-23T15:37:03.446" v="35" actId="20577"/>
+          <ac:spMkLst>
+            <pc:docMk/>
+            <pc:sldMk cId="2392851602" sldId="263"/>
+            <ac:spMk id="2" creationId="{3B295E69-6286-6485-1F65-DC910A5E7DBA}"/>
+          </ac:spMkLst>
+        </pc:spChg>
+        <pc:spChg chg="add mod">
+          <ac:chgData name="Ayhan Karaman" userId="ec277a7f08761a62" providerId="LiveId" clId="{186F258A-E1B5-480C-AF8B-DFC9F8D7C6CF}" dt="2026-08-23T15:37:45.002" v="57" actId="20577"/>
+          <ac:spMkLst>
+            <pc:docMk/>
+            <pc:sldMk cId="2392851602" sldId="263"/>
+            <ac:spMk id="3" creationId="{020B9EB4-B12B-15D2-2CDE-2C26A576A8A8}"/>
+          </ac:spMkLst>
+        </pc:spChg>
+        <pc:spChg chg="add mod">
+          <ac:chgData name="Ayhan Karaman" userId="ec277a7f08761a62" providerId="LiveId" clId="{186F258A-E1B5-480C-AF8B-DFC9F8D7C6CF}" dt="2026-08-23T15:35:36.279" v="8" actId="20577"/>
+          <ac:spMkLst>
+            <pc:docMk/>
+            <pc:sldMk cId="2392851602" sldId="263"/>
+            <ac:spMk id="4" creationId="{A9D5BA4E-799C-9C1F-2433-093781773619}"/>
+          </ac:spMkLst>
+        </pc:spChg>
+        <pc:spChg chg="mod">
+          <ac:chgData name="Ayhan Karaman" userId="ec277a7f08761a62" providerId="LiveId" clId="{186F258A-E1B5-480C-AF8B-DFC9F8D7C6CF}" dt="2026-08-23T15:38:27.134" v="71" actId="20577"/>
+          <ac:spMkLst>
+            <pc:docMk/>
+            <pc:sldMk cId="2392851602" sldId="263"/>
+            <ac:spMk id="6" creationId="{8D3448AD-94A0-3A74-9D3B-88D3307B5360}"/>
+          </ac:spMkLst>
+        </pc:spChg>
+        <pc:spChg chg="add mod">
+          <ac:chgData name="Ayhan Karaman" userId="ec277a7f08761a62" providerId="LiveId" clId="{186F258A-E1B5-480C-AF8B-DFC9F8D7C6CF}" dt="2026-08-23T15:39:19.384" v="98" actId="20577"/>
+          <ac:spMkLst>
+            <pc:docMk/>
+            <pc:sldMk cId="2392851602" sldId="263"/>
+            <ac:spMk id="8" creationId="{F1445398-DE76-9901-EBD8-78A2074808A7}"/>
+          </ac:spMkLst>
+        </pc:spChg>
+      </pc:sldChg>
+      <pc:sldChg chg="addSp modSp add mod ord">
+        <pc:chgData name="Ayhan Karaman" userId="ec277a7f08761a62" providerId="LiveId" clId="{186F258A-E1B5-480C-AF8B-DFC9F8D7C6CF}" dt="2026-08-23T16:17:05.497" v="935" actId="20577"/>
+        <pc:sldMkLst>
+          <pc:docMk/>
+          <pc:sldMk cId="2702794919" sldId="264"/>
+        </pc:sldMkLst>
+        <pc:spChg chg="add mod">
+          <ac:chgData name="Ayhan Karaman" userId="ec277a7f08761a62" providerId="LiveId" clId="{186F258A-E1B5-480C-AF8B-DFC9F8D7C6CF}" dt="2026-08-23T16:00:35.600" v="606"/>
+          <ac:spMkLst>
+            <pc:docMk/>
+            <pc:sldMk cId="2702794919" sldId="264"/>
+            <ac:spMk id="2" creationId="{F761A71F-29CB-9CF0-1D02-9D53577DA23F}"/>
+          </ac:spMkLst>
+        </pc:spChg>
+        <pc:spChg chg="mod">
+          <ac:chgData name="Ayhan Karaman" userId="ec277a7f08761a62" providerId="LiveId" clId="{186F258A-E1B5-480C-AF8B-DFC9F8D7C6CF}" dt="2026-08-23T16:17:05.497" v="935" actId="20577"/>
+          <ac:spMkLst>
+            <pc:docMk/>
+            <pc:sldMk cId="2702794919" sldId="264"/>
+            <ac:spMk id="4" creationId="{24824917-9527-9A35-B85F-969A69D3B615}"/>
+          </ac:spMkLst>
+        </pc:spChg>
+        <pc:spChg chg="mod">
+          <ac:chgData name="Ayhan Karaman" userId="ec277a7f08761a62" providerId="LiveId" clId="{186F258A-E1B5-480C-AF8B-DFC9F8D7C6CF}" dt="2026-08-23T15:50:20.114" v="361" actId="20577"/>
+          <ac:spMkLst>
+            <pc:docMk/>
+            <pc:sldMk cId="2702794919" sldId="264"/>
+            <ac:spMk id="5" creationId="{DE25C558-0A44-EE66-F7E7-E1CB66230352}"/>
+          </ac:spMkLst>
+        </pc:spChg>
+        <pc:spChg chg="mod">
+          <ac:chgData name="Ayhan Karaman" userId="ec277a7f08761a62" providerId="LiveId" clId="{186F258A-E1B5-480C-AF8B-DFC9F8D7C6CF}" dt="2026-08-23T15:46:05.460" v="225" actId="20577"/>
+          <ac:spMkLst>
+            <pc:docMk/>
+            <pc:sldMk cId="2702794919" sldId="264"/>
+            <ac:spMk id="8" creationId="{30BE5D54-F616-EC32-A7B3-9070EBCFD1C5}"/>
+          </ac:spMkLst>
+        </pc:spChg>
+        <pc:spChg chg="mod">
+          <ac:chgData name="Ayhan Karaman" userId="ec277a7f08761a62" providerId="LiveId" clId="{186F258A-E1B5-480C-AF8B-DFC9F8D7C6CF}" dt="2026-08-23T15:48:04.219" v="265" actId="20577"/>
+          <ac:spMkLst>
+            <pc:docMk/>
+            <pc:sldMk cId="2702794919" sldId="264"/>
+            <ac:spMk id="9" creationId="{8960AD68-9065-3C5A-2910-54AD292D8F34}"/>
+          </ac:spMkLst>
+        </pc:spChg>
+      </pc:sldChg>
+      <pc:sldChg chg="addSp modSp add mod">
+        <pc:chgData name="Ayhan Karaman" userId="ec277a7f08761a62" providerId="LiveId" clId="{186F258A-E1B5-480C-AF8B-DFC9F8D7C6CF}" dt="2026-08-23T16:16:56.517" v="932" actId="20577"/>
+        <pc:sldMkLst>
+          <pc:docMk/>
+          <pc:sldMk cId="3510619492" sldId="265"/>
+        </pc:sldMkLst>
+        <pc:spChg chg="add mod">
+          <ac:chgData name="Ayhan Karaman" userId="ec277a7f08761a62" providerId="LiveId" clId="{186F258A-E1B5-480C-AF8B-DFC9F8D7C6CF}" dt="2026-08-23T16:02:04.526" v="612" actId="14100"/>
+          <ac:spMkLst>
+            <pc:docMk/>
+            <pc:sldMk cId="3510619492" sldId="265"/>
+            <ac:spMk id="2" creationId="{B2BAFADC-F4D7-1E24-FACD-44F09F60A8DC}"/>
+          </ac:spMkLst>
+        </pc:spChg>
+        <pc:spChg chg="mod">
+          <ac:chgData name="Ayhan Karaman" userId="ec277a7f08761a62" providerId="LiveId" clId="{186F258A-E1B5-480C-AF8B-DFC9F8D7C6CF}" dt="2026-08-23T16:16:56.517" v="932" actId="20577"/>
+          <ac:spMkLst>
+            <pc:docMk/>
+            <pc:sldMk cId="3510619492" sldId="265"/>
+            <ac:spMk id="4" creationId="{24824917-9527-9A35-B85F-969A69D3B615}"/>
+          </ac:spMkLst>
+        </pc:spChg>
+        <pc:spChg chg="mod">
+          <ac:chgData name="Ayhan Karaman" userId="ec277a7f08761a62" providerId="LiveId" clId="{186F258A-E1B5-480C-AF8B-DFC9F8D7C6CF}" dt="2026-08-23T15:56:38.192" v="567" actId="14100"/>
+          <ac:spMkLst>
+            <pc:docMk/>
+            <pc:sldMk cId="3510619492" sldId="265"/>
+            <ac:spMk id="5" creationId="{DE25C558-0A44-EE66-F7E7-E1CB66230352}"/>
+          </ac:spMkLst>
+        </pc:spChg>
+        <pc:spChg chg="mod">
+          <ac:chgData name="Ayhan Karaman" userId="ec277a7f08761a62" providerId="LiveId" clId="{186F258A-E1B5-480C-AF8B-DFC9F8D7C6CF}" dt="2026-08-23T16:04:23.726" v="745" actId="20577"/>
+          <ac:spMkLst>
+            <pc:docMk/>
+            <pc:sldMk cId="3510619492" sldId="265"/>
+            <ac:spMk id="7" creationId="{035ECAAF-6A44-611A-A787-ED2E34D3FDD0}"/>
+          </ac:spMkLst>
+        </pc:spChg>
+        <pc:spChg chg="mod">
+          <ac:chgData name="Ayhan Karaman" userId="ec277a7f08761a62" providerId="LiveId" clId="{186F258A-E1B5-480C-AF8B-DFC9F8D7C6CF}" dt="2026-08-23T15:53:24.985" v="406" actId="20577"/>
+          <ac:spMkLst>
+            <pc:docMk/>
+            <pc:sldMk cId="3510619492" sldId="265"/>
+            <ac:spMk id="8" creationId="{30BE5D54-F616-EC32-A7B3-9070EBCFD1C5}"/>
+          </ac:spMkLst>
+        </pc:spChg>
+        <pc:spChg chg="mod">
+          <ac:chgData name="Ayhan Karaman" userId="ec277a7f08761a62" providerId="LiveId" clId="{186F258A-E1B5-480C-AF8B-DFC9F8D7C6CF}" dt="2026-08-23T15:55:10.605" v="448" actId="20577"/>
+          <ac:spMkLst>
+            <pc:docMk/>
+            <pc:sldMk cId="3510619492" sldId="265"/>
+            <ac:spMk id="9" creationId="{8960AD68-9065-3C5A-2910-54AD292D8F34}"/>
+          </ac:spMkLst>
+        </pc:spChg>
+      </pc:sldChg>
+      <pc:sldChg chg="addSp delSp modSp add mod">
+        <pc:chgData name="Ayhan Karaman" userId="ec277a7f08761a62" providerId="LiveId" clId="{186F258A-E1B5-480C-AF8B-DFC9F8D7C6CF}" dt="2026-08-23T19:41:10.435" v="1961" actId="20577"/>
+        <pc:sldMkLst>
+          <pc:docMk/>
+          <pc:sldMk cId="2334713504" sldId="266"/>
+        </pc:sldMkLst>
+        <pc:spChg chg="add mod">
+          <ac:chgData name="Ayhan Karaman" userId="ec277a7f08761a62" providerId="LiveId" clId="{186F258A-E1B5-480C-AF8B-DFC9F8D7C6CF}" dt="2026-08-23T16:01:39.792" v="610" actId="14100"/>
+          <ac:spMkLst>
+            <pc:docMk/>
+            <pc:sldMk cId="2334713504" sldId="266"/>
+            <ac:spMk id="2" creationId="{4E134ADB-7908-A9FF-5CE0-9B05BB295681}"/>
+          </ac:spMkLst>
+        </pc:spChg>
+        <pc:spChg chg="add mod">
+          <ac:chgData name="Ayhan Karaman" userId="ec277a7f08761a62" providerId="LiveId" clId="{186F258A-E1B5-480C-AF8B-DFC9F8D7C6CF}" dt="2026-08-23T16:14:28.394" v="905" actId="20577"/>
+          <ac:spMkLst>
+            <pc:docMk/>
+            <pc:sldMk cId="2334713504" sldId="266"/>
+            <ac:spMk id="3" creationId="{16556FBF-2049-6A2C-26B7-A2557790BAD6}"/>
+          </ac:spMkLst>
+        </pc:spChg>
+        <pc:spChg chg="mod">
+          <ac:chgData name="Ayhan Karaman" userId="ec277a7f08761a62" providerId="LiveId" clId="{186F258A-E1B5-480C-AF8B-DFC9F8D7C6CF}" dt="2026-08-23T16:16:48.665" v="930" actId="20577"/>
+          <ac:spMkLst>
+            <pc:docMk/>
+            <pc:sldMk cId="2334713504" sldId="266"/>
+            <ac:spMk id="4" creationId="{24824917-9527-9A35-B85F-969A69D3B615}"/>
+          </ac:spMkLst>
+        </pc:spChg>
+        <pc:spChg chg="mod">
+          <ac:chgData name="Ayhan Karaman" userId="ec277a7f08761a62" providerId="LiveId" clId="{186F258A-E1B5-480C-AF8B-DFC9F8D7C6CF}" dt="2026-08-23T19:41:10.435" v="1961" actId="20577"/>
+          <ac:spMkLst>
+            <pc:docMk/>
+            <pc:sldMk cId="2334713504" sldId="266"/>
+            <ac:spMk id="5" creationId="{DE25C558-0A44-EE66-F7E7-E1CB66230352}"/>
+          </ac:spMkLst>
+        </pc:spChg>
+        <pc:spChg chg="mod">
+          <ac:chgData name="Ayhan Karaman" userId="ec277a7f08761a62" providerId="LiveId" clId="{186F258A-E1B5-480C-AF8B-DFC9F8D7C6CF}" dt="2026-08-23T19:40:24.014" v="1937" actId="20577"/>
+          <ac:spMkLst>
+            <pc:docMk/>
+            <pc:sldMk cId="2334713504" sldId="266"/>
+            <ac:spMk id="7" creationId="{035ECAAF-6A44-611A-A787-ED2E34D3FDD0}"/>
+          </ac:spMkLst>
+        </pc:spChg>
+        <pc:spChg chg="mod">
+          <ac:chgData name="Ayhan Karaman" userId="ec277a7f08761a62" providerId="LiveId" clId="{186F258A-E1B5-480C-AF8B-DFC9F8D7C6CF}" dt="2026-08-23T16:11:33.987" v="838" actId="1076"/>
+          <ac:spMkLst>
+            <pc:docMk/>
+            <pc:sldMk cId="2334713504" sldId="266"/>
+            <ac:spMk id="8" creationId="{30BE5D54-F616-EC32-A7B3-9070EBCFD1C5}"/>
+          </ac:spMkLst>
+        </pc:spChg>
+        <pc:spChg chg="del mod">
+          <ac:chgData name="Ayhan Karaman" userId="ec277a7f08761a62" providerId="LiveId" clId="{186F258A-E1B5-480C-AF8B-DFC9F8D7C6CF}" dt="2026-08-23T16:11:42.920" v="839" actId="478"/>
+          <ac:spMkLst>
+            <pc:docMk/>
+            <pc:sldMk cId="2334713504" sldId="266"/>
+            <ac:spMk id="9" creationId="{8960AD68-9065-3C5A-2910-54AD292D8F34}"/>
+          </ac:spMkLst>
+        </pc:spChg>
+      </pc:sldChg>
+      <pc:sldChg chg="modSp add mod ord">
+        <pc:chgData name="Ayhan Karaman" userId="ec277a7f08761a62" providerId="LiveId" clId="{186F258A-E1B5-480C-AF8B-DFC9F8D7C6CF}" dt="2026-08-23T19:25:11.701" v="1406" actId="20577"/>
+        <pc:sldMkLst>
+          <pc:docMk/>
+          <pc:sldMk cId="867089931" sldId="267"/>
+        </pc:sldMkLst>
+        <pc:spChg chg="mod">
+          <ac:chgData name="Ayhan Karaman" userId="ec277a7f08761a62" providerId="LiveId" clId="{186F258A-E1B5-480C-AF8B-DFC9F8D7C6CF}" dt="2026-08-23T16:18:09.922" v="943" actId="20577"/>
+          <ac:spMkLst>
+            <pc:docMk/>
+            <pc:sldMk cId="867089931" sldId="267"/>
+            <ac:spMk id="2" creationId="{F761A71F-29CB-9CF0-1D02-9D53577DA23F}"/>
+          </ac:spMkLst>
+        </pc:spChg>
+        <pc:spChg chg="mod">
+          <ac:chgData name="Ayhan Karaman" userId="ec277a7f08761a62" providerId="LiveId" clId="{186F258A-E1B5-480C-AF8B-DFC9F8D7C6CF}" dt="2026-08-23T16:20:42.567" v="965" actId="20577"/>
+          <ac:spMkLst>
+            <pc:docMk/>
+            <pc:sldMk cId="867089931" sldId="267"/>
+            <ac:spMk id="4" creationId="{24824917-9527-9A35-B85F-969A69D3B615}"/>
+          </ac:spMkLst>
+        </pc:spChg>
+        <pc:spChg chg="mod">
+          <ac:chgData name="Ayhan Karaman" userId="ec277a7f08761a62" providerId="LiveId" clId="{186F258A-E1B5-480C-AF8B-DFC9F8D7C6CF}" dt="2026-08-23T19:25:11.701" v="1406" actId="20577"/>
+          <ac:spMkLst>
+            <pc:docMk/>
+            <pc:sldMk cId="867089931" sldId="267"/>
+            <ac:spMk id="5" creationId="{DE25C558-0A44-EE66-F7E7-E1CB66230352}"/>
+          </ac:spMkLst>
+        </pc:spChg>
+        <pc:spChg chg="mod">
+          <ac:chgData name="Ayhan Karaman" userId="ec277a7f08761a62" providerId="LiveId" clId="{186F258A-E1B5-480C-AF8B-DFC9F8D7C6CF}" dt="2026-08-23T16:27:10.456" v="1053" actId="20577"/>
+          <ac:spMkLst>
+            <pc:docMk/>
+            <pc:sldMk cId="867089931" sldId="267"/>
+            <ac:spMk id="7" creationId="{035ECAAF-6A44-611A-A787-ED2E34D3FDD0}"/>
+          </ac:spMkLst>
+        </pc:spChg>
+        <pc:spChg chg="mod">
+          <ac:chgData name="Ayhan Karaman" userId="ec277a7f08761a62" providerId="LiveId" clId="{186F258A-E1B5-480C-AF8B-DFC9F8D7C6CF}" dt="2026-08-23T16:22:54.970" v="984" actId="20577"/>
+          <ac:spMkLst>
+            <pc:docMk/>
+            <pc:sldMk cId="867089931" sldId="267"/>
+            <ac:spMk id="8" creationId="{30BE5D54-F616-EC32-A7B3-9070EBCFD1C5}"/>
+          </ac:spMkLst>
+        </pc:spChg>
+        <pc:spChg chg="mod">
+          <ac:chgData name="Ayhan Karaman" userId="ec277a7f08761a62" providerId="LiveId" clId="{186F258A-E1B5-480C-AF8B-DFC9F8D7C6CF}" dt="2026-08-23T16:26:42.378" v="1038" actId="20577"/>
+          <ac:spMkLst>
+            <pc:docMk/>
+            <pc:sldMk cId="867089931" sldId="267"/>
+            <ac:spMk id="9" creationId="{8960AD68-9065-3C5A-2910-54AD292D8F34}"/>
+          </ac:spMkLst>
+        </pc:spChg>
+      </pc:sldChg>
+      <pc:sldChg chg="modSp add mod">
+        <pc:chgData name="Ayhan Karaman" userId="ec277a7f08761a62" providerId="LiveId" clId="{186F258A-E1B5-480C-AF8B-DFC9F8D7C6CF}" dt="2026-08-23T19:25:00.500" v="1397" actId="14100"/>
+        <pc:sldMkLst>
+          <pc:docMk/>
+          <pc:sldMk cId="2155816662" sldId="268"/>
+        </pc:sldMkLst>
+        <pc:spChg chg="mod">
+          <ac:chgData name="Ayhan Karaman" userId="ec277a7f08761a62" providerId="LiveId" clId="{186F258A-E1B5-480C-AF8B-DFC9F8D7C6CF}" dt="2026-08-23T19:11:36.824" v="1077" actId="20577"/>
+          <ac:spMkLst>
+            <pc:docMk/>
+            <pc:sldMk cId="2155816662" sldId="268"/>
+            <ac:spMk id="4" creationId="{24824917-9527-9A35-B85F-969A69D3B615}"/>
+          </ac:spMkLst>
+        </pc:spChg>
+        <pc:spChg chg="mod">
+          <ac:chgData name="Ayhan Karaman" userId="ec277a7f08761a62" providerId="LiveId" clId="{186F258A-E1B5-480C-AF8B-DFC9F8D7C6CF}" dt="2026-08-23T19:25:00.500" v="1397" actId="14100"/>
+          <ac:spMkLst>
+            <pc:docMk/>
+            <pc:sldMk cId="2155816662" sldId="268"/>
+            <ac:spMk id="5" creationId="{DE25C558-0A44-EE66-F7E7-E1CB66230352}"/>
+          </ac:spMkLst>
+        </pc:spChg>
+        <pc:spChg chg="mod">
+          <ac:chgData name="Ayhan Karaman" userId="ec277a7f08761a62" providerId="LiveId" clId="{186F258A-E1B5-480C-AF8B-DFC9F8D7C6CF}" dt="2026-08-23T19:18:54.826" v="1220" actId="20577"/>
+          <ac:spMkLst>
+            <pc:docMk/>
+            <pc:sldMk cId="2155816662" sldId="268"/>
+            <ac:spMk id="7" creationId="{035ECAAF-6A44-611A-A787-ED2E34D3FDD0}"/>
+          </ac:spMkLst>
+        </pc:spChg>
+        <pc:spChg chg="mod">
+          <ac:chgData name="Ayhan Karaman" userId="ec277a7f08761a62" providerId="LiveId" clId="{186F258A-E1B5-480C-AF8B-DFC9F8D7C6CF}" dt="2026-08-23T19:15:13.423" v="1151" actId="20577"/>
+          <ac:spMkLst>
+            <pc:docMk/>
+            <pc:sldMk cId="2155816662" sldId="268"/>
+            <ac:spMk id="8" creationId="{30BE5D54-F616-EC32-A7B3-9070EBCFD1C5}"/>
+          </ac:spMkLst>
+        </pc:spChg>
+        <pc:spChg chg="mod">
+          <ac:chgData name="Ayhan Karaman" userId="ec277a7f08761a62" providerId="LiveId" clId="{186F258A-E1B5-480C-AF8B-DFC9F8D7C6CF}" dt="2026-08-23T19:17:27.214" v="1200" actId="14100"/>
+          <ac:spMkLst>
+            <pc:docMk/>
+            <pc:sldMk cId="2155816662" sldId="268"/>
+            <ac:spMk id="9" creationId="{8960AD68-9065-3C5A-2910-54AD292D8F34}"/>
+          </ac:spMkLst>
+        </pc:spChg>
+      </pc:sldChg>
+      <pc:sldChg chg="modSp add mod">
+        <pc:chgData name="Ayhan Karaman" userId="ec277a7f08761a62" providerId="LiveId" clId="{186F258A-E1B5-480C-AF8B-DFC9F8D7C6CF}" dt="2026-08-23T19:24:44.321" v="1387" actId="14100"/>
+        <pc:sldMkLst>
+          <pc:docMk/>
+          <pc:sldMk cId="1671729752" sldId="269"/>
+        </pc:sldMkLst>
+        <pc:spChg chg="mod">
+          <ac:chgData name="Ayhan Karaman" userId="ec277a7f08761a62" providerId="LiveId" clId="{186F258A-E1B5-480C-AF8B-DFC9F8D7C6CF}" dt="2026-08-23T19:19:35.078" v="1227" actId="20577"/>
+          <ac:spMkLst>
+            <pc:docMk/>
+            <pc:sldMk cId="1671729752" sldId="269"/>
+            <ac:spMk id="4" creationId="{24824917-9527-9A35-B85F-969A69D3B615}"/>
+          </ac:spMkLst>
+        </pc:spChg>
+        <pc:spChg chg="mod">
+          <ac:chgData name="Ayhan Karaman" userId="ec277a7f08761a62" providerId="LiveId" clId="{186F258A-E1B5-480C-AF8B-DFC9F8D7C6CF}" dt="2026-08-23T19:24:44.321" v="1387" actId="14100"/>
+          <ac:spMkLst>
+            <pc:docMk/>
+            <pc:sldMk cId="1671729752" sldId="269"/>
+            <ac:spMk id="5" creationId="{DE25C558-0A44-EE66-F7E7-E1CB66230352}"/>
+          </ac:spMkLst>
+        </pc:spChg>
+        <pc:spChg chg="mod">
+          <ac:chgData name="Ayhan Karaman" userId="ec277a7f08761a62" providerId="LiveId" clId="{186F258A-E1B5-480C-AF8B-DFC9F8D7C6CF}" dt="2026-08-23T19:23:34.321" v="1314" actId="20577"/>
+          <ac:spMkLst>
+            <pc:docMk/>
+            <pc:sldMk cId="1671729752" sldId="269"/>
+            <ac:spMk id="7" creationId="{035ECAAF-6A44-611A-A787-ED2E34D3FDD0}"/>
+          </ac:spMkLst>
+        </pc:spChg>
+        <pc:spChg chg="mod">
+          <ac:chgData name="Ayhan Karaman" userId="ec277a7f08761a62" providerId="LiveId" clId="{186F258A-E1B5-480C-AF8B-DFC9F8D7C6CF}" dt="2026-08-23T19:21:22.542" v="1247" actId="20577"/>
+          <ac:spMkLst>
+            <pc:docMk/>
+            <pc:sldMk cId="1671729752" sldId="269"/>
+            <ac:spMk id="8" creationId="{30BE5D54-F616-EC32-A7B3-9070EBCFD1C5}"/>
+          </ac:spMkLst>
+        </pc:spChg>
+        <pc:spChg chg="mod">
+          <ac:chgData name="Ayhan Karaman" userId="ec277a7f08761a62" providerId="LiveId" clId="{186F258A-E1B5-480C-AF8B-DFC9F8D7C6CF}" dt="2026-08-23T19:23:05.871" v="1283" actId="1076"/>
+          <ac:spMkLst>
+            <pc:docMk/>
+            <pc:sldMk cId="1671729752" sldId="269"/>
+            <ac:spMk id="9" creationId="{8960AD68-9065-3C5A-2910-54AD292D8F34}"/>
+          </ac:spMkLst>
+        </pc:spChg>
+      </pc:sldChg>
+      <pc:sldChg chg="modSp add mod">
+        <pc:chgData name="Ayhan Karaman" userId="ec277a7f08761a62" providerId="LiveId" clId="{186F258A-E1B5-480C-AF8B-DFC9F8D7C6CF}" dt="2026-08-23T19:37:47.241" v="1865" actId="20577"/>
+        <pc:sldMkLst>
+          <pc:docMk/>
+          <pc:sldMk cId="230666391" sldId="270"/>
+        </pc:sldMkLst>
+        <pc:spChg chg="mod">
+          <ac:chgData name="Ayhan Karaman" userId="ec277a7f08761a62" providerId="LiveId" clId="{186F258A-E1B5-480C-AF8B-DFC9F8D7C6CF}" dt="2026-08-23T19:34:44.863" v="1730" actId="20577"/>
+          <ac:spMkLst>
+            <pc:docMk/>
+            <pc:sldMk cId="230666391" sldId="270"/>
+            <ac:spMk id="4" creationId="{24824917-9527-9A35-B85F-969A69D3B615}"/>
+          </ac:spMkLst>
+        </pc:spChg>
+        <pc:spChg chg="mod">
+          <ac:chgData name="Ayhan Karaman" userId="ec277a7f08761a62" providerId="LiveId" clId="{186F258A-E1B5-480C-AF8B-DFC9F8D7C6CF}" dt="2026-08-23T19:36:26.228" v="1811" actId="14100"/>
+          <ac:spMkLst>
+            <pc:docMk/>
+            <pc:sldMk cId="230666391" sldId="270"/>
+            <ac:spMk id="5" creationId="{DE25C558-0A44-EE66-F7E7-E1CB66230352}"/>
+          </ac:spMkLst>
+        </pc:spChg>
+        <pc:spChg chg="mod">
+          <ac:chgData name="Ayhan Karaman" userId="ec277a7f08761a62" providerId="LiveId" clId="{186F258A-E1B5-480C-AF8B-DFC9F8D7C6CF}" dt="2026-08-23T19:37:47.241" v="1865" actId="20577"/>
+          <ac:spMkLst>
+            <pc:docMk/>
+            <pc:sldMk cId="230666391" sldId="270"/>
+            <ac:spMk id="7" creationId="{035ECAAF-6A44-611A-A787-ED2E34D3FDD0}"/>
+          </ac:spMkLst>
+        </pc:spChg>
+      </pc:sldChg>
+      <pc:sldChg chg="modSp add mod">
+        <pc:chgData name="Ayhan Karaman" userId="ec277a7f08761a62" providerId="LiveId" clId="{186F258A-E1B5-480C-AF8B-DFC9F8D7C6CF}" dt="2026-08-23T19:34:07.771" v="1726" actId="20577"/>
+        <pc:sldMkLst>
+          <pc:docMk/>
+          <pc:sldMk cId="3596893070" sldId="271"/>
+        </pc:sldMkLst>
+        <pc:spChg chg="mod">
+          <ac:chgData name="Ayhan Karaman" userId="ec277a7f08761a62" providerId="LiveId" clId="{186F258A-E1B5-480C-AF8B-DFC9F8D7C6CF}" dt="2026-08-23T19:26:56.224" v="1440" actId="20577"/>
+          <ac:spMkLst>
+            <pc:docMk/>
+            <pc:sldMk cId="3596893070" sldId="271"/>
+            <ac:spMk id="4" creationId="{24824917-9527-9A35-B85F-969A69D3B615}"/>
+          </ac:spMkLst>
+        </pc:spChg>
+        <pc:spChg chg="mod">
+          <ac:chgData name="Ayhan Karaman" userId="ec277a7f08761a62" providerId="LiveId" clId="{186F258A-E1B5-480C-AF8B-DFC9F8D7C6CF}" dt="2026-08-23T19:28:22.304" v="1553" actId="20577"/>
+          <ac:spMkLst>
+            <pc:docMk/>
+            <pc:sldMk cId="3596893070" sldId="271"/>
+            <ac:spMk id="5" creationId="{DE25C558-0A44-EE66-F7E7-E1CB66230352}"/>
+          </ac:spMkLst>
+        </pc:spChg>
+        <pc:spChg chg="mod">
+          <ac:chgData name="Ayhan Karaman" userId="ec277a7f08761a62" providerId="LiveId" clId="{186F258A-E1B5-480C-AF8B-DFC9F8D7C6CF}" dt="2026-08-23T19:29:37.301" v="1637" actId="20577"/>
+          <ac:spMkLst>
+            <pc:docMk/>
+            <pc:sldMk cId="3596893070" sldId="271"/>
+            <ac:spMk id="7" creationId="{035ECAAF-6A44-611A-A787-ED2E34D3FDD0}"/>
+          </ac:spMkLst>
+        </pc:spChg>
+        <pc:spChg chg="mod">
+          <ac:chgData name="Ayhan Karaman" userId="ec277a7f08761a62" providerId="LiveId" clId="{186F258A-E1B5-480C-AF8B-DFC9F8D7C6CF}" dt="2026-08-23T19:31:52.917" v="1670" actId="20577"/>
+          <ac:spMkLst>
+            <pc:docMk/>
+            <pc:sldMk cId="3596893070" sldId="271"/>
+            <ac:spMk id="8" creationId="{30BE5D54-F616-EC32-A7B3-9070EBCFD1C5}"/>
+          </ac:spMkLst>
+        </pc:spChg>
+        <pc:spChg chg="mod">
+          <ac:chgData name="Ayhan Karaman" userId="ec277a7f08761a62" providerId="LiveId" clId="{186F258A-E1B5-480C-AF8B-DFC9F8D7C6CF}" dt="2026-08-23T19:34:07.771" v="1726" actId="20577"/>
+          <ac:spMkLst>
+            <pc:docMk/>
+            <pc:sldMk cId="3596893070" sldId="271"/>
+            <ac:spMk id="9" creationId="{8960AD68-9065-3C5A-2910-54AD292D8F34}"/>
+          </ac:spMkLst>
+        </pc:spChg>
+      </pc:sldChg>
+      <pc:sldChg chg="modSp add mod">
+        <pc:chgData name="Ayhan Karaman" userId="ec277a7f08761a62" providerId="LiveId" clId="{186F258A-E1B5-480C-AF8B-DFC9F8D7C6CF}" dt="2026-08-23T19:56:13.874" v="2332" actId="20577"/>
+        <pc:sldMkLst>
+          <pc:docMk/>
+          <pc:sldMk cId="4265281997" sldId="272"/>
+        </pc:sldMkLst>
+        <pc:spChg chg="mod">
+          <ac:chgData name="Ayhan Karaman" userId="ec277a7f08761a62" providerId="LiveId" clId="{186F258A-E1B5-480C-AF8B-DFC9F8D7C6CF}" dt="2026-08-23T19:42:41.947" v="1966" actId="208"/>
+          <ac:spMkLst>
+            <pc:docMk/>
+            <pc:sldMk cId="4265281997" sldId="272"/>
+            <ac:spMk id="2" creationId="{F761A71F-29CB-9CF0-1D02-9D53577DA23F}"/>
+          </ac:spMkLst>
+        </pc:spChg>
+        <pc:spChg chg="mod">
+          <ac:chgData name="Ayhan Karaman" userId="ec277a7f08761a62" providerId="LiveId" clId="{186F258A-E1B5-480C-AF8B-DFC9F8D7C6CF}" dt="2026-08-23T19:54:00.110" v="2267" actId="1076"/>
+          <ac:spMkLst>
+            <pc:docMk/>
+            <pc:sldMk cId="4265281997" sldId="272"/>
+            <ac:spMk id="4" creationId="{24824917-9527-9A35-B85F-969A69D3B615}"/>
+          </ac:spMkLst>
+        </pc:spChg>
+        <pc:spChg chg="mod">
+          <ac:chgData name="Ayhan Karaman" userId="ec277a7f08761a62" providerId="LiveId" clId="{186F258A-E1B5-480C-AF8B-DFC9F8D7C6CF}" dt="2026-08-23T19:52:24.053" v="2249" actId="1076"/>
+          <ac:spMkLst>
+            <pc:docMk/>
+            <pc:sldMk cId="4265281997" sldId="272"/>
+            <ac:spMk id="5" creationId="{DE25C558-0A44-EE66-F7E7-E1CB66230352}"/>
+          </ac:spMkLst>
+        </pc:spChg>
+        <pc:spChg chg="mod">
+          <ac:chgData name="Ayhan Karaman" userId="ec277a7f08761a62" providerId="LiveId" clId="{186F258A-E1B5-480C-AF8B-DFC9F8D7C6CF}" dt="2026-08-23T19:52:16.251" v="2247" actId="1076"/>
+          <ac:spMkLst>
+            <pc:docMk/>
+            <pc:sldMk cId="4265281997" sldId="272"/>
+            <ac:spMk id="7" creationId="{035ECAAF-6A44-611A-A787-ED2E34D3FDD0}"/>
+          </ac:spMkLst>
+        </pc:spChg>
+        <pc:spChg chg="mod">
+          <ac:chgData name="Ayhan Karaman" userId="ec277a7f08761a62" providerId="LiveId" clId="{186F258A-E1B5-480C-AF8B-DFC9F8D7C6CF}" dt="2026-08-23T19:54:04.789" v="2268" actId="14100"/>
+          <ac:spMkLst>
+            <pc:docMk/>
+            <pc:sldMk cId="4265281997" sldId="272"/>
+            <ac:spMk id="8" creationId="{30BE5D54-F616-EC32-A7B3-9070EBCFD1C5}"/>
+          </ac:spMkLst>
+        </pc:spChg>
+        <pc:spChg chg="mod">
+          <ac:chgData name="Ayhan Karaman" userId="ec277a7f08761a62" providerId="LiveId" clId="{186F258A-E1B5-480C-AF8B-DFC9F8D7C6CF}" dt="2026-08-23T19:56:13.874" v="2332" actId="20577"/>
+          <ac:spMkLst>
+            <pc:docMk/>
+            <pc:sldMk cId="4265281997" sldId="272"/>
+            <ac:spMk id="9" creationId="{8960AD68-9065-3C5A-2910-54AD292D8F34}"/>
+          </ac:spMkLst>
+        </pc:spChg>
+      </pc:sldChg>
+      <pc:sldChg chg="modSp add mod">
+        <pc:chgData name="Ayhan Karaman" userId="ec277a7f08761a62" providerId="LiveId" clId="{186F258A-E1B5-480C-AF8B-DFC9F8D7C6CF}" dt="2026-08-23T20:05:29.985" v="2442" actId="14100"/>
+        <pc:sldMkLst>
+          <pc:docMk/>
+          <pc:sldMk cId="848089597" sldId="273"/>
+        </pc:sldMkLst>
+        <pc:spChg chg="mod">
+          <ac:chgData name="Ayhan Karaman" userId="ec277a7f08761a62" providerId="LiveId" clId="{186F258A-E1B5-480C-AF8B-DFC9F8D7C6CF}" dt="2026-08-23T20:00:51.907" v="2389" actId="14100"/>
+          <ac:spMkLst>
+            <pc:docMk/>
+            <pc:sldMk cId="848089597" sldId="273"/>
+            <ac:spMk id="4" creationId="{24824917-9527-9A35-B85F-969A69D3B615}"/>
+          </ac:spMkLst>
+        </pc:spChg>
+        <pc:spChg chg="mod">
+          <ac:chgData name="Ayhan Karaman" userId="ec277a7f08761a62" providerId="LiveId" clId="{186F258A-E1B5-480C-AF8B-DFC9F8D7C6CF}" dt="2026-08-23T19:50:21.126" v="2198" actId="14100"/>
+          <ac:spMkLst>
+            <pc:docMk/>
+            <pc:sldMk cId="848089597" sldId="273"/>
+            <ac:spMk id="5" creationId="{DE25C558-0A44-EE66-F7E7-E1CB66230352}"/>
+          </ac:spMkLst>
+        </pc:spChg>
+        <pc:spChg chg="mod">
+          <ac:chgData name="Ayhan Karaman" userId="ec277a7f08761a62" providerId="LiveId" clId="{186F258A-E1B5-480C-AF8B-DFC9F8D7C6CF}" dt="2026-08-23T20:05:29.985" v="2442" actId="14100"/>
+          <ac:spMkLst>
+            <pc:docMk/>
+            <pc:sldMk cId="848089597" sldId="273"/>
+            <ac:spMk id="7" creationId="{035ECAAF-6A44-611A-A787-ED2E34D3FDD0}"/>
+          </ac:spMkLst>
+        </pc:spChg>
+        <pc:spChg chg="mod">
+          <ac:chgData name="Ayhan Karaman" userId="ec277a7f08761a62" providerId="LiveId" clId="{186F258A-E1B5-480C-AF8B-DFC9F8D7C6CF}" dt="2026-08-23T20:00:56.381" v="2390" actId="14100"/>
+          <ac:spMkLst>
+            <pc:docMk/>
+            <pc:sldMk cId="848089597" sldId="273"/>
+            <ac:spMk id="8" creationId="{30BE5D54-F616-EC32-A7B3-9070EBCFD1C5}"/>
+          </ac:spMkLst>
+        </pc:spChg>
+        <pc:spChg chg="mod">
+          <ac:chgData name="Ayhan Karaman" userId="ec277a7f08761a62" providerId="LiveId" clId="{186F258A-E1B5-480C-AF8B-DFC9F8D7C6CF}" dt="2026-08-23T20:05:18.915" v="2441" actId="1076"/>
+          <ac:spMkLst>
+            <pc:docMk/>
+            <pc:sldMk cId="848089597" sldId="273"/>
+            <ac:spMk id="9" creationId="{8960AD68-9065-3C5A-2910-54AD292D8F34}"/>
+          </ac:spMkLst>
+        </pc:spChg>
+      </pc:sldChg>
+      <pc:sldChg chg="modSp add mod">
+        <pc:chgData name="Ayhan Karaman" userId="ec277a7f08761a62" providerId="LiveId" clId="{186F258A-E1B5-480C-AF8B-DFC9F8D7C6CF}" dt="2026-08-23T20:16:02.049" v="2686" actId="20577"/>
+        <pc:sldMkLst>
+          <pc:docMk/>
+          <pc:sldMk cId="4006609543" sldId="274"/>
+        </pc:sldMkLst>
+        <pc:spChg chg="mod">
+          <ac:chgData name="Ayhan Karaman" userId="ec277a7f08761a62" providerId="LiveId" clId="{186F258A-E1B5-480C-AF8B-DFC9F8D7C6CF}" dt="2026-08-23T20:08:26.572" v="2602" actId="14100"/>
+          <ac:spMkLst>
+            <pc:docMk/>
+            <pc:sldMk cId="4006609543" sldId="274"/>
+            <ac:spMk id="4" creationId="{24824917-9527-9A35-B85F-969A69D3B615}"/>
+          </ac:spMkLst>
+        </pc:spChg>
+        <pc:spChg chg="mod">
+          <ac:chgData name="Ayhan Karaman" userId="ec277a7f08761a62" providerId="LiveId" clId="{186F258A-E1B5-480C-AF8B-DFC9F8D7C6CF}" dt="2026-08-23T20:07:06.631" v="2500" actId="20577"/>
+          <ac:spMkLst>
+            <pc:docMk/>
+            <pc:sldMk cId="4006609543" sldId="274"/>
+            <ac:spMk id="5" creationId="{DE25C558-0A44-EE66-F7E7-E1CB66230352}"/>
+          </ac:spMkLst>
+        </pc:spChg>
+        <pc:spChg chg="mod">
+          <ac:chgData name="Ayhan Karaman" userId="ec277a7f08761a62" providerId="LiveId" clId="{186F258A-E1B5-480C-AF8B-DFC9F8D7C6CF}" dt="2026-08-23T20:16:02.049" v="2686" actId="20577"/>
+          <ac:spMkLst>
+            <pc:docMk/>
+            <pc:sldMk cId="4006609543" sldId="274"/>
+            <ac:spMk id="7" creationId="{035ECAAF-6A44-611A-A787-ED2E34D3FDD0}"/>
+          </ac:spMkLst>
+        </pc:spChg>
+        <pc:spChg chg="mod">
+          <ac:chgData name="Ayhan Karaman" userId="ec277a7f08761a62" providerId="LiveId" clId="{186F258A-E1B5-480C-AF8B-DFC9F8D7C6CF}" dt="2026-08-23T20:12:25.280" v="2629" actId="20577"/>
+          <ac:spMkLst>
+            <pc:docMk/>
+            <pc:sldMk cId="4006609543" sldId="274"/>
+            <ac:spMk id="8" creationId="{30BE5D54-F616-EC32-A7B3-9070EBCFD1C5}"/>
+          </ac:spMkLst>
+        </pc:spChg>
+        <pc:spChg chg="mod">
+          <ac:chgData name="Ayhan Karaman" userId="ec277a7f08761a62" providerId="LiveId" clId="{186F258A-E1B5-480C-AF8B-DFC9F8D7C6CF}" dt="2026-08-23T20:15:36.834" v="2685" actId="14100"/>
+          <ac:spMkLst>
+            <pc:docMk/>
+            <pc:sldMk cId="4006609543" sldId="274"/>
+            <ac:spMk id="9" creationId="{8960AD68-9065-3C5A-2910-54AD292D8F34}"/>
+          </ac:spMkLst>
+        </pc:spChg>
+      </pc:sldChg>
+      <pc:sldChg chg="modSp add mod">
+        <pc:chgData name="Ayhan Karaman" userId="ec277a7f08761a62" providerId="LiveId" clId="{186F258A-E1B5-480C-AF8B-DFC9F8D7C6CF}" dt="2026-08-23T20:24:25.455" v="2964" actId="14100"/>
+        <pc:sldMkLst>
+          <pc:docMk/>
+          <pc:sldMk cId="975404287" sldId="275"/>
+        </pc:sldMkLst>
+        <pc:spChg chg="mod">
+          <ac:chgData name="Ayhan Karaman" userId="ec277a7f08761a62" providerId="LiveId" clId="{186F258A-E1B5-480C-AF8B-DFC9F8D7C6CF}" dt="2026-08-23T19:48:24.647" v="2068" actId="20577"/>
+          <ac:spMkLst>
+            <pc:docMk/>
+            <pc:sldMk cId="975404287" sldId="275"/>
+            <ac:spMk id="4" creationId="{24824917-9527-9A35-B85F-969A69D3B615}"/>
+          </ac:spMkLst>
+        </pc:spChg>
+        <pc:spChg chg="mod">
+          <ac:chgData name="Ayhan Karaman" userId="ec277a7f08761a62" providerId="LiveId" clId="{186F258A-E1B5-480C-AF8B-DFC9F8D7C6CF}" dt="2026-08-23T20:18:21.649" v="2796" actId="1076"/>
+          <ac:spMkLst>
+            <pc:docMk/>
+            <pc:sldMk cId="975404287" sldId="275"/>
+            <ac:spMk id="5" creationId="{DE25C558-0A44-EE66-F7E7-E1CB66230352}"/>
+          </ac:spMkLst>
+        </pc:spChg>
+        <pc:spChg chg="mod">
+          <ac:chgData name="Ayhan Karaman" userId="ec277a7f08761a62" providerId="LiveId" clId="{186F258A-E1B5-480C-AF8B-DFC9F8D7C6CF}" dt="2026-08-23T20:24:25.455" v="2964" actId="14100"/>
+          <ac:spMkLst>
+            <pc:docMk/>
+            <pc:sldMk cId="975404287" sldId="275"/>
+            <ac:spMk id="7" creationId="{035ECAAF-6A44-611A-A787-ED2E34D3FDD0}"/>
+          </ac:spMkLst>
+        </pc:spChg>
+        <pc:spChg chg="mod">
+          <ac:chgData name="Ayhan Karaman" userId="ec277a7f08761a62" providerId="LiveId" clId="{186F258A-E1B5-480C-AF8B-DFC9F8D7C6CF}" dt="2026-08-23T20:20:01.042" v="2812" actId="14100"/>
+          <ac:spMkLst>
+            <pc:docMk/>
+            <pc:sldMk cId="975404287" sldId="275"/>
+            <ac:spMk id="8" creationId="{30BE5D54-F616-EC32-A7B3-9070EBCFD1C5}"/>
+          </ac:spMkLst>
+        </pc:spChg>
+        <pc:spChg chg="mod">
+          <ac:chgData name="Ayhan Karaman" userId="ec277a7f08761a62" providerId="LiveId" clId="{186F258A-E1B5-480C-AF8B-DFC9F8D7C6CF}" dt="2026-08-23T20:22:15.488" v="2851" actId="1076"/>
+          <ac:spMkLst>
+            <pc:docMk/>
+            <pc:sldMk cId="975404287" sldId="275"/>
+            <ac:spMk id="9" creationId="{8960AD68-9065-3C5A-2910-54AD292D8F34}"/>
+          </ac:spMkLst>
+        </pc:spChg>
+      </pc:sldChg>
+    </pc:docChg>
+  </pc:docChgLst>
+</pc:chgInfo>
+</file>
+
 <file path=ppt/slideLayouts/slideLayout1.xml><?xml version="1.0" encoding="utf-8"?>
 <p:sldLayout xmlns:a="http://schemas.openxmlformats.org/drawingml/2006/main" xmlns:r="http://schemas.openxmlformats.org/officeDocument/2006/relationships" xmlns:p="http://schemas.openxmlformats.org/presentationml/2006/main" type="title" preserve="1">
   <p:cSld name="Başlık Slaydı">
@@ -266,7 +927,7 @@
           <a:p>
             <a:fld id="{20A09914-A052-41C0-AB34-A4555936D3D8}" type="datetimeFigureOut">
               <a:rPr lang="tr-TR" smtClean="0"/>
-              <a:t>20.08.2026</a:t>
+              <a:t>23.08.2026</a:t>
             </a:fld>
             <a:endParaRPr lang="tr-TR"/>
           </a:p>
@@ -464,7 +1125,7 @@
           <a:p>
             <a:fld id="{20A09914-A052-41C0-AB34-A4555936D3D8}" type="datetimeFigureOut">
               <a:rPr lang="tr-TR" smtClean="0"/>
-              <a:t>20.08.2026</a:t>
+              <a:t>23.08.2026</a:t>
             </a:fld>
             <a:endParaRPr lang="tr-TR"/>
           </a:p>
@@ -672,7 +1333,7 @@
           <a:p>
             <a:fld id="{20A09914-A052-41C0-AB34-A4555936D3D8}" type="datetimeFigureOut">
               <a:rPr lang="tr-TR" smtClean="0"/>
-              <a:t>20.08.2026</a:t>
+              <a:t>23.08.2026</a:t>
             </a:fld>
             <a:endParaRPr lang="tr-TR"/>
           </a:p>
@@ -870,7 +1531,7 @@
           <a:p>
             <a:fld id="{20A09914-A052-41C0-AB34-A4555936D3D8}" type="datetimeFigureOut">
               <a:rPr lang="tr-TR" smtClean="0"/>
-              <a:t>20.08.2026</a:t>
+              <a:t>23.08.2026</a:t>
             </a:fld>
             <a:endParaRPr lang="tr-TR"/>
           </a:p>
@@ -1145,7 +1806,7 @@
           <a:p>
             <a:fld id="{20A09914-A052-41C0-AB34-A4555936D3D8}" type="datetimeFigureOut">
               <a:rPr lang="tr-TR" smtClean="0"/>
-              <a:t>20.08.2026</a:t>
+              <a:t>23.08.2026</a:t>
             </a:fld>
             <a:endParaRPr lang="tr-TR"/>
           </a:p>
@@ -1410,7 +2071,7 @@
           <a:p>
             <a:fld id="{20A09914-A052-41C0-AB34-A4555936D3D8}" type="datetimeFigureOut">
               <a:rPr lang="tr-TR" smtClean="0"/>
-              <a:t>20.08.2026</a:t>
+              <a:t>23.08.2026</a:t>
             </a:fld>
             <a:endParaRPr lang="tr-TR"/>
           </a:p>
@@ -1822,7 +2483,7 @@
           <a:p>
             <a:fld id="{20A09914-A052-41C0-AB34-A4555936D3D8}" type="datetimeFigureOut">
               <a:rPr lang="tr-TR" smtClean="0"/>
-              <a:t>20.08.2026</a:t>
+              <a:t>23.08.2026</a:t>
             </a:fld>
             <a:endParaRPr lang="tr-TR"/>
           </a:p>
@@ -1963,7 +2624,7 @@
           <a:p>
             <a:fld id="{20A09914-A052-41C0-AB34-A4555936D3D8}" type="datetimeFigureOut">
               <a:rPr lang="tr-TR" smtClean="0"/>
-              <a:t>20.08.2026</a:t>
+              <a:t>23.08.2026</a:t>
             </a:fld>
             <a:endParaRPr lang="tr-TR"/>
           </a:p>
@@ -2076,7 +2737,7 @@
           <a:p>
             <a:fld id="{20A09914-A052-41C0-AB34-A4555936D3D8}" type="datetimeFigureOut">
               <a:rPr lang="tr-TR" smtClean="0"/>
-              <a:t>20.08.2026</a:t>
+              <a:t>23.08.2026</a:t>
             </a:fld>
             <a:endParaRPr lang="tr-TR"/>
           </a:p>
@@ -2387,7 +3048,7 @@
           <a:p>
             <a:fld id="{20A09914-A052-41C0-AB34-A4555936D3D8}" type="datetimeFigureOut">
               <a:rPr lang="tr-TR" smtClean="0"/>
-              <a:t>20.08.2026</a:t>
+              <a:t>23.08.2026</a:t>
             </a:fld>
             <a:endParaRPr lang="tr-TR"/>
           </a:p>
@@ -2675,7 +3336,7 @@
           <a:p>
             <a:fld id="{20A09914-A052-41C0-AB34-A4555936D3D8}" type="datetimeFigureOut">
               <a:rPr lang="tr-TR" smtClean="0"/>
-              <a:t>20.08.2026</a:t>
+              <a:t>23.08.2026</a:t>
             </a:fld>
             <a:endParaRPr lang="tr-TR"/>
           </a:p>
@@ -2916,7 +3577,7 @@
           <a:p>
             <a:fld id="{20A09914-A052-41C0-AB34-A4555936D3D8}" type="datetimeFigureOut">
               <a:rPr lang="tr-TR" smtClean="0"/>
-              <a:t>20.08.2026</a:t>
+              <a:t>23.08.2026</a:t>
             </a:fld>
             <a:endParaRPr lang="tr-TR"/>
           </a:p>
@@ -5003,7 +5664,7 @@
 </p:sld>
 </file>
 
-<file path=ppt/slides/slide2.xml><?xml version="1.0" encoding="utf-8"?>
+<file path=ppt/slides/slide10.xml><?xml version="1.0" encoding="utf-8"?>
 <p:sld xmlns:a="http://schemas.openxmlformats.org/drawingml/2006/main" xmlns:r="http://schemas.openxmlformats.org/officeDocument/2006/relationships" xmlns:p="http://schemas.openxmlformats.org/presentationml/2006/main">
   <p:cSld>
     <p:spTree>
@@ -5071,6 +5732,6096 @@
             <a:pPr algn="ctr"/>
             <a:r>
               <a:rPr lang="tr-TR" dirty="0"/>
+              <a:t>SÜLASİ MEZİD 1. NEVİ</a:t>
+            </a:r>
+          </a:p>
+          <a:p>
+            <a:pPr algn="ctr"/>
+            <a:r>
+              <a:rPr lang="tr-TR" dirty="0"/>
+              <a:t>2. BAB</a:t>
+            </a:r>
+          </a:p>
+          <a:p>
+            <a:pPr algn="ctr"/>
+            <a:r>
+              <a:rPr lang="ar-AE" sz="3200" b="1" dirty="0"/>
+              <a:t>تَفْعِيلْ</a:t>
+            </a:r>
+            <a:endParaRPr lang="tr-TR" sz="3200" b="1" dirty="0"/>
+          </a:p>
+        </p:txBody>
+      </p:sp>
+      <p:sp>
+        <p:nvSpPr>
+          <p:cNvPr id="5" name="Dikdörtgen: Üst Köşeleri Yuvarlatılmış 4">
+            <a:extLst>
+              <a:ext uri="{FF2B5EF4-FFF2-40B4-BE49-F238E27FC236}">
+                <a16:creationId xmlns:a16="http://schemas.microsoft.com/office/drawing/2014/main" id="{DE25C558-0A44-EE66-F7E7-E1CB66230352}"/>
+              </a:ext>
+            </a:extLst>
+          </p:cNvPr>
+          <p:cNvSpPr/>
+          <p:nvPr/>
+        </p:nvSpPr>
+        <p:spPr>
+          <a:xfrm>
+            <a:off x="4241320" y="1080655"/>
+            <a:ext cx="3709359" cy="1233919"/>
+          </a:xfrm>
+          <a:prstGeom prst="round2SameRect">
+            <a:avLst>
+              <a:gd name="adj1" fmla="val 0"/>
+              <a:gd name="adj2" fmla="val 0"/>
+            </a:avLst>
+          </a:prstGeom>
+          <a:ln>
+            <a:solidFill>
+              <a:schemeClr val="tx2">
+                <a:lumMod val="50000"/>
+                <a:lumOff val="50000"/>
+              </a:schemeClr>
+            </a:solidFill>
+          </a:ln>
+          <a:effectLst>
+            <a:glow rad="63500">
+              <a:schemeClr val="accent1">
+                <a:satMod val="175000"/>
+                <a:alpha val="40000"/>
+              </a:schemeClr>
+            </a:glow>
+          </a:effectLst>
+        </p:spPr>
+        <p:style>
+          <a:lnRef idx="2">
+            <a:schemeClr val="accent1"/>
+          </a:lnRef>
+          <a:fillRef idx="1">
+            <a:schemeClr val="lt1"/>
+          </a:fillRef>
+          <a:effectRef idx="0">
+            <a:schemeClr val="accent1"/>
+          </a:effectRef>
+          <a:fontRef idx="minor">
+            <a:schemeClr val="dk1"/>
+          </a:fontRef>
+        </p:style>
+        <p:txBody>
+          <a:bodyPr lIns="216000" tIns="72000" rIns="288000" bIns="288000" rtlCol="0" anchor="t"/>
+          <a:lstStyle/>
+          <a:p>
+            <a:r>
+              <a:rPr lang="tr-TR" dirty="0">
+                <a:solidFill>
+                  <a:srgbClr val="C00000"/>
+                </a:solidFill>
+              </a:rPr>
+              <a:t>ALAMETİ: </a:t>
+            </a:r>
+            <a:r>
+              <a:rPr lang="tr-TR" dirty="0" err="1">
+                <a:solidFill>
+                  <a:schemeClr val="tx1"/>
+                </a:solidFill>
+              </a:rPr>
+              <a:t>Fael</a:t>
+            </a:r>
+            <a:r>
+              <a:rPr lang="tr-TR" dirty="0">
+                <a:solidFill>
+                  <a:schemeClr val="tx1"/>
+                </a:solidFill>
+              </a:rPr>
+              <a:t> fiili ile </a:t>
+            </a:r>
+            <a:r>
+              <a:rPr lang="tr-TR" dirty="0" err="1">
+                <a:solidFill>
+                  <a:schemeClr val="tx1"/>
+                </a:solidFill>
+              </a:rPr>
+              <a:t>Aynel</a:t>
+            </a:r>
+            <a:r>
+              <a:rPr lang="tr-TR" dirty="0">
+                <a:solidFill>
+                  <a:schemeClr val="tx1"/>
+                </a:solidFill>
+              </a:rPr>
+              <a:t> Fiili arasına </a:t>
+            </a:r>
+            <a:r>
+              <a:rPr lang="tr-TR" dirty="0" err="1">
+                <a:solidFill>
+                  <a:schemeClr val="tx1"/>
+                </a:solidFill>
+              </a:rPr>
+              <a:t>aynel</a:t>
+            </a:r>
+            <a:r>
+              <a:rPr lang="tr-TR" dirty="0">
+                <a:solidFill>
+                  <a:schemeClr val="tx1"/>
+                </a:solidFill>
+              </a:rPr>
+              <a:t> fiili cinsinden bir harf ziyadesi ile mazisinin 4 harf üzere olmasıdır.</a:t>
+            </a:r>
+            <a:endParaRPr lang="tr-TR" dirty="0">
+              <a:solidFill>
+                <a:srgbClr val="C00000"/>
+              </a:solidFill>
+            </a:endParaRPr>
+          </a:p>
+        </p:txBody>
+      </p:sp>
+      <p:sp>
+        <p:nvSpPr>
+          <p:cNvPr id="7" name="Dikdörtgen: Üst Köşeleri Yuvarlatılmış 6">
+            <a:extLst>
+              <a:ext uri="{FF2B5EF4-FFF2-40B4-BE49-F238E27FC236}">
+                <a16:creationId xmlns:a16="http://schemas.microsoft.com/office/drawing/2014/main" id="{035ECAAF-6A44-611A-A787-ED2E34D3FDD0}"/>
+              </a:ext>
+            </a:extLst>
+          </p:cNvPr>
+          <p:cNvSpPr/>
+          <p:nvPr/>
+        </p:nvSpPr>
+        <p:spPr>
+          <a:xfrm>
+            <a:off x="240820" y="2868372"/>
+            <a:ext cx="3709359" cy="1121255"/>
+          </a:xfrm>
+          <a:prstGeom prst="round2SameRect">
+            <a:avLst>
+              <a:gd name="adj1" fmla="val 0"/>
+              <a:gd name="adj2" fmla="val 0"/>
+            </a:avLst>
+          </a:prstGeom>
+          <a:ln>
+            <a:solidFill>
+              <a:schemeClr val="tx2">
+                <a:lumMod val="50000"/>
+                <a:lumOff val="50000"/>
+              </a:schemeClr>
+            </a:solidFill>
+          </a:ln>
+          <a:effectLst>
+            <a:glow rad="63500">
+              <a:schemeClr val="accent1">
+                <a:satMod val="175000"/>
+                <a:alpha val="40000"/>
+              </a:schemeClr>
+            </a:glow>
+          </a:effectLst>
+        </p:spPr>
+        <p:style>
+          <a:lnRef idx="2">
+            <a:schemeClr val="accent1"/>
+          </a:lnRef>
+          <a:fillRef idx="1">
+            <a:schemeClr val="lt1"/>
+          </a:fillRef>
+          <a:effectRef idx="0">
+            <a:schemeClr val="accent1"/>
+          </a:effectRef>
+          <a:fontRef idx="minor">
+            <a:schemeClr val="dk1"/>
+          </a:fontRef>
+        </p:style>
+        <p:txBody>
+          <a:bodyPr lIns="216000" tIns="72000" rIns="288000" bIns="288000" rtlCol="0" anchor="t"/>
+          <a:lstStyle/>
+          <a:p>
+            <a:r>
+              <a:rPr lang="tr-TR" dirty="0">
+                <a:solidFill>
+                  <a:srgbClr val="C00000"/>
+                </a:solidFill>
+              </a:rPr>
+              <a:t>Binası: </a:t>
+            </a:r>
+            <a:r>
+              <a:rPr lang="tr-TR" dirty="0">
+                <a:solidFill>
+                  <a:schemeClr val="tx1"/>
+                </a:solidFill>
+              </a:rPr>
+              <a:t>Teksir (Çokluk) İçindir.</a:t>
+            </a:r>
+          </a:p>
+          <a:p>
+            <a:r>
+              <a:rPr lang="tr-TR" dirty="0">
+                <a:solidFill>
+                  <a:schemeClr val="tx1"/>
+                </a:solidFill>
+              </a:rPr>
+              <a:t>Fiil veya Fail  veya Meful de bulunabilir.</a:t>
+            </a:r>
+            <a:endParaRPr lang="tr-TR" dirty="0">
+              <a:solidFill>
+                <a:srgbClr val="C00000"/>
+              </a:solidFill>
+            </a:endParaRPr>
+          </a:p>
+        </p:txBody>
+      </p:sp>
+      <p:sp>
+        <p:nvSpPr>
+          <p:cNvPr id="8" name="Dikdörtgen: Üst Köşeleri Yuvarlatılmış 7">
+            <a:extLst>
+              <a:ext uri="{FF2B5EF4-FFF2-40B4-BE49-F238E27FC236}">
+                <a16:creationId xmlns:a16="http://schemas.microsoft.com/office/drawing/2014/main" id="{30BE5D54-F616-EC32-A7B3-9070EBCFD1C5}"/>
+              </a:ext>
+            </a:extLst>
+          </p:cNvPr>
+          <p:cNvSpPr/>
+          <p:nvPr/>
+        </p:nvSpPr>
+        <p:spPr>
+          <a:xfrm>
+            <a:off x="8241821" y="2868371"/>
+            <a:ext cx="3709359" cy="1121256"/>
+          </a:xfrm>
+          <a:prstGeom prst="round2SameRect">
+            <a:avLst>
+              <a:gd name="adj1" fmla="val 0"/>
+              <a:gd name="adj2" fmla="val 0"/>
+            </a:avLst>
+          </a:prstGeom>
+          <a:ln>
+            <a:solidFill>
+              <a:schemeClr val="tx2">
+                <a:lumMod val="50000"/>
+                <a:lumOff val="50000"/>
+              </a:schemeClr>
+            </a:solidFill>
+          </a:ln>
+          <a:effectLst>
+            <a:glow rad="63500">
+              <a:schemeClr val="accent1">
+                <a:satMod val="175000"/>
+                <a:alpha val="40000"/>
+              </a:schemeClr>
+            </a:glow>
+          </a:effectLst>
+        </p:spPr>
+        <p:style>
+          <a:lnRef idx="2">
+            <a:schemeClr val="accent1"/>
+          </a:lnRef>
+          <a:fillRef idx="1">
+            <a:schemeClr val="lt1"/>
+          </a:fillRef>
+          <a:effectRef idx="0">
+            <a:schemeClr val="accent1"/>
+          </a:effectRef>
+          <a:fontRef idx="minor">
+            <a:schemeClr val="dk1"/>
+          </a:fontRef>
+        </p:style>
+        <p:txBody>
+          <a:bodyPr lIns="216000" tIns="72000" rIns="288000" bIns="288000" rtlCol="0" anchor="t"/>
+          <a:lstStyle/>
+          <a:p>
+            <a:r>
+              <a:rPr lang="tr-TR" dirty="0">
+                <a:solidFill>
+                  <a:srgbClr val="C00000"/>
+                </a:solidFill>
+              </a:rPr>
+              <a:t>Vezni:</a:t>
+            </a:r>
+            <a:endParaRPr lang="ar-AE" dirty="0">
+              <a:solidFill>
+                <a:srgbClr val="C00000"/>
+              </a:solidFill>
+            </a:endParaRPr>
+          </a:p>
+          <a:p>
+            <a:pPr algn="r"/>
+            <a:r>
+              <a:rPr lang="ar-AE" sz="3600" dirty="0">
+                <a:solidFill>
+                  <a:schemeClr val="tx1">
+                    <a:lumMod val="65000"/>
+                    <a:lumOff val="35000"/>
+                  </a:schemeClr>
+                </a:solidFill>
+              </a:rPr>
+              <a:t>فَعَّلَ – يُفَعِّلُ - تَفْعِيلًا	</a:t>
+            </a:r>
+            <a:endParaRPr lang="tr-TR" sz="3600" dirty="0">
+              <a:solidFill>
+                <a:schemeClr val="tx1">
+                  <a:lumMod val="65000"/>
+                  <a:lumOff val="35000"/>
+                </a:schemeClr>
+              </a:solidFill>
+            </a:endParaRPr>
+          </a:p>
+        </p:txBody>
+      </p:sp>
+      <p:sp>
+        <p:nvSpPr>
+          <p:cNvPr id="9" name="Dikdörtgen: Üst Köşeleri Yuvarlatılmış 8">
+            <a:extLst>
+              <a:ext uri="{FF2B5EF4-FFF2-40B4-BE49-F238E27FC236}">
+                <a16:creationId xmlns:a16="http://schemas.microsoft.com/office/drawing/2014/main" id="{8960AD68-9065-3C5A-2910-54AD292D8F34}"/>
+              </a:ext>
+            </a:extLst>
+          </p:cNvPr>
+          <p:cNvSpPr/>
+          <p:nvPr/>
+        </p:nvSpPr>
+        <p:spPr>
+          <a:xfrm>
+            <a:off x="4241320" y="4543425"/>
+            <a:ext cx="3822025" cy="1121256"/>
+          </a:xfrm>
+          <a:prstGeom prst="round2SameRect">
+            <a:avLst>
+              <a:gd name="adj1" fmla="val 0"/>
+              <a:gd name="adj2" fmla="val 0"/>
+            </a:avLst>
+          </a:prstGeom>
+          <a:ln>
+            <a:solidFill>
+              <a:schemeClr val="tx2">
+                <a:lumMod val="50000"/>
+                <a:lumOff val="50000"/>
+              </a:schemeClr>
+            </a:solidFill>
+          </a:ln>
+          <a:effectLst>
+            <a:glow rad="63500">
+              <a:schemeClr val="accent1">
+                <a:satMod val="175000"/>
+                <a:alpha val="40000"/>
+              </a:schemeClr>
+            </a:glow>
+          </a:effectLst>
+        </p:spPr>
+        <p:style>
+          <a:lnRef idx="2">
+            <a:schemeClr val="accent1"/>
+          </a:lnRef>
+          <a:fillRef idx="1">
+            <a:schemeClr val="lt1"/>
+          </a:fillRef>
+          <a:effectRef idx="0">
+            <a:schemeClr val="accent1"/>
+          </a:effectRef>
+          <a:fontRef idx="minor">
+            <a:schemeClr val="dk1"/>
+          </a:fontRef>
+        </p:style>
+        <p:txBody>
+          <a:bodyPr lIns="216000" tIns="72000" rIns="288000" bIns="288000" rtlCol="0" anchor="t"/>
+          <a:lstStyle/>
+          <a:p>
+            <a:r>
+              <a:rPr lang="tr-TR" dirty="0">
+                <a:solidFill>
+                  <a:srgbClr val="C00000"/>
+                </a:solidFill>
+              </a:rPr>
+              <a:t>Mevzun:</a:t>
+            </a:r>
+            <a:endParaRPr lang="ar-AE" dirty="0">
+              <a:solidFill>
+                <a:srgbClr val="C00000"/>
+              </a:solidFill>
+            </a:endParaRPr>
+          </a:p>
+          <a:p>
+            <a:pPr algn="r"/>
+            <a:r>
+              <a:rPr lang="ar-AE" sz="3600" dirty="0">
+                <a:solidFill>
+                  <a:schemeClr val="tx1">
+                    <a:lumMod val="65000"/>
+                    <a:lumOff val="35000"/>
+                  </a:schemeClr>
+                </a:solidFill>
+              </a:rPr>
+              <a:t>فَرَّحَ – يُفَرِّحُ - تَفْرِيحًا	</a:t>
+            </a:r>
+            <a:endParaRPr lang="tr-TR" sz="3600" dirty="0">
+              <a:solidFill>
+                <a:schemeClr val="tx1">
+                  <a:lumMod val="65000"/>
+                  <a:lumOff val="35000"/>
+                </a:schemeClr>
+              </a:solidFill>
+            </a:endParaRPr>
+          </a:p>
+        </p:txBody>
+      </p:sp>
+      <p:sp>
+        <p:nvSpPr>
+          <p:cNvPr id="2" name="İkizkenar Üçgen 1">
+            <a:extLst>
+              <a:ext uri="{FF2B5EF4-FFF2-40B4-BE49-F238E27FC236}">
+                <a16:creationId xmlns:a16="http://schemas.microsoft.com/office/drawing/2014/main" id="{B2BAFADC-F4D7-1E24-FACD-44F09F60A8DC}"/>
+              </a:ext>
+            </a:extLst>
+          </p:cNvPr>
+          <p:cNvSpPr/>
+          <p:nvPr/>
+        </p:nvSpPr>
+        <p:spPr>
+          <a:xfrm rot="18876393">
+            <a:off x="-819269" y="-172992"/>
+            <a:ext cx="2549208" cy="1259992"/>
+          </a:xfrm>
+          <a:prstGeom prst="triangle">
+            <a:avLst>
+              <a:gd name="adj" fmla="val 50270"/>
+            </a:avLst>
+          </a:prstGeom>
+          <a:solidFill>
+            <a:srgbClr val="FFC000"/>
+          </a:solidFill>
+          <a:ln>
+            <a:solidFill>
+              <a:schemeClr val="accent2">
+                <a:lumMod val="60000"/>
+                <a:lumOff val="40000"/>
+              </a:schemeClr>
+            </a:solidFill>
+          </a:ln>
+        </p:spPr>
+        <p:style>
+          <a:lnRef idx="2">
+            <a:schemeClr val="accent1">
+              <a:shade val="15000"/>
+            </a:schemeClr>
+          </a:lnRef>
+          <a:fillRef idx="1">
+            <a:schemeClr val="accent1"/>
+          </a:fillRef>
+          <a:effectRef idx="0">
+            <a:schemeClr val="accent1"/>
+          </a:effectRef>
+          <a:fontRef idx="minor">
+            <a:schemeClr val="lt1"/>
+          </a:fontRef>
+        </p:style>
+        <p:txBody>
+          <a:bodyPr rtlCol="0" anchor="ctr"/>
+          <a:lstStyle/>
+          <a:p>
+            <a:r>
+              <a:rPr lang="tr-TR" sz="2400" b="1" dirty="0">
+                <a:solidFill>
+                  <a:schemeClr val="tx1">
+                    <a:lumMod val="95000"/>
+                    <a:lumOff val="5000"/>
+                  </a:schemeClr>
+                </a:solidFill>
+              </a:rPr>
+              <a:t>1. NEVİ</a:t>
+            </a:r>
+          </a:p>
+        </p:txBody>
+      </p:sp>
+    </p:spTree>
+    <p:extLst>
+      <p:ext uri="{BB962C8B-B14F-4D97-AF65-F5344CB8AC3E}">
+        <p14:creationId xmlns:p14="http://schemas.microsoft.com/office/powerpoint/2010/main" val="3510619492"/>
+      </p:ext>
+    </p:extLst>
+  </p:cSld>
+  <p:clrMapOvr>
+    <a:masterClrMapping/>
+  </p:clrMapOvr>
+</p:sld>
+</file>
+
+<file path=ppt/slides/slide11.xml><?xml version="1.0" encoding="utf-8"?>
+<p:sld xmlns:a="http://schemas.openxmlformats.org/drawingml/2006/main" xmlns:r="http://schemas.openxmlformats.org/officeDocument/2006/relationships" xmlns:p="http://schemas.openxmlformats.org/presentationml/2006/main">
+  <p:cSld>
+    <p:spTree>
+      <p:nvGrpSpPr>
+        <p:cNvPr id="1" name=""/>
+        <p:cNvGrpSpPr/>
+        <p:nvPr/>
+      </p:nvGrpSpPr>
+      <p:grpSpPr>
+        <a:xfrm>
+          <a:off x="0" y="0"/>
+          <a:ext cx="0" cy="0"/>
+          <a:chOff x="0" y="0"/>
+          <a:chExt cx="0" cy="0"/>
+        </a:xfrm>
+      </p:grpSpPr>
+      <p:sp>
+        <p:nvSpPr>
+          <p:cNvPr id="4" name="Dikdörtgen: Köşeleri Yuvarlatılmış 3">
+            <a:extLst>
+              <a:ext uri="{FF2B5EF4-FFF2-40B4-BE49-F238E27FC236}">
+                <a16:creationId xmlns:a16="http://schemas.microsoft.com/office/drawing/2014/main" id="{24824917-9527-9A35-B85F-969A69D3B615}"/>
+              </a:ext>
+            </a:extLst>
+          </p:cNvPr>
+          <p:cNvSpPr/>
+          <p:nvPr/>
+        </p:nvSpPr>
+        <p:spPr>
+          <a:xfrm>
+            <a:off x="4241320" y="2523226"/>
+            <a:ext cx="3709359" cy="1811548"/>
+          </a:xfrm>
+          <a:prstGeom prst="roundRect">
+            <a:avLst/>
+          </a:prstGeom>
+          <a:scene3d>
+            <a:camera prst="orthographicFront"/>
+            <a:lightRig rig="threePt" dir="t"/>
+          </a:scene3d>
+          <a:sp3d>
+            <a:bevelT w="114300" prst="artDeco"/>
+          </a:sp3d>
+        </p:spPr>
+        <p:style>
+          <a:lnRef idx="2">
+            <a:schemeClr val="accent1">
+              <a:shade val="15000"/>
+            </a:schemeClr>
+          </a:lnRef>
+          <a:fillRef idx="1">
+            <a:schemeClr val="accent1"/>
+          </a:fillRef>
+          <a:effectRef idx="0">
+            <a:schemeClr val="accent1"/>
+          </a:effectRef>
+          <a:fontRef idx="minor">
+            <a:schemeClr val="lt1"/>
+          </a:fontRef>
+        </p:style>
+        <p:txBody>
+          <a:bodyPr rtlCol="0" anchor="ctr"/>
+          <a:lstStyle/>
+          <a:p>
+            <a:pPr algn="ctr"/>
+            <a:r>
+              <a:rPr lang="tr-TR" dirty="0"/>
+              <a:t>SÜLASİ MEZİD 1. NEVİ</a:t>
+            </a:r>
+          </a:p>
+          <a:p>
+            <a:pPr algn="ctr"/>
+            <a:r>
+              <a:rPr lang="tr-TR" dirty="0"/>
+              <a:t>3. BAB</a:t>
+            </a:r>
+            <a:endParaRPr lang="ar-AE" dirty="0"/>
+          </a:p>
+          <a:p>
+            <a:pPr algn="ctr"/>
+            <a:endParaRPr lang="tr-TR" dirty="0"/>
+          </a:p>
+          <a:p>
+            <a:pPr algn="ctr"/>
+            <a:r>
+              <a:rPr lang="ar-AE" sz="3200" b="1" dirty="0"/>
+              <a:t>مُفَاعَلَة</a:t>
+            </a:r>
+            <a:endParaRPr lang="tr-TR" sz="3200" b="1" dirty="0"/>
+          </a:p>
+        </p:txBody>
+      </p:sp>
+      <p:sp>
+        <p:nvSpPr>
+          <p:cNvPr id="5" name="Dikdörtgen: Üst Köşeleri Yuvarlatılmış 4">
+            <a:extLst>
+              <a:ext uri="{FF2B5EF4-FFF2-40B4-BE49-F238E27FC236}">
+                <a16:creationId xmlns:a16="http://schemas.microsoft.com/office/drawing/2014/main" id="{DE25C558-0A44-EE66-F7E7-E1CB66230352}"/>
+              </a:ext>
+            </a:extLst>
+          </p:cNvPr>
+          <p:cNvSpPr/>
+          <p:nvPr/>
+        </p:nvSpPr>
+        <p:spPr>
+          <a:xfrm>
+            <a:off x="4241320" y="1080655"/>
+            <a:ext cx="3709359" cy="1233919"/>
+          </a:xfrm>
+          <a:prstGeom prst="round2SameRect">
+            <a:avLst>
+              <a:gd name="adj1" fmla="val 0"/>
+              <a:gd name="adj2" fmla="val 0"/>
+            </a:avLst>
+          </a:prstGeom>
+          <a:ln>
+            <a:solidFill>
+              <a:schemeClr val="tx2">
+                <a:lumMod val="50000"/>
+                <a:lumOff val="50000"/>
+              </a:schemeClr>
+            </a:solidFill>
+          </a:ln>
+          <a:effectLst>
+            <a:glow rad="63500">
+              <a:schemeClr val="accent1">
+                <a:satMod val="175000"/>
+                <a:alpha val="40000"/>
+              </a:schemeClr>
+            </a:glow>
+          </a:effectLst>
+        </p:spPr>
+        <p:style>
+          <a:lnRef idx="2">
+            <a:schemeClr val="accent1"/>
+          </a:lnRef>
+          <a:fillRef idx="1">
+            <a:schemeClr val="lt1"/>
+          </a:fillRef>
+          <a:effectRef idx="0">
+            <a:schemeClr val="accent1"/>
+          </a:effectRef>
+          <a:fontRef idx="minor">
+            <a:schemeClr val="dk1"/>
+          </a:fontRef>
+        </p:style>
+        <p:txBody>
+          <a:bodyPr lIns="216000" tIns="72000" rIns="288000" bIns="288000" rtlCol="0" anchor="t"/>
+          <a:lstStyle/>
+          <a:p>
+            <a:r>
+              <a:rPr lang="tr-TR" dirty="0">
+                <a:solidFill>
+                  <a:srgbClr val="C00000"/>
+                </a:solidFill>
+              </a:rPr>
+              <a:t>ALAMETİ: </a:t>
+            </a:r>
+            <a:r>
+              <a:rPr lang="tr-TR" dirty="0" err="1">
+                <a:solidFill>
+                  <a:schemeClr val="tx1"/>
+                </a:solidFill>
+              </a:rPr>
+              <a:t>Fael</a:t>
+            </a:r>
+            <a:r>
+              <a:rPr lang="tr-TR" dirty="0">
+                <a:solidFill>
+                  <a:schemeClr val="tx1"/>
+                </a:solidFill>
+              </a:rPr>
+              <a:t> fiili ile </a:t>
+            </a:r>
+            <a:r>
+              <a:rPr lang="tr-TR" dirty="0" err="1">
+                <a:solidFill>
+                  <a:schemeClr val="tx1"/>
+                </a:solidFill>
+              </a:rPr>
+              <a:t>Aynel</a:t>
+            </a:r>
+            <a:r>
+              <a:rPr lang="tr-TR" dirty="0">
+                <a:solidFill>
+                  <a:schemeClr val="tx1"/>
+                </a:solidFill>
+              </a:rPr>
+              <a:t> Fiili arasına Elif(</a:t>
+            </a:r>
+            <a:r>
+              <a:rPr lang="ar-AE" dirty="0">
+                <a:solidFill>
+                  <a:schemeClr val="tx1"/>
+                </a:solidFill>
+              </a:rPr>
+              <a:t>ا</a:t>
+            </a:r>
+            <a:r>
+              <a:rPr lang="tr-TR" dirty="0">
+                <a:solidFill>
+                  <a:schemeClr val="tx1"/>
+                </a:solidFill>
+              </a:rPr>
+              <a:t>) harfi ziyadesi ile mazisinin 4 harf üzere olmasıdır.</a:t>
+            </a:r>
+            <a:endParaRPr lang="tr-TR" dirty="0">
+              <a:solidFill>
+                <a:srgbClr val="C00000"/>
+              </a:solidFill>
+            </a:endParaRPr>
+          </a:p>
+        </p:txBody>
+      </p:sp>
+      <p:sp>
+        <p:nvSpPr>
+          <p:cNvPr id="7" name="Dikdörtgen: Üst Köşeleri Yuvarlatılmış 6">
+            <a:extLst>
+              <a:ext uri="{FF2B5EF4-FFF2-40B4-BE49-F238E27FC236}">
+                <a16:creationId xmlns:a16="http://schemas.microsoft.com/office/drawing/2014/main" id="{035ECAAF-6A44-611A-A787-ED2E34D3FDD0}"/>
+              </a:ext>
+            </a:extLst>
+          </p:cNvPr>
+          <p:cNvSpPr/>
+          <p:nvPr/>
+        </p:nvSpPr>
+        <p:spPr>
+          <a:xfrm>
+            <a:off x="240820" y="2868372"/>
+            <a:ext cx="3709359" cy="1121255"/>
+          </a:xfrm>
+          <a:prstGeom prst="round2SameRect">
+            <a:avLst>
+              <a:gd name="adj1" fmla="val 0"/>
+              <a:gd name="adj2" fmla="val 0"/>
+            </a:avLst>
+          </a:prstGeom>
+          <a:ln>
+            <a:solidFill>
+              <a:schemeClr val="tx2">
+                <a:lumMod val="50000"/>
+                <a:lumOff val="50000"/>
+              </a:schemeClr>
+            </a:solidFill>
+          </a:ln>
+          <a:effectLst>
+            <a:glow rad="63500">
+              <a:schemeClr val="accent1">
+                <a:satMod val="175000"/>
+                <a:alpha val="40000"/>
+              </a:schemeClr>
+            </a:glow>
+          </a:effectLst>
+        </p:spPr>
+        <p:style>
+          <a:lnRef idx="2">
+            <a:schemeClr val="accent1"/>
+          </a:lnRef>
+          <a:fillRef idx="1">
+            <a:schemeClr val="lt1"/>
+          </a:fillRef>
+          <a:effectRef idx="0">
+            <a:schemeClr val="accent1"/>
+          </a:effectRef>
+          <a:fontRef idx="minor">
+            <a:schemeClr val="dk1"/>
+          </a:fontRef>
+        </p:style>
+        <p:txBody>
+          <a:bodyPr lIns="216000" tIns="72000" rIns="288000" bIns="288000" rtlCol="0" anchor="t"/>
+          <a:lstStyle/>
+          <a:p>
+            <a:r>
+              <a:rPr lang="tr-TR" dirty="0">
+                <a:solidFill>
+                  <a:srgbClr val="C00000"/>
+                </a:solidFill>
+              </a:rPr>
+              <a:t>Binası: </a:t>
+            </a:r>
+            <a:r>
+              <a:rPr lang="tr-TR" dirty="0">
+                <a:solidFill>
+                  <a:schemeClr val="tx1"/>
+                </a:solidFill>
+              </a:rPr>
+              <a:t>İki kişi arasında müşareket içindir. Bazen 1 kişi için olur.</a:t>
+            </a:r>
+            <a:endParaRPr lang="tr-TR" dirty="0">
+              <a:solidFill>
+                <a:srgbClr val="C00000"/>
+              </a:solidFill>
+            </a:endParaRPr>
+          </a:p>
+        </p:txBody>
+      </p:sp>
+      <p:sp>
+        <p:nvSpPr>
+          <p:cNvPr id="8" name="Dikdörtgen: Üst Köşeleri Yuvarlatılmış 7">
+            <a:extLst>
+              <a:ext uri="{FF2B5EF4-FFF2-40B4-BE49-F238E27FC236}">
+                <a16:creationId xmlns:a16="http://schemas.microsoft.com/office/drawing/2014/main" id="{30BE5D54-F616-EC32-A7B3-9070EBCFD1C5}"/>
+              </a:ext>
+            </a:extLst>
+          </p:cNvPr>
+          <p:cNvSpPr/>
+          <p:nvPr/>
+        </p:nvSpPr>
+        <p:spPr>
+          <a:xfrm>
+            <a:off x="8241820" y="2660554"/>
+            <a:ext cx="3887835" cy="2036137"/>
+          </a:xfrm>
+          <a:prstGeom prst="round2SameRect">
+            <a:avLst>
+              <a:gd name="adj1" fmla="val 0"/>
+              <a:gd name="adj2" fmla="val 0"/>
+            </a:avLst>
+          </a:prstGeom>
+          <a:ln>
+            <a:solidFill>
+              <a:schemeClr val="tx2">
+                <a:lumMod val="50000"/>
+                <a:lumOff val="50000"/>
+              </a:schemeClr>
+            </a:solidFill>
+          </a:ln>
+          <a:effectLst>
+            <a:glow rad="63500">
+              <a:schemeClr val="accent1">
+                <a:satMod val="175000"/>
+                <a:alpha val="40000"/>
+              </a:schemeClr>
+            </a:glow>
+          </a:effectLst>
+        </p:spPr>
+        <p:style>
+          <a:lnRef idx="2">
+            <a:schemeClr val="accent1"/>
+          </a:lnRef>
+          <a:fillRef idx="1">
+            <a:schemeClr val="lt1"/>
+          </a:fillRef>
+          <a:effectRef idx="0">
+            <a:schemeClr val="accent1"/>
+          </a:effectRef>
+          <a:fontRef idx="minor">
+            <a:schemeClr val="dk1"/>
+          </a:fontRef>
+        </p:style>
+        <p:txBody>
+          <a:bodyPr lIns="216000" tIns="72000" rIns="288000" bIns="288000" rtlCol="0" anchor="t"/>
+          <a:lstStyle/>
+          <a:p>
+            <a:r>
+              <a:rPr lang="tr-TR" dirty="0">
+                <a:solidFill>
+                  <a:srgbClr val="C00000"/>
+                </a:solidFill>
+              </a:rPr>
+              <a:t>Vezni:</a:t>
+            </a:r>
+            <a:endParaRPr lang="ar-AE" dirty="0">
+              <a:solidFill>
+                <a:srgbClr val="C00000"/>
+              </a:solidFill>
+            </a:endParaRPr>
+          </a:p>
+          <a:p>
+            <a:pPr algn="r"/>
+            <a:r>
+              <a:rPr lang="ar-AE" sz="3600" dirty="0">
+                <a:solidFill>
+                  <a:schemeClr val="tx1">
+                    <a:lumMod val="65000"/>
+                    <a:lumOff val="35000"/>
+                  </a:schemeClr>
+                </a:solidFill>
+              </a:rPr>
+              <a:t>فَاعَلَ – يُفَاعِلُ - مُفَاعَلةً</a:t>
+            </a:r>
+          </a:p>
+          <a:p>
+            <a:r>
+              <a:rPr lang="ar-AE" sz="3600" dirty="0">
+                <a:solidFill>
+                  <a:schemeClr val="tx1">
+                    <a:lumMod val="65000"/>
+                    <a:lumOff val="35000"/>
+                  </a:schemeClr>
+                </a:solidFill>
+              </a:rPr>
+              <a:t>وَفِعَالًا	</a:t>
+            </a:r>
+          </a:p>
+          <a:p>
+            <a:r>
+              <a:rPr lang="ar-AE" sz="3600" dirty="0">
+                <a:solidFill>
+                  <a:schemeClr val="tx1">
+                    <a:lumMod val="65000"/>
+                    <a:lumOff val="35000"/>
+                  </a:schemeClr>
+                </a:solidFill>
+              </a:rPr>
+              <a:t>وَفِيعَالًا</a:t>
+            </a:r>
+          </a:p>
+          <a:p>
+            <a:r>
+              <a:rPr lang="ar-AE" sz="3600" dirty="0">
+                <a:solidFill>
+                  <a:schemeClr val="tx1">
+                    <a:lumMod val="65000"/>
+                    <a:lumOff val="35000"/>
+                  </a:schemeClr>
+                </a:solidFill>
+              </a:rPr>
+              <a:t>		</a:t>
+            </a:r>
+            <a:endParaRPr lang="tr-TR" sz="3600" dirty="0">
+              <a:solidFill>
+                <a:schemeClr val="tx1">
+                  <a:lumMod val="65000"/>
+                  <a:lumOff val="35000"/>
+                </a:schemeClr>
+              </a:solidFill>
+            </a:endParaRPr>
+          </a:p>
+        </p:txBody>
+      </p:sp>
+      <p:sp>
+        <p:nvSpPr>
+          <p:cNvPr id="2" name="İkizkenar Üçgen 1">
+            <a:extLst>
+              <a:ext uri="{FF2B5EF4-FFF2-40B4-BE49-F238E27FC236}">
+                <a16:creationId xmlns:a16="http://schemas.microsoft.com/office/drawing/2014/main" id="{4E134ADB-7908-A9FF-5CE0-9B05BB295681}"/>
+              </a:ext>
+            </a:extLst>
+          </p:cNvPr>
+          <p:cNvSpPr/>
+          <p:nvPr/>
+        </p:nvSpPr>
+        <p:spPr>
+          <a:xfrm rot="18876393">
+            <a:off x="-824444" y="-170828"/>
+            <a:ext cx="2555288" cy="1259992"/>
+          </a:xfrm>
+          <a:prstGeom prst="triangle">
+            <a:avLst>
+              <a:gd name="adj" fmla="val 50457"/>
+            </a:avLst>
+          </a:prstGeom>
+          <a:solidFill>
+            <a:srgbClr val="FFC000"/>
+          </a:solidFill>
+          <a:ln>
+            <a:solidFill>
+              <a:schemeClr val="accent2">
+                <a:lumMod val="60000"/>
+                <a:lumOff val="40000"/>
+              </a:schemeClr>
+            </a:solidFill>
+          </a:ln>
+        </p:spPr>
+        <p:style>
+          <a:lnRef idx="2">
+            <a:schemeClr val="accent1">
+              <a:shade val="15000"/>
+            </a:schemeClr>
+          </a:lnRef>
+          <a:fillRef idx="1">
+            <a:schemeClr val="accent1"/>
+          </a:fillRef>
+          <a:effectRef idx="0">
+            <a:schemeClr val="accent1"/>
+          </a:effectRef>
+          <a:fontRef idx="minor">
+            <a:schemeClr val="lt1"/>
+          </a:fontRef>
+        </p:style>
+        <p:txBody>
+          <a:bodyPr rtlCol="0" anchor="ctr"/>
+          <a:lstStyle/>
+          <a:p>
+            <a:r>
+              <a:rPr lang="tr-TR" sz="2400" b="1" dirty="0">
+                <a:solidFill>
+                  <a:schemeClr val="tx1">
+                    <a:lumMod val="95000"/>
+                    <a:lumOff val="5000"/>
+                  </a:schemeClr>
+                </a:solidFill>
+              </a:rPr>
+              <a:t>1. NEVİ</a:t>
+            </a:r>
+          </a:p>
+        </p:txBody>
+      </p:sp>
+      <p:sp>
+        <p:nvSpPr>
+          <p:cNvPr id="3" name="Dikdörtgen: Üst Köşeleri Yuvarlatılmış 2">
+            <a:extLst>
+              <a:ext uri="{FF2B5EF4-FFF2-40B4-BE49-F238E27FC236}">
+                <a16:creationId xmlns:a16="http://schemas.microsoft.com/office/drawing/2014/main" id="{16556FBF-2049-6A2C-26B7-A2557790BAD6}"/>
+              </a:ext>
+            </a:extLst>
+          </p:cNvPr>
+          <p:cNvSpPr/>
+          <p:nvPr/>
+        </p:nvSpPr>
+        <p:spPr>
+          <a:xfrm>
+            <a:off x="4152081" y="4593784"/>
+            <a:ext cx="3887835" cy="2097962"/>
+          </a:xfrm>
+          <a:prstGeom prst="round2SameRect">
+            <a:avLst>
+              <a:gd name="adj1" fmla="val 0"/>
+              <a:gd name="adj2" fmla="val 0"/>
+            </a:avLst>
+          </a:prstGeom>
+          <a:ln>
+            <a:solidFill>
+              <a:schemeClr val="tx2">
+                <a:lumMod val="50000"/>
+                <a:lumOff val="50000"/>
+              </a:schemeClr>
+            </a:solidFill>
+          </a:ln>
+          <a:effectLst>
+            <a:glow rad="63500">
+              <a:schemeClr val="accent1">
+                <a:satMod val="175000"/>
+                <a:alpha val="40000"/>
+              </a:schemeClr>
+            </a:glow>
+          </a:effectLst>
+        </p:spPr>
+        <p:style>
+          <a:lnRef idx="2">
+            <a:schemeClr val="accent1"/>
+          </a:lnRef>
+          <a:fillRef idx="1">
+            <a:schemeClr val="lt1"/>
+          </a:fillRef>
+          <a:effectRef idx="0">
+            <a:schemeClr val="accent1"/>
+          </a:effectRef>
+          <a:fontRef idx="minor">
+            <a:schemeClr val="dk1"/>
+          </a:fontRef>
+        </p:style>
+        <p:txBody>
+          <a:bodyPr lIns="216000" tIns="72000" rIns="288000" bIns="288000" rtlCol="0" anchor="t"/>
+          <a:lstStyle/>
+          <a:p>
+            <a:r>
+              <a:rPr lang="tr-TR" dirty="0">
+                <a:solidFill>
+                  <a:srgbClr val="C00000"/>
+                </a:solidFill>
+              </a:rPr>
+              <a:t>Mevzun:</a:t>
+            </a:r>
+            <a:endParaRPr lang="ar-AE" dirty="0">
+              <a:solidFill>
+                <a:srgbClr val="C00000"/>
+              </a:solidFill>
+            </a:endParaRPr>
+          </a:p>
+          <a:p>
+            <a:pPr algn="r"/>
+            <a:r>
+              <a:rPr lang="ar-AE" sz="3600" dirty="0">
+                <a:solidFill>
+                  <a:schemeClr val="tx1">
+                    <a:lumMod val="65000"/>
+                    <a:lumOff val="35000"/>
+                  </a:schemeClr>
+                </a:solidFill>
+              </a:rPr>
+              <a:t>قَاتَلَ – يُقَاتِلُ - مُفَاعَلةً</a:t>
+            </a:r>
+          </a:p>
+          <a:p>
+            <a:r>
+              <a:rPr lang="ar-AE" sz="3600" dirty="0">
+                <a:solidFill>
+                  <a:schemeClr val="tx1">
+                    <a:lumMod val="65000"/>
+                    <a:lumOff val="35000"/>
+                  </a:schemeClr>
+                </a:solidFill>
+              </a:rPr>
+              <a:t>وَقِتَالًا   		</a:t>
+            </a:r>
+          </a:p>
+          <a:p>
+            <a:r>
+              <a:rPr lang="ar-AE" sz="3600" dirty="0">
+                <a:solidFill>
+                  <a:schemeClr val="tx1">
+                    <a:lumMod val="65000"/>
+                    <a:lumOff val="35000"/>
+                  </a:schemeClr>
+                </a:solidFill>
+              </a:rPr>
+              <a:t>وَقِيتَالًا   </a:t>
+            </a:r>
+          </a:p>
+          <a:p>
+            <a:r>
+              <a:rPr lang="ar-AE" sz="3600" dirty="0">
+                <a:solidFill>
+                  <a:schemeClr val="tx1">
+                    <a:lumMod val="65000"/>
+                    <a:lumOff val="35000"/>
+                  </a:schemeClr>
+                </a:solidFill>
+              </a:rPr>
+              <a:t>		</a:t>
+            </a:r>
+            <a:endParaRPr lang="tr-TR" sz="3600" dirty="0">
+              <a:solidFill>
+                <a:schemeClr val="tx1">
+                  <a:lumMod val="65000"/>
+                  <a:lumOff val="35000"/>
+                </a:schemeClr>
+              </a:solidFill>
+            </a:endParaRPr>
+          </a:p>
+        </p:txBody>
+      </p:sp>
+    </p:spTree>
+    <p:extLst>
+      <p:ext uri="{BB962C8B-B14F-4D97-AF65-F5344CB8AC3E}">
+        <p14:creationId xmlns:p14="http://schemas.microsoft.com/office/powerpoint/2010/main" val="2334713504"/>
+      </p:ext>
+    </p:extLst>
+  </p:cSld>
+  <p:clrMapOvr>
+    <a:masterClrMapping/>
+  </p:clrMapOvr>
+</p:sld>
+</file>
+
+<file path=ppt/slides/slide12.xml><?xml version="1.0" encoding="utf-8"?>
+<p:sld xmlns:a="http://schemas.openxmlformats.org/drawingml/2006/main" xmlns:r="http://schemas.openxmlformats.org/officeDocument/2006/relationships" xmlns:p="http://schemas.openxmlformats.org/presentationml/2006/main">
+  <p:cSld>
+    <p:spTree>
+      <p:nvGrpSpPr>
+        <p:cNvPr id="1" name=""/>
+        <p:cNvGrpSpPr/>
+        <p:nvPr/>
+      </p:nvGrpSpPr>
+      <p:grpSpPr>
+        <a:xfrm>
+          <a:off x="0" y="0"/>
+          <a:ext cx="0" cy="0"/>
+          <a:chOff x="0" y="0"/>
+          <a:chExt cx="0" cy="0"/>
+        </a:xfrm>
+      </p:grpSpPr>
+      <p:sp>
+        <p:nvSpPr>
+          <p:cNvPr id="4" name="Dikdörtgen: Köşeleri Yuvarlatılmış 3">
+            <a:extLst>
+              <a:ext uri="{FF2B5EF4-FFF2-40B4-BE49-F238E27FC236}">
+                <a16:creationId xmlns:a16="http://schemas.microsoft.com/office/drawing/2014/main" id="{24824917-9527-9A35-B85F-969A69D3B615}"/>
+              </a:ext>
+            </a:extLst>
+          </p:cNvPr>
+          <p:cNvSpPr/>
+          <p:nvPr/>
+        </p:nvSpPr>
+        <p:spPr>
+          <a:xfrm>
+            <a:off x="4241320" y="2523226"/>
+            <a:ext cx="3709359" cy="1811548"/>
+          </a:xfrm>
+          <a:prstGeom prst="roundRect">
+            <a:avLst/>
+          </a:prstGeom>
+          <a:scene3d>
+            <a:camera prst="orthographicFront"/>
+            <a:lightRig rig="threePt" dir="t"/>
+          </a:scene3d>
+          <a:sp3d>
+            <a:bevelT w="114300" prst="artDeco"/>
+          </a:sp3d>
+        </p:spPr>
+        <p:style>
+          <a:lnRef idx="2">
+            <a:schemeClr val="accent1">
+              <a:shade val="15000"/>
+            </a:schemeClr>
+          </a:lnRef>
+          <a:fillRef idx="1">
+            <a:schemeClr val="accent1"/>
+          </a:fillRef>
+          <a:effectRef idx="0">
+            <a:schemeClr val="accent1"/>
+          </a:effectRef>
+          <a:fontRef idx="minor">
+            <a:schemeClr val="lt1"/>
+          </a:fontRef>
+        </p:style>
+        <p:txBody>
+          <a:bodyPr rtlCol="0" anchor="ctr"/>
+          <a:lstStyle/>
+          <a:p>
+            <a:pPr algn="ctr"/>
+            <a:r>
+              <a:rPr lang="tr-TR" dirty="0"/>
+              <a:t>SÜLASİ MEZİD </a:t>
+            </a:r>
+            <a:r>
+              <a:rPr lang="ar-AE" dirty="0"/>
+              <a:t>2</a:t>
+            </a:r>
+            <a:r>
+              <a:rPr lang="tr-TR" dirty="0"/>
+              <a:t>. NEVİ</a:t>
+            </a:r>
+          </a:p>
+          <a:p>
+            <a:pPr algn="ctr"/>
+            <a:r>
+              <a:rPr lang="ar-AE" dirty="0"/>
+              <a:t>1</a:t>
+            </a:r>
+            <a:r>
+              <a:rPr lang="tr-TR" dirty="0"/>
+              <a:t>. BAB</a:t>
+            </a:r>
+          </a:p>
+          <a:p>
+            <a:pPr algn="ctr"/>
+            <a:r>
+              <a:rPr lang="ar-AE" sz="3200" b="1" dirty="0"/>
+              <a:t>اِنْفِعَالْ</a:t>
+            </a:r>
+            <a:endParaRPr lang="tr-TR" sz="3200" b="1" dirty="0"/>
+          </a:p>
+        </p:txBody>
+      </p:sp>
+      <p:sp>
+        <p:nvSpPr>
+          <p:cNvPr id="5" name="Dikdörtgen: Üst Köşeleri Yuvarlatılmış 4">
+            <a:extLst>
+              <a:ext uri="{FF2B5EF4-FFF2-40B4-BE49-F238E27FC236}">
+                <a16:creationId xmlns:a16="http://schemas.microsoft.com/office/drawing/2014/main" id="{DE25C558-0A44-EE66-F7E7-E1CB66230352}"/>
+              </a:ext>
+            </a:extLst>
+          </p:cNvPr>
+          <p:cNvSpPr/>
+          <p:nvPr/>
+        </p:nvSpPr>
+        <p:spPr>
+          <a:xfrm>
+            <a:off x="4241320" y="1193319"/>
+            <a:ext cx="3709359" cy="1121255"/>
+          </a:xfrm>
+          <a:prstGeom prst="round2SameRect">
+            <a:avLst>
+              <a:gd name="adj1" fmla="val 0"/>
+              <a:gd name="adj2" fmla="val 0"/>
+            </a:avLst>
+          </a:prstGeom>
+          <a:ln>
+            <a:solidFill>
+              <a:schemeClr val="tx2">
+                <a:lumMod val="50000"/>
+                <a:lumOff val="50000"/>
+              </a:schemeClr>
+            </a:solidFill>
+          </a:ln>
+          <a:effectLst>
+            <a:glow rad="63500">
+              <a:schemeClr val="accent1">
+                <a:satMod val="175000"/>
+                <a:alpha val="40000"/>
+              </a:schemeClr>
+            </a:glow>
+          </a:effectLst>
+        </p:spPr>
+        <p:style>
+          <a:lnRef idx="2">
+            <a:schemeClr val="accent1"/>
+          </a:lnRef>
+          <a:fillRef idx="1">
+            <a:schemeClr val="lt1"/>
+          </a:fillRef>
+          <a:effectRef idx="0">
+            <a:schemeClr val="accent1"/>
+          </a:effectRef>
+          <a:fontRef idx="minor">
+            <a:schemeClr val="dk1"/>
+          </a:fontRef>
+        </p:style>
+        <p:txBody>
+          <a:bodyPr lIns="216000" tIns="72000" rIns="288000" bIns="288000" rtlCol="0" anchor="t"/>
+          <a:lstStyle/>
+          <a:p>
+            <a:r>
+              <a:rPr lang="tr-TR" dirty="0">
+                <a:solidFill>
+                  <a:srgbClr val="C00000"/>
+                </a:solidFill>
+              </a:rPr>
+              <a:t>ALAMETİ: </a:t>
+            </a:r>
+            <a:r>
+              <a:rPr lang="tr-TR" dirty="0">
+                <a:solidFill>
+                  <a:schemeClr val="tx1"/>
+                </a:solidFill>
+              </a:rPr>
+              <a:t>Evveline hemze(</a:t>
+            </a:r>
+            <a:r>
+              <a:rPr lang="ar-AE" dirty="0">
+                <a:solidFill>
+                  <a:schemeClr val="tx1"/>
+                </a:solidFill>
+              </a:rPr>
+              <a:t>ا</a:t>
+            </a:r>
+            <a:r>
+              <a:rPr lang="tr-TR" dirty="0">
+                <a:solidFill>
+                  <a:schemeClr val="tx1"/>
+                </a:solidFill>
+              </a:rPr>
+              <a:t>) ve </a:t>
+            </a:r>
+            <a:r>
+              <a:rPr lang="tr-TR" dirty="0" err="1">
+                <a:solidFill>
+                  <a:schemeClr val="tx1"/>
+                </a:solidFill>
+              </a:rPr>
+              <a:t>Nun</a:t>
+            </a:r>
+            <a:r>
+              <a:rPr lang="tr-TR" dirty="0">
+                <a:solidFill>
+                  <a:schemeClr val="tx1"/>
+                </a:solidFill>
+              </a:rPr>
+              <a:t>(</a:t>
+            </a:r>
+            <a:r>
+              <a:rPr lang="ar-AE" dirty="0">
+                <a:solidFill>
+                  <a:schemeClr val="tx1"/>
+                </a:solidFill>
+              </a:rPr>
+              <a:t>ن</a:t>
+            </a:r>
+            <a:r>
+              <a:rPr lang="tr-TR" dirty="0">
+                <a:solidFill>
+                  <a:schemeClr val="tx1"/>
+                </a:solidFill>
+              </a:rPr>
+              <a:t>) harfleri ziyadesi ile mazisinin 5 harf üzere olmasıdır.</a:t>
+            </a:r>
+            <a:endParaRPr lang="tr-TR" dirty="0">
+              <a:solidFill>
+                <a:srgbClr val="C00000"/>
+              </a:solidFill>
+            </a:endParaRPr>
+          </a:p>
+        </p:txBody>
+      </p:sp>
+      <p:sp>
+        <p:nvSpPr>
+          <p:cNvPr id="7" name="Dikdörtgen: Üst Köşeleri Yuvarlatılmış 6">
+            <a:extLst>
+              <a:ext uri="{FF2B5EF4-FFF2-40B4-BE49-F238E27FC236}">
+                <a16:creationId xmlns:a16="http://schemas.microsoft.com/office/drawing/2014/main" id="{035ECAAF-6A44-611A-A787-ED2E34D3FDD0}"/>
+              </a:ext>
+            </a:extLst>
+          </p:cNvPr>
+          <p:cNvSpPr/>
+          <p:nvPr/>
+        </p:nvSpPr>
+        <p:spPr>
+          <a:xfrm>
+            <a:off x="240820" y="2868372"/>
+            <a:ext cx="3709359" cy="1121255"/>
+          </a:xfrm>
+          <a:prstGeom prst="round2SameRect">
+            <a:avLst>
+              <a:gd name="adj1" fmla="val 0"/>
+              <a:gd name="adj2" fmla="val 0"/>
+            </a:avLst>
+          </a:prstGeom>
+          <a:ln>
+            <a:solidFill>
+              <a:schemeClr val="tx2">
+                <a:lumMod val="50000"/>
+                <a:lumOff val="50000"/>
+              </a:schemeClr>
+            </a:solidFill>
+          </a:ln>
+          <a:effectLst>
+            <a:glow rad="63500">
+              <a:schemeClr val="accent1">
+                <a:satMod val="175000"/>
+                <a:alpha val="40000"/>
+              </a:schemeClr>
+            </a:glow>
+          </a:effectLst>
+        </p:spPr>
+        <p:style>
+          <a:lnRef idx="2">
+            <a:schemeClr val="accent1"/>
+          </a:lnRef>
+          <a:fillRef idx="1">
+            <a:schemeClr val="lt1"/>
+          </a:fillRef>
+          <a:effectRef idx="0">
+            <a:schemeClr val="accent1"/>
+          </a:effectRef>
+          <a:fontRef idx="minor">
+            <a:schemeClr val="dk1"/>
+          </a:fontRef>
+        </p:style>
+        <p:txBody>
+          <a:bodyPr lIns="216000" tIns="72000" rIns="288000" bIns="288000" rtlCol="0" anchor="t"/>
+          <a:lstStyle/>
+          <a:p>
+            <a:r>
+              <a:rPr lang="tr-TR" dirty="0">
+                <a:solidFill>
+                  <a:srgbClr val="C00000"/>
+                </a:solidFill>
+              </a:rPr>
+              <a:t>Binası: </a:t>
+            </a:r>
+            <a:r>
+              <a:rPr lang="tr-TR" dirty="0">
+                <a:solidFill>
+                  <a:schemeClr val="tx1"/>
+                </a:solidFill>
+              </a:rPr>
+              <a:t>Mutavaat içindir.</a:t>
+            </a:r>
+            <a:endParaRPr lang="tr-TR" dirty="0">
+              <a:solidFill>
+                <a:srgbClr val="C00000"/>
+              </a:solidFill>
+            </a:endParaRPr>
+          </a:p>
+        </p:txBody>
+      </p:sp>
+      <p:sp>
+        <p:nvSpPr>
+          <p:cNvPr id="8" name="Dikdörtgen: Üst Köşeleri Yuvarlatılmış 7">
+            <a:extLst>
+              <a:ext uri="{FF2B5EF4-FFF2-40B4-BE49-F238E27FC236}">
+                <a16:creationId xmlns:a16="http://schemas.microsoft.com/office/drawing/2014/main" id="{30BE5D54-F616-EC32-A7B3-9070EBCFD1C5}"/>
+              </a:ext>
+            </a:extLst>
+          </p:cNvPr>
+          <p:cNvSpPr/>
+          <p:nvPr/>
+        </p:nvSpPr>
+        <p:spPr>
+          <a:xfrm>
+            <a:off x="8241821" y="2868371"/>
+            <a:ext cx="3709359" cy="1121256"/>
+          </a:xfrm>
+          <a:prstGeom prst="round2SameRect">
+            <a:avLst>
+              <a:gd name="adj1" fmla="val 0"/>
+              <a:gd name="adj2" fmla="val 0"/>
+            </a:avLst>
+          </a:prstGeom>
+          <a:ln>
+            <a:solidFill>
+              <a:schemeClr val="tx2">
+                <a:lumMod val="50000"/>
+                <a:lumOff val="50000"/>
+              </a:schemeClr>
+            </a:solidFill>
+          </a:ln>
+          <a:effectLst>
+            <a:glow rad="63500">
+              <a:schemeClr val="accent1">
+                <a:satMod val="175000"/>
+                <a:alpha val="40000"/>
+              </a:schemeClr>
+            </a:glow>
+          </a:effectLst>
+        </p:spPr>
+        <p:style>
+          <a:lnRef idx="2">
+            <a:schemeClr val="accent1"/>
+          </a:lnRef>
+          <a:fillRef idx="1">
+            <a:schemeClr val="lt1"/>
+          </a:fillRef>
+          <a:effectRef idx="0">
+            <a:schemeClr val="accent1"/>
+          </a:effectRef>
+          <a:fontRef idx="minor">
+            <a:schemeClr val="dk1"/>
+          </a:fontRef>
+        </p:style>
+        <p:txBody>
+          <a:bodyPr lIns="216000" tIns="72000" rIns="288000" bIns="288000" rtlCol="0" anchor="t"/>
+          <a:lstStyle/>
+          <a:p>
+            <a:r>
+              <a:rPr lang="tr-TR" dirty="0">
+                <a:solidFill>
+                  <a:srgbClr val="C00000"/>
+                </a:solidFill>
+              </a:rPr>
+              <a:t>Vezni:</a:t>
+            </a:r>
+            <a:endParaRPr lang="ar-AE" dirty="0">
+              <a:solidFill>
+                <a:srgbClr val="C00000"/>
+              </a:solidFill>
+            </a:endParaRPr>
+          </a:p>
+          <a:p>
+            <a:pPr algn="r"/>
+            <a:r>
+              <a:rPr lang="ar-AE" sz="3600" dirty="0">
+                <a:solidFill>
+                  <a:schemeClr val="tx1">
+                    <a:lumMod val="65000"/>
+                    <a:lumOff val="35000"/>
+                  </a:schemeClr>
+                </a:solidFill>
+              </a:rPr>
+              <a:t>اِنْفَعَلَ – ينْفَعِلُ - اِنْفِعَالًا	</a:t>
+            </a:r>
+            <a:endParaRPr lang="tr-TR" sz="3600" dirty="0">
+              <a:solidFill>
+                <a:schemeClr val="tx1">
+                  <a:lumMod val="65000"/>
+                  <a:lumOff val="35000"/>
+                </a:schemeClr>
+              </a:solidFill>
+            </a:endParaRPr>
+          </a:p>
+        </p:txBody>
+      </p:sp>
+      <p:sp>
+        <p:nvSpPr>
+          <p:cNvPr id="9" name="Dikdörtgen: Üst Köşeleri Yuvarlatılmış 8">
+            <a:extLst>
+              <a:ext uri="{FF2B5EF4-FFF2-40B4-BE49-F238E27FC236}">
+                <a16:creationId xmlns:a16="http://schemas.microsoft.com/office/drawing/2014/main" id="{8960AD68-9065-3C5A-2910-54AD292D8F34}"/>
+              </a:ext>
+            </a:extLst>
+          </p:cNvPr>
+          <p:cNvSpPr/>
+          <p:nvPr/>
+        </p:nvSpPr>
+        <p:spPr>
+          <a:xfrm>
+            <a:off x="4131426" y="4543425"/>
+            <a:ext cx="3931920" cy="1121256"/>
+          </a:xfrm>
+          <a:prstGeom prst="round2SameRect">
+            <a:avLst>
+              <a:gd name="adj1" fmla="val 0"/>
+              <a:gd name="adj2" fmla="val 0"/>
+            </a:avLst>
+          </a:prstGeom>
+          <a:ln>
+            <a:solidFill>
+              <a:schemeClr val="tx2">
+                <a:lumMod val="50000"/>
+                <a:lumOff val="50000"/>
+              </a:schemeClr>
+            </a:solidFill>
+          </a:ln>
+          <a:effectLst>
+            <a:glow rad="63500">
+              <a:schemeClr val="accent1">
+                <a:satMod val="175000"/>
+                <a:alpha val="40000"/>
+              </a:schemeClr>
+            </a:glow>
+          </a:effectLst>
+        </p:spPr>
+        <p:style>
+          <a:lnRef idx="2">
+            <a:schemeClr val="accent1"/>
+          </a:lnRef>
+          <a:fillRef idx="1">
+            <a:schemeClr val="lt1"/>
+          </a:fillRef>
+          <a:effectRef idx="0">
+            <a:schemeClr val="accent1"/>
+          </a:effectRef>
+          <a:fontRef idx="minor">
+            <a:schemeClr val="dk1"/>
+          </a:fontRef>
+        </p:style>
+        <p:txBody>
+          <a:bodyPr lIns="216000" tIns="72000" rIns="288000" bIns="288000" rtlCol="0" anchor="t"/>
+          <a:lstStyle/>
+          <a:p>
+            <a:r>
+              <a:rPr lang="tr-TR" dirty="0">
+                <a:solidFill>
+                  <a:srgbClr val="C00000"/>
+                </a:solidFill>
+              </a:rPr>
+              <a:t>Mevzun:</a:t>
+            </a:r>
+            <a:endParaRPr lang="ar-AE" dirty="0">
+              <a:solidFill>
+                <a:srgbClr val="C00000"/>
+              </a:solidFill>
+            </a:endParaRPr>
+          </a:p>
+          <a:p>
+            <a:pPr algn="r"/>
+            <a:r>
+              <a:rPr lang="ar-AE" sz="3600" dirty="0">
+                <a:solidFill>
+                  <a:schemeClr val="tx1">
+                    <a:lumMod val="65000"/>
+                    <a:lumOff val="35000"/>
+                  </a:schemeClr>
+                </a:solidFill>
+              </a:rPr>
+              <a:t>اِنْكَسَرَ– يَنْكَسِرُ- اِنْكِسَارًا	</a:t>
+            </a:r>
+            <a:endParaRPr lang="tr-TR" sz="3600" dirty="0">
+              <a:solidFill>
+                <a:schemeClr val="tx1">
+                  <a:lumMod val="65000"/>
+                  <a:lumOff val="35000"/>
+                </a:schemeClr>
+              </a:solidFill>
+            </a:endParaRPr>
+          </a:p>
+        </p:txBody>
+      </p:sp>
+      <p:sp>
+        <p:nvSpPr>
+          <p:cNvPr id="2" name="İkizkenar Üçgen 1">
+            <a:extLst>
+              <a:ext uri="{FF2B5EF4-FFF2-40B4-BE49-F238E27FC236}">
+                <a16:creationId xmlns:a16="http://schemas.microsoft.com/office/drawing/2014/main" id="{F761A71F-29CB-9CF0-1D02-9D53577DA23F}"/>
+              </a:ext>
+            </a:extLst>
+          </p:cNvPr>
+          <p:cNvSpPr/>
+          <p:nvPr/>
+        </p:nvSpPr>
+        <p:spPr>
+          <a:xfrm rot="18876393">
+            <a:off x="-810273" y="-176755"/>
+            <a:ext cx="2538637" cy="1259992"/>
+          </a:xfrm>
+          <a:prstGeom prst="triangle">
+            <a:avLst/>
+          </a:prstGeom>
+          <a:solidFill>
+            <a:schemeClr val="accent6">
+              <a:lumMod val="75000"/>
+            </a:schemeClr>
+          </a:solidFill>
+          <a:ln>
+            <a:solidFill>
+              <a:schemeClr val="accent6">
+                <a:lumMod val="60000"/>
+                <a:lumOff val="40000"/>
+              </a:schemeClr>
+            </a:solidFill>
+          </a:ln>
+        </p:spPr>
+        <p:style>
+          <a:lnRef idx="2">
+            <a:schemeClr val="accent1">
+              <a:shade val="15000"/>
+            </a:schemeClr>
+          </a:lnRef>
+          <a:fillRef idx="1">
+            <a:schemeClr val="accent1"/>
+          </a:fillRef>
+          <a:effectRef idx="0">
+            <a:schemeClr val="accent1"/>
+          </a:effectRef>
+          <a:fontRef idx="minor">
+            <a:schemeClr val="lt1"/>
+          </a:fontRef>
+        </p:style>
+        <p:txBody>
+          <a:bodyPr rtlCol="0" anchor="ctr"/>
+          <a:lstStyle/>
+          <a:p>
+            <a:r>
+              <a:rPr lang="ar-AE" sz="2400" b="1" dirty="0">
+                <a:solidFill>
+                  <a:schemeClr val="bg1"/>
+                </a:solidFill>
+              </a:rPr>
+              <a:t>2</a:t>
+            </a:r>
+            <a:r>
+              <a:rPr lang="tr-TR" sz="2400" b="1" dirty="0">
+                <a:solidFill>
+                  <a:schemeClr val="bg1"/>
+                </a:solidFill>
+              </a:rPr>
+              <a:t>. NEVİ</a:t>
+            </a:r>
+          </a:p>
+        </p:txBody>
+      </p:sp>
+    </p:spTree>
+    <p:extLst>
+      <p:ext uri="{BB962C8B-B14F-4D97-AF65-F5344CB8AC3E}">
+        <p14:creationId xmlns:p14="http://schemas.microsoft.com/office/powerpoint/2010/main" val="867089931"/>
+      </p:ext>
+    </p:extLst>
+  </p:cSld>
+  <p:clrMapOvr>
+    <a:masterClrMapping/>
+  </p:clrMapOvr>
+</p:sld>
+</file>
+
+<file path=ppt/slides/slide13.xml><?xml version="1.0" encoding="utf-8"?>
+<p:sld xmlns:a="http://schemas.openxmlformats.org/drawingml/2006/main" xmlns:r="http://schemas.openxmlformats.org/officeDocument/2006/relationships" xmlns:p="http://schemas.openxmlformats.org/presentationml/2006/main">
+  <p:cSld>
+    <p:spTree>
+      <p:nvGrpSpPr>
+        <p:cNvPr id="1" name=""/>
+        <p:cNvGrpSpPr/>
+        <p:nvPr/>
+      </p:nvGrpSpPr>
+      <p:grpSpPr>
+        <a:xfrm>
+          <a:off x="0" y="0"/>
+          <a:ext cx="0" cy="0"/>
+          <a:chOff x="0" y="0"/>
+          <a:chExt cx="0" cy="0"/>
+        </a:xfrm>
+      </p:grpSpPr>
+      <p:sp>
+        <p:nvSpPr>
+          <p:cNvPr id="4" name="Dikdörtgen: Köşeleri Yuvarlatılmış 3">
+            <a:extLst>
+              <a:ext uri="{FF2B5EF4-FFF2-40B4-BE49-F238E27FC236}">
+                <a16:creationId xmlns:a16="http://schemas.microsoft.com/office/drawing/2014/main" id="{24824917-9527-9A35-B85F-969A69D3B615}"/>
+              </a:ext>
+            </a:extLst>
+          </p:cNvPr>
+          <p:cNvSpPr/>
+          <p:nvPr/>
+        </p:nvSpPr>
+        <p:spPr>
+          <a:xfrm>
+            <a:off x="4241320" y="2523226"/>
+            <a:ext cx="3709359" cy="1811548"/>
+          </a:xfrm>
+          <a:prstGeom prst="roundRect">
+            <a:avLst/>
+          </a:prstGeom>
+          <a:scene3d>
+            <a:camera prst="orthographicFront"/>
+            <a:lightRig rig="threePt" dir="t"/>
+          </a:scene3d>
+          <a:sp3d>
+            <a:bevelT w="114300" prst="artDeco"/>
+          </a:sp3d>
+        </p:spPr>
+        <p:style>
+          <a:lnRef idx="2">
+            <a:schemeClr val="accent1">
+              <a:shade val="15000"/>
+            </a:schemeClr>
+          </a:lnRef>
+          <a:fillRef idx="1">
+            <a:schemeClr val="accent1"/>
+          </a:fillRef>
+          <a:effectRef idx="0">
+            <a:schemeClr val="accent1"/>
+          </a:effectRef>
+          <a:fontRef idx="minor">
+            <a:schemeClr val="lt1"/>
+          </a:fontRef>
+        </p:style>
+        <p:txBody>
+          <a:bodyPr rtlCol="0" anchor="ctr"/>
+          <a:lstStyle/>
+          <a:p>
+            <a:pPr algn="ctr"/>
+            <a:r>
+              <a:rPr lang="tr-TR" dirty="0"/>
+              <a:t>SÜLASİ MEZİD </a:t>
+            </a:r>
+            <a:r>
+              <a:rPr lang="ar-AE" dirty="0"/>
+              <a:t>2</a:t>
+            </a:r>
+            <a:r>
+              <a:rPr lang="tr-TR" dirty="0"/>
+              <a:t>. NEVİ</a:t>
+            </a:r>
+          </a:p>
+          <a:p>
+            <a:pPr algn="ctr"/>
+            <a:r>
+              <a:rPr lang="ar-AE" dirty="0"/>
+              <a:t>2</a:t>
+            </a:r>
+            <a:r>
+              <a:rPr lang="tr-TR" dirty="0"/>
+              <a:t>. BAB</a:t>
+            </a:r>
+          </a:p>
+          <a:p>
+            <a:pPr algn="ctr"/>
+            <a:r>
+              <a:rPr lang="ar-AE" sz="3200" b="1" dirty="0"/>
+              <a:t>اِفْتِعَالْ</a:t>
+            </a:r>
+            <a:endParaRPr lang="tr-TR" sz="3200" b="1" dirty="0"/>
+          </a:p>
+        </p:txBody>
+      </p:sp>
+      <p:sp>
+        <p:nvSpPr>
+          <p:cNvPr id="5" name="Dikdörtgen: Üst Köşeleri Yuvarlatılmış 4">
+            <a:extLst>
+              <a:ext uri="{FF2B5EF4-FFF2-40B4-BE49-F238E27FC236}">
+                <a16:creationId xmlns:a16="http://schemas.microsoft.com/office/drawing/2014/main" id="{DE25C558-0A44-EE66-F7E7-E1CB66230352}"/>
+              </a:ext>
+            </a:extLst>
+          </p:cNvPr>
+          <p:cNvSpPr/>
+          <p:nvPr/>
+        </p:nvSpPr>
+        <p:spPr>
+          <a:xfrm>
+            <a:off x="4241320" y="1113905"/>
+            <a:ext cx="3709359" cy="1200670"/>
+          </a:xfrm>
+          <a:prstGeom prst="round2SameRect">
+            <a:avLst>
+              <a:gd name="adj1" fmla="val 0"/>
+              <a:gd name="adj2" fmla="val 0"/>
+            </a:avLst>
+          </a:prstGeom>
+          <a:ln>
+            <a:solidFill>
+              <a:schemeClr val="tx2">
+                <a:lumMod val="50000"/>
+                <a:lumOff val="50000"/>
+              </a:schemeClr>
+            </a:solidFill>
+          </a:ln>
+          <a:effectLst>
+            <a:glow rad="63500">
+              <a:schemeClr val="accent1">
+                <a:satMod val="175000"/>
+                <a:alpha val="40000"/>
+              </a:schemeClr>
+            </a:glow>
+          </a:effectLst>
+        </p:spPr>
+        <p:style>
+          <a:lnRef idx="2">
+            <a:schemeClr val="accent1"/>
+          </a:lnRef>
+          <a:fillRef idx="1">
+            <a:schemeClr val="lt1"/>
+          </a:fillRef>
+          <a:effectRef idx="0">
+            <a:schemeClr val="accent1"/>
+          </a:effectRef>
+          <a:fontRef idx="minor">
+            <a:schemeClr val="dk1"/>
+          </a:fontRef>
+        </p:style>
+        <p:txBody>
+          <a:bodyPr lIns="216000" tIns="72000" rIns="288000" bIns="288000" rtlCol="0" anchor="t"/>
+          <a:lstStyle/>
+          <a:p>
+            <a:r>
+              <a:rPr lang="tr-TR" dirty="0">
+                <a:solidFill>
+                  <a:srgbClr val="C00000"/>
+                </a:solidFill>
+              </a:rPr>
+              <a:t>ALAMETİ: </a:t>
+            </a:r>
+            <a:r>
+              <a:rPr lang="tr-TR" dirty="0">
+                <a:solidFill>
+                  <a:schemeClr val="tx1"/>
+                </a:solidFill>
+              </a:rPr>
+              <a:t>Evveline hemze(</a:t>
+            </a:r>
+            <a:r>
+              <a:rPr lang="ar-AE" dirty="0">
+                <a:solidFill>
+                  <a:schemeClr val="tx1"/>
+                </a:solidFill>
+              </a:rPr>
+              <a:t>ا</a:t>
+            </a:r>
+            <a:r>
+              <a:rPr lang="tr-TR" dirty="0">
+                <a:solidFill>
+                  <a:schemeClr val="tx1"/>
+                </a:solidFill>
+              </a:rPr>
+              <a:t>) </a:t>
+            </a:r>
+            <a:r>
+              <a:rPr lang="tr-TR" dirty="0" err="1">
+                <a:solidFill>
+                  <a:schemeClr val="tx1"/>
+                </a:solidFill>
+              </a:rPr>
+              <a:t>fael</a:t>
+            </a:r>
+            <a:r>
+              <a:rPr lang="tr-TR" dirty="0">
+                <a:solidFill>
+                  <a:schemeClr val="tx1"/>
+                </a:solidFill>
+              </a:rPr>
+              <a:t> fiili ile </a:t>
+            </a:r>
+            <a:r>
+              <a:rPr lang="tr-TR" dirty="0" err="1">
+                <a:solidFill>
+                  <a:schemeClr val="tx1"/>
+                </a:solidFill>
+              </a:rPr>
+              <a:t>aynel</a:t>
+            </a:r>
+            <a:r>
+              <a:rPr lang="tr-TR" dirty="0">
+                <a:solidFill>
+                  <a:schemeClr val="tx1"/>
+                </a:solidFill>
+              </a:rPr>
+              <a:t> fiili arasına Te(</a:t>
+            </a:r>
+            <a:r>
+              <a:rPr lang="ar-AE" dirty="0">
+                <a:solidFill>
+                  <a:schemeClr val="tx1"/>
+                </a:solidFill>
+              </a:rPr>
+              <a:t>ت</a:t>
+            </a:r>
+            <a:r>
+              <a:rPr lang="tr-TR" dirty="0">
+                <a:solidFill>
+                  <a:schemeClr val="tx1"/>
+                </a:solidFill>
+              </a:rPr>
+              <a:t>) harfleri ziyadesi ile mazisinin </a:t>
+            </a:r>
+            <a:r>
+              <a:rPr lang="ar-AE" dirty="0">
+                <a:solidFill>
+                  <a:schemeClr val="tx1"/>
+                </a:solidFill>
+              </a:rPr>
+              <a:t>5</a:t>
+            </a:r>
+            <a:r>
+              <a:rPr lang="tr-TR" dirty="0">
+                <a:solidFill>
+                  <a:schemeClr val="tx1"/>
+                </a:solidFill>
+              </a:rPr>
+              <a:t> harf üzere olmasıdır.</a:t>
+            </a:r>
+            <a:endParaRPr lang="tr-TR" dirty="0">
+              <a:solidFill>
+                <a:srgbClr val="C00000"/>
+              </a:solidFill>
+            </a:endParaRPr>
+          </a:p>
+        </p:txBody>
+      </p:sp>
+      <p:sp>
+        <p:nvSpPr>
+          <p:cNvPr id="7" name="Dikdörtgen: Üst Köşeleri Yuvarlatılmış 6">
+            <a:extLst>
+              <a:ext uri="{FF2B5EF4-FFF2-40B4-BE49-F238E27FC236}">
+                <a16:creationId xmlns:a16="http://schemas.microsoft.com/office/drawing/2014/main" id="{035ECAAF-6A44-611A-A787-ED2E34D3FDD0}"/>
+              </a:ext>
+            </a:extLst>
+          </p:cNvPr>
+          <p:cNvSpPr/>
+          <p:nvPr/>
+        </p:nvSpPr>
+        <p:spPr>
+          <a:xfrm>
+            <a:off x="240820" y="2868372"/>
+            <a:ext cx="3709359" cy="1121255"/>
+          </a:xfrm>
+          <a:prstGeom prst="round2SameRect">
+            <a:avLst>
+              <a:gd name="adj1" fmla="val 0"/>
+              <a:gd name="adj2" fmla="val 0"/>
+            </a:avLst>
+          </a:prstGeom>
+          <a:ln>
+            <a:solidFill>
+              <a:schemeClr val="tx2">
+                <a:lumMod val="50000"/>
+                <a:lumOff val="50000"/>
+              </a:schemeClr>
+            </a:solidFill>
+          </a:ln>
+          <a:effectLst>
+            <a:glow rad="63500">
+              <a:schemeClr val="accent1">
+                <a:satMod val="175000"/>
+                <a:alpha val="40000"/>
+              </a:schemeClr>
+            </a:glow>
+          </a:effectLst>
+        </p:spPr>
+        <p:style>
+          <a:lnRef idx="2">
+            <a:schemeClr val="accent1"/>
+          </a:lnRef>
+          <a:fillRef idx="1">
+            <a:schemeClr val="lt1"/>
+          </a:fillRef>
+          <a:effectRef idx="0">
+            <a:schemeClr val="accent1"/>
+          </a:effectRef>
+          <a:fontRef idx="minor">
+            <a:schemeClr val="dk1"/>
+          </a:fontRef>
+        </p:style>
+        <p:txBody>
+          <a:bodyPr lIns="216000" tIns="72000" rIns="288000" bIns="288000" rtlCol="0" anchor="t"/>
+          <a:lstStyle/>
+          <a:p>
+            <a:r>
+              <a:rPr lang="tr-TR" dirty="0">
+                <a:solidFill>
+                  <a:srgbClr val="C00000"/>
+                </a:solidFill>
+              </a:rPr>
+              <a:t>Binası: </a:t>
+            </a:r>
+            <a:r>
+              <a:rPr lang="tr-TR" dirty="0">
+                <a:solidFill>
+                  <a:schemeClr val="tx1"/>
+                </a:solidFill>
+              </a:rPr>
+              <a:t>Mutavaat içindir</a:t>
+            </a:r>
+            <a:endParaRPr lang="tr-TR" dirty="0">
+              <a:solidFill>
+                <a:srgbClr val="C00000"/>
+              </a:solidFill>
+            </a:endParaRPr>
+          </a:p>
+        </p:txBody>
+      </p:sp>
+      <p:sp>
+        <p:nvSpPr>
+          <p:cNvPr id="8" name="Dikdörtgen: Üst Köşeleri Yuvarlatılmış 7">
+            <a:extLst>
+              <a:ext uri="{FF2B5EF4-FFF2-40B4-BE49-F238E27FC236}">
+                <a16:creationId xmlns:a16="http://schemas.microsoft.com/office/drawing/2014/main" id="{30BE5D54-F616-EC32-A7B3-9070EBCFD1C5}"/>
+              </a:ext>
+            </a:extLst>
+          </p:cNvPr>
+          <p:cNvSpPr/>
+          <p:nvPr/>
+        </p:nvSpPr>
+        <p:spPr>
+          <a:xfrm>
+            <a:off x="8241821" y="2868371"/>
+            <a:ext cx="3709359" cy="1121256"/>
+          </a:xfrm>
+          <a:prstGeom prst="round2SameRect">
+            <a:avLst>
+              <a:gd name="adj1" fmla="val 0"/>
+              <a:gd name="adj2" fmla="val 0"/>
+            </a:avLst>
+          </a:prstGeom>
+          <a:ln>
+            <a:solidFill>
+              <a:schemeClr val="tx2">
+                <a:lumMod val="50000"/>
+                <a:lumOff val="50000"/>
+              </a:schemeClr>
+            </a:solidFill>
+          </a:ln>
+          <a:effectLst>
+            <a:glow rad="63500">
+              <a:schemeClr val="accent1">
+                <a:satMod val="175000"/>
+                <a:alpha val="40000"/>
+              </a:schemeClr>
+            </a:glow>
+          </a:effectLst>
+        </p:spPr>
+        <p:style>
+          <a:lnRef idx="2">
+            <a:schemeClr val="accent1"/>
+          </a:lnRef>
+          <a:fillRef idx="1">
+            <a:schemeClr val="lt1"/>
+          </a:fillRef>
+          <a:effectRef idx="0">
+            <a:schemeClr val="accent1"/>
+          </a:effectRef>
+          <a:fontRef idx="minor">
+            <a:schemeClr val="dk1"/>
+          </a:fontRef>
+        </p:style>
+        <p:txBody>
+          <a:bodyPr lIns="216000" tIns="72000" rIns="288000" bIns="288000" rtlCol="0" anchor="t"/>
+          <a:lstStyle/>
+          <a:p>
+            <a:r>
+              <a:rPr lang="tr-TR" dirty="0">
+                <a:solidFill>
+                  <a:srgbClr val="C00000"/>
+                </a:solidFill>
+              </a:rPr>
+              <a:t>Vezni:</a:t>
+            </a:r>
+            <a:endParaRPr lang="ar-AE" dirty="0">
+              <a:solidFill>
+                <a:srgbClr val="C00000"/>
+              </a:solidFill>
+            </a:endParaRPr>
+          </a:p>
+          <a:p>
+            <a:pPr algn="r"/>
+            <a:r>
+              <a:rPr lang="ar-AE" sz="3600" dirty="0">
+                <a:solidFill>
+                  <a:schemeClr val="tx1">
+                    <a:lumMod val="65000"/>
+                    <a:lumOff val="35000"/>
+                  </a:schemeClr>
+                </a:solidFill>
+              </a:rPr>
+              <a:t>اِفْتَعَلَ – يَفْتَعِلُ - اِفْتِعَالًا	</a:t>
+            </a:r>
+            <a:endParaRPr lang="tr-TR" sz="3600" dirty="0">
+              <a:solidFill>
+                <a:schemeClr val="tx1">
+                  <a:lumMod val="65000"/>
+                  <a:lumOff val="35000"/>
+                </a:schemeClr>
+              </a:solidFill>
+            </a:endParaRPr>
+          </a:p>
+        </p:txBody>
+      </p:sp>
+      <p:sp>
+        <p:nvSpPr>
+          <p:cNvPr id="9" name="Dikdörtgen: Üst Köşeleri Yuvarlatılmış 8">
+            <a:extLst>
+              <a:ext uri="{FF2B5EF4-FFF2-40B4-BE49-F238E27FC236}">
+                <a16:creationId xmlns:a16="http://schemas.microsoft.com/office/drawing/2014/main" id="{8960AD68-9065-3C5A-2910-54AD292D8F34}"/>
+              </a:ext>
+            </a:extLst>
+          </p:cNvPr>
+          <p:cNvSpPr/>
+          <p:nvPr/>
+        </p:nvSpPr>
+        <p:spPr>
+          <a:xfrm>
+            <a:off x="4031673" y="4543425"/>
+            <a:ext cx="4210148" cy="1121256"/>
+          </a:xfrm>
+          <a:prstGeom prst="round2SameRect">
+            <a:avLst>
+              <a:gd name="adj1" fmla="val 0"/>
+              <a:gd name="adj2" fmla="val 0"/>
+            </a:avLst>
+          </a:prstGeom>
+          <a:ln>
+            <a:solidFill>
+              <a:schemeClr val="tx2">
+                <a:lumMod val="50000"/>
+                <a:lumOff val="50000"/>
+              </a:schemeClr>
+            </a:solidFill>
+          </a:ln>
+          <a:effectLst>
+            <a:glow rad="63500">
+              <a:schemeClr val="accent1">
+                <a:satMod val="175000"/>
+                <a:alpha val="40000"/>
+              </a:schemeClr>
+            </a:glow>
+          </a:effectLst>
+        </p:spPr>
+        <p:style>
+          <a:lnRef idx="2">
+            <a:schemeClr val="accent1"/>
+          </a:lnRef>
+          <a:fillRef idx="1">
+            <a:schemeClr val="lt1"/>
+          </a:fillRef>
+          <a:effectRef idx="0">
+            <a:schemeClr val="accent1"/>
+          </a:effectRef>
+          <a:fontRef idx="minor">
+            <a:schemeClr val="dk1"/>
+          </a:fontRef>
+        </p:style>
+        <p:txBody>
+          <a:bodyPr lIns="216000" tIns="72000" rIns="288000" bIns="288000" rtlCol="0" anchor="t"/>
+          <a:lstStyle/>
+          <a:p>
+            <a:r>
+              <a:rPr lang="tr-TR" dirty="0">
+                <a:solidFill>
+                  <a:srgbClr val="C00000"/>
+                </a:solidFill>
+              </a:rPr>
+              <a:t>Mevzun:</a:t>
+            </a:r>
+            <a:endParaRPr lang="ar-AE" dirty="0">
+              <a:solidFill>
+                <a:srgbClr val="C00000"/>
+              </a:solidFill>
+            </a:endParaRPr>
+          </a:p>
+          <a:p>
+            <a:pPr algn="r"/>
+            <a:r>
+              <a:rPr lang="ar-AE" sz="3600" dirty="0">
+                <a:solidFill>
+                  <a:schemeClr val="tx1">
+                    <a:lumMod val="65000"/>
+                    <a:lumOff val="35000"/>
+                  </a:schemeClr>
+                </a:solidFill>
+              </a:rPr>
+              <a:t>اِجْتَمَعَ – يَجْتَمِعُ - اِجْتِمَاعًا	</a:t>
+            </a:r>
+            <a:endParaRPr lang="tr-TR" sz="3600" dirty="0">
+              <a:solidFill>
+                <a:schemeClr val="tx1">
+                  <a:lumMod val="65000"/>
+                  <a:lumOff val="35000"/>
+                </a:schemeClr>
+              </a:solidFill>
+            </a:endParaRPr>
+          </a:p>
+        </p:txBody>
+      </p:sp>
+      <p:sp>
+        <p:nvSpPr>
+          <p:cNvPr id="2" name="İkizkenar Üçgen 1">
+            <a:extLst>
+              <a:ext uri="{FF2B5EF4-FFF2-40B4-BE49-F238E27FC236}">
+                <a16:creationId xmlns:a16="http://schemas.microsoft.com/office/drawing/2014/main" id="{F761A71F-29CB-9CF0-1D02-9D53577DA23F}"/>
+              </a:ext>
+            </a:extLst>
+          </p:cNvPr>
+          <p:cNvSpPr/>
+          <p:nvPr/>
+        </p:nvSpPr>
+        <p:spPr>
+          <a:xfrm rot="18876393">
+            <a:off x="-810273" y="-176755"/>
+            <a:ext cx="2538637" cy="1259992"/>
+          </a:xfrm>
+          <a:prstGeom prst="triangle">
+            <a:avLst/>
+          </a:prstGeom>
+          <a:solidFill>
+            <a:schemeClr val="accent6">
+              <a:lumMod val="75000"/>
+            </a:schemeClr>
+          </a:solidFill>
+          <a:ln>
+            <a:solidFill>
+              <a:schemeClr val="accent6">
+                <a:lumMod val="60000"/>
+                <a:lumOff val="40000"/>
+              </a:schemeClr>
+            </a:solidFill>
+          </a:ln>
+        </p:spPr>
+        <p:style>
+          <a:lnRef idx="2">
+            <a:schemeClr val="accent1">
+              <a:shade val="15000"/>
+            </a:schemeClr>
+          </a:lnRef>
+          <a:fillRef idx="1">
+            <a:schemeClr val="accent1"/>
+          </a:fillRef>
+          <a:effectRef idx="0">
+            <a:schemeClr val="accent1"/>
+          </a:effectRef>
+          <a:fontRef idx="minor">
+            <a:schemeClr val="lt1"/>
+          </a:fontRef>
+        </p:style>
+        <p:txBody>
+          <a:bodyPr rtlCol="0" anchor="ctr"/>
+          <a:lstStyle/>
+          <a:p>
+            <a:r>
+              <a:rPr lang="ar-AE" sz="2400" b="1" dirty="0">
+                <a:solidFill>
+                  <a:schemeClr val="bg1"/>
+                </a:solidFill>
+              </a:rPr>
+              <a:t>2</a:t>
+            </a:r>
+            <a:r>
+              <a:rPr lang="tr-TR" sz="2400" b="1" dirty="0">
+                <a:solidFill>
+                  <a:schemeClr val="bg1"/>
+                </a:solidFill>
+              </a:rPr>
+              <a:t>. NEVİ</a:t>
+            </a:r>
+          </a:p>
+        </p:txBody>
+      </p:sp>
+    </p:spTree>
+    <p:extLst>
+      <p:ext uri="{BB962C8B-B14F-4D97-AF65-F5344CB8AC3E}">
+        <p14:creationId xmlns:p14="http://schemas.microsoft.com/office/powerpoint/2010/main" val="2155816662"/>
+      </p:ext>
+    </p:extLst>
+  </p:cSld>
+  <p:clrMapOvr>
+    <a:masterClrMapping/>
+  </p:clrMapOvr>
+</p:sld>
+</file>
+
+<file path=ppt/slides/slide14.xml><?xml version="1.0" encoding="utf-8"?>
+<p:sld xmlns:a="http://schemas.openxmlformats.org/drawingml/2006/main" xmlns:r="http://schemas.openxmlformats.org/officeDocument/2006/relationships" xmlns:p="http://schemas.openxmlformats.org/presentationml/2006/main">
+  <p:cSld>
+    <p:spTree>
+      <p:nvGrpSpPr>
+        <p:cNvPr id="1" name=""/>
+        <p:cNvGrpSpPr/>
+        <p:nvPr/>
+      </p:nvGrpSpPr>
+      <p:grpSpPr>
+        <a:xfrm>
+          <a:off x="0" y="0"/>
+          <a:ext cx="0" cy="0"/>
+          <a:chOff x="0" y="0"/>
+          <a:chExt cx="0" cy="0"/>
+        </a:xfrm>
+      </p:grpSpPr>
+      <p:sp>
+        <p:nvSpPr>
+          <p:cNvPr id="4" name="Dikdörtgen: Köşeleri Yuvarlatılmış 3">
+            <a:extLst>
+              <a:ext uri="{FF2B5EF4-FFF2-40B4-BE49-F238E27FC236}">
+                <a16:creationId xmlns:a16="http://schemas.microsoft.com/office/drawing/2014/main" id="{24824917-9527-9A35-B85F-969A69D3B615}"/>
+              </a:ext>
+            </a:extLst>
+          </p:cNvPr>
+          <p:cNvSpPr/>
+          <p:nvPr/>
+        </p:nvSpPr>
+        <p:spPr>
+          <a:xfrm>
+            <a:off x="4241320" y="2523226"/>
+            <a:ext cx="3709359" cy="1811548"/>
+          </a:xfrm>
+          <a:prstGeom prst="roundRect">
+            <a:avLst/>
+          </a:prstGeom>
+          <a:scene3d>
+            <a:camera prst="orthographicFront"/>
+            <a:lightRig rig="threePt" dir="t"/>
+          </a:scene3d>
+          <a:sp3d>
+            <a:bevelT w="114300" prst="artDeco"/>
+          </a:sp3d>
+        </p:spPr>
+        <p:style>
+          <a:lnRef idx="2">
+            <a:schemeClr val="accent1">
+              <a:shade val="15000"/>
+            </a:schemeClr>
+          </a:lnRef>
+          <a:fillRef idx="1">
+            <a:schemeClr val="accent1"/>
+          </a:fillRef>
+          <a:effectRef idx="0">
+            <a:schemeClr val="accent1"/>
+          </a:effectRef>
+          <a:fontRef idx="minor">
+            <a:schemeClr val="lt1"/>
+          </a:fontRef>
+        </p:style>
+        <p:txBody>
+          <a:bodyPr rtlCol="0" anchor="ctr"/>
+          <a:lstStyle/>
+          <a:p>
+            <a:pPr algn="ctr"/>
+            <a:r>
+              <a:rPr lang="tr-TR" dirty="0"/>
+              <a:t>SÜLASİ MEZİD </a:t>
+            </a:r>
+            <a:r>
+              <a:rPr lang="ar-AE" dirty="0"/>
+              <a:t>2</a:t>
+            </a:r>
+            <a:r>
+              <a:rPr lang="tr-TR" dirty="0"/>
+              <a:t>. NEVİ</a:t>
+            </a:r>
+          </a:p>
+          <a:p>
+            <a:pPr algn="ctr"/>
+            <a:r>
+              <a:rPr lang="ar-AE" dirty="0"/>
+              <a:t>3</a:t>
+            </a:r>
+            <a:r>
+              <a:rPr lang="tr-TR" dirty="0"/>
+              <a:t>. BAB</a:t>
+            </a:r>
+          </a:p>
+          <a:p>
+            <a:pPr algn="ctr"/>
+            <a:r>
+              <a:rPr lang="ar-AE" sz="3200" b="1" dirty="0"/>
+              <a:t>اِفعِلَالْ</a:t>
+            </a:r>
+            <a:endParaRPr lang="tr-TR" sz="3200" b="1" dirty="0"/>
+          </a:p>
+        </p:txBody>
+      </p:sp>
+      <p:sp>
+        <p:nvSpPr>
+          <p:cNvPr id="5" name="Dikdörtgen: Üst Köşeleri Yuvarlatılmış 4">
+            <a:extLst>
+              <a:ext uri="{FF2B5EF4-FFF2-40B4-BE49-F238E27FC236}">
+                <a16:creationId xmlns:a16="http://schemas.microsoft.com/office/drawing/2014/main" id="{DE25C558-0A44-EE66-F7E7-E1CB66230352}"/>
+              </a:ext>
+            </a:extLst>
+          </p:cNvPr>
+          <p:cNvSpPr/>
+          <p:nvPr/>
+        </p:nvSpPr>
+        <p:spPr>
+          <a:xfrm>
+            <a:off x="4241320" y="1105593"/>
+            <a:ext cx="3709359" cy="1208981"/>
+          </a:xfrm>
+          <a:prstGeom prst="round2SameRect">
+            <a:avLst>
+              <a:gd name="adj1" fmla="val 0"/>
+              <a:gd name="adj2" fmla="val 0"/>
+            </a:avLst>
+          </a:prstGeom>
+          <a:ln>
+            <a:solidFill>
+              <a:schemeClr val="tx2">
+                <a:lumMod val="50000"/>
+                <a:lumOff val="50000"/>
+              </a:schemeClr>
+            </a:solidFill>
+          </a:ln>
+          <a:effectLst>
+            <a:glow rad="63500">
+              <a:schemeClr val="accent1">
+                <a:satMod val="175000"/>
+                <a:alpha val="40000"/>
+              </a:schemeClr>
+            </a:glow>
+          </a:effectLst>
+        </p:spPr>
+        <p:style>
+          <a:lnRef idx="2">
+            <a:schemeClr val="accent1"/>
+          </a:lnRef>
+          <a:fillRef idx="1">
+            <a:schemeClr val="lt1"/>
+          </a:fillRef>
+          <a:effectRef idx="0">
+            <a:schemeClr val="accent1"/>
+          </a:effectRef>
+          <a:fontRef idx="minor">
+            <a:schemeClr val="dk1"/>
+          </a:fontRef>
+        </p:style>
+        <p:txBody>
+          <a:bodyPr lIns="216000" tIns="72000" rIns="288000" bIns="288000" rtlCol="0" anchor="t"/>
+          <a:lstStyle/>
+          <a:p>
+            <a:r>
+              <a:rPr lang="tr-TR" dirty="0">
+                <a:solidFill>
+                  <a:srgbClr val="C00000"/>
+                </a:solidFill>
+              </a:rPr>
+              <a:t>ALAMETİ: </a:t>
+            </a:r>
+            <a:r>
+              <a:rPr lang="tr-TR" dirty="0">
+                <a:solidFill>
+                  <a:schemeClr val="tx1"/>
+                </a:solidFill>
+              </a:rPr>
+              <a:t>Evveline hemze(</a:t>
+            </a:r>
+            <a:r>
+              <a:rPr lang="ar-AE" dirty="0">
+                <a:solidFill>
+                  <a:schemeClr val="tx1"/>
+                </a:solidFill>
+              </a:rPr>
+              <a:t>ا</a:t>
+            </a:r>
+            <a:r>
+              <a:rPr lang="tr-TR" dirty="0">
+                <a:solidFill>
+                  <a:schemeClr val="tx1"/>
+                </a:solidFill>
+              </a:rPr>
+              <a:t>)</a:t>
+            </a:r>
+            <a:r>
+              <a:rPr lang="ar-AE" dirty="0">
+                <a:solidFill>
+                  <a:schemeClr val="tx1"/>
+                </a:solidFill>
+              </a:rPr>
+              <a:t>  </a:t>
+            </a:r>
+            <a:r>
+              <a:rPr lang="tr-TR" dirty="0">
+                <a:solidFill>
+                  <a:schemeClr val="tx1"/>
+                </a:solidFill>
+              </a:rPr>
+              <a:t> sonuna lamel fiili cinsinden bir harf  ziyadesi ile mazisinin 4 harf üzere olmasıdır.</a:t>
+            </a:r>
+            <a:endParaRPr lang="tr-TR" dirty="0">
+              <a:solidFill>
+                <a:srgbClr val="C00000"/>
+              </a:solidFill>
+            </a:endParaRPr>
+          </a:p>
+        </p:txBody>
+      </p:sp>
+      <p:sp>
+        <p:nvSpPr>
+          <p:cNvPr id="7" name="Dikdörtgen: Üst Köşeleri Yuvarlatılmış 6">
+            <a:extLst>
+              <a:ext uri="{FF2B5EF4-FFF2-40B4-BE49-F238E27FC236}">
+                <a16:creationId xmlns:a16="http://schemas.microsoft.com/office/drawing/2014/main" id="{035ECAAF-6A44-611A-A787-ED2E34D3FDD0}"/>
+              </a:ext>
+            </a:extLst>
+          </p:cNvPr>
+          <p:cNvSpPr/>
+          <p:nvPr/>
+        </p:nvSpPr>
+        <p:spPr>
+          <a:xfrm>
+            <a:off x="240820" y="2868372"/>
+            <a:ext cx="3709359" cy="1121255"/>
+          </a:xfrm>
+          <a:prstGeom prst="round2SameRect">
+            <a:avLst>
+              <a:gd name="adj1" fmla="val 0"/>
+              <a:gd name="adj2" fmla="val 0"/>
+            </a:avLst>
+          </a:prstGeom>
+          <a:ln>
+            <a:solidFill>
+              <a:schemeClr val="tx2">
+                <a:lumMod val="50000"/>
+                <a:lumOff val="50000"/>
+              </a:schemeClr>
+            </a:solidFill>
+          </a:ln>
+          <a:effectLst>
+            <a:glow rad="63500">
+              <a:schemeClr val="accent1">
+                <a:satMod val="175000"/>
+                <a:alpha val="40000"/>
+              </a:schemeClr>
+            </a:glow>
+          </a:effectLst>
+        </p:spPr>
+        <p:style>
+          <a:lnRef idx="2">
+            <a:schemeClr val="accent1"/>
+          </a:lnRef>
+          <a:fillRef idx="1">
+            <a:schemeClr val="lt1"/>
+          </a:fillRef>
+          <a:effectRef idx="0">
+            <a:schemeClr val="accent1"/>
+          </a:effectRef>
+          <a:fontRef idx="minor">
+            <a:schemeClr val="dk1"/>
+          </a:fontRef>
+        </p:style>
+        <p:txBody>
+          <a:bodyPr lIns="216000" tIns="72000" rIns="288000" bIns="288000" rtlCol="0" anchor="t"/>
+          <a:lstStyle/>
+          <a:p>
+            <a:r>
+              <a:rPr lang="tr-TR" dirty="0">
+                <a:solidFill>
+                  <a:srgbClr val="C00000"/>
+                </a:solidFill>
+              </a:rPr>
+              <a:t>Binası: </a:t>
+            </a:r>
+            <a:r>
+              <a:rPr lang="tr-TR" dirty="0">
+                <a:solidFill>
+                  <a:schemeClr val="tx1"/>
+                </a:solidFill>
+              </a:rPr>
+              <a:t>Lazımın mübalağası içindir.</a:t>
+            </a:r>
+            <a:endParaRPr lang="tr-TR" dirty="0">
+              <a:solidFill>
+                <a:srgbClr val="C00000"/>
+              </a:solidFill>
+            </a:endParaRPr>
+          </a:p>
+        </p:txBody>
+      </p:sp>
+      <p:sp>
+        <p:nvSpPr>
+          <p:cNvPr id="8" name="Dikdörtgen: Üst Köşeleri Yuvarlatılmış 7">
+            <a:extLst>
+              <a:ext uri="{FF2B5EF4-FFF2-40B4-BE49-F238E27FC236}">
+                <a16:creationId xmlns:a16="http://schemas.microsoft.com/office/drawing/2014/main" id="{30BE5D54-F616-EC32-A7B3-9070EBCFD1C5}"/>
+              </a:ext>
+            </a:extLst>
+          </p:cNvPr>
+          <p:cNvSpPr/>
+          <p:nvPr/>
+        </p:nvSpPr>
+        <p:spPr>
+          <a:xfrm>
+            <a:off x="8241821" y="2868371"/>
+            <a:ext cx="3709359" cy="1121256"/>
+          </a:xfrm>
+          <a:prstGeom prst="round2SameRect">
+            <a:avLst>
+              <a:gd name="adj1" fmla="val 0"/>
+              <a:gd name="adj2" fmla="val 0"/>
+            </a:avLst>
+          </a:prstGeom>
+          <a:ln>
+            <a:solidFill>
+              <a:schemeClr val="tx2">
+                <a:lumMod val="50000"/>
+                <a:lumOff val="50000"/>
+              </a:schemeClr>
+            </a:solidFill>
+          </a:ln>
+          <a:effectLst>
+            <a:glow rad="63500">
+              <a:schemeClr val="accent1">
+                <a:satMod val="175000"/>
+                <a:alpha val="40000"/>
+              </a:schemeClr>
+            </a:glow>
+          </a:effectLst>
+        </p:spPr>
+        <p:style>
+          <a:lnRef idx="2">
+            <a:schemeClr val="accent1"/>
+          </a:lnRef>
+          <a:fillRef idx="1">
+            <a:schemeClr val="lt1"/>
+          </a:fillRef>
+          <a:effectRef idx="0">
+            <a:schemeClr val="accent1"/>
+          </a:effectRef>
+          <a:fontRef idx="minor">
+            <a:schemeClr val="dk1"/>
+          </a:fontRef>
+        </p:style>
+        <p:txBody>
+          <a:bodyPr lIns="216000" tIns="72000" rIns="288000" bIns="288000" rtlCol="0" anchor="t"/>
+          <a:lstStyle/>
+          <a:p>
+            <a:r>
+              <a:rPr lang="tr-TR" dirty="0">
+                <a:solidFill>
+                  <a:srgbClr val="C00000"/>
+                </a:solidFill>
+              </a:rPr>
+              <a:t>Vezni:</a:t>
+            </a:r>
+            <a:endParaRPr lang="ar-AE" dirty="0">
+              <a:solidFill>
+                <a:srgbClr val="C00000"/>
+              </a:solidFill>
+            </a:endParaRPr>
+          </a:p>
+          <a:p>
+            <a:pPr algn="r"/>
+            <a:r>
+              <a:rPr lang="ar-AE" sz="3600" dirty="0">
+                <a:solidFill>
+                  <a:schemeClr val="tx1">
+                    <a:lumMod val="65000"/>
+                    <a:lumOff val="35000"/>
+                  </a:schemeClr>
+                </a:solidFill>
+              </a:rPr>
+              <a:t>اِفْعَلَّ – يَفْعَلُّ - اِفْعِلَالًا	</a:t>
+            </a:r>
+            <a:endParaRPr lang="tr-TR" sz="3600" dirty="0">
+              <a:solidFill>
+                <a:schemeClr val="tx1">
+                  <a:lumMod val="65000"/>
+                  <a:lumOff val="35000"/>
+                </a:schemeClr>
+              </a:solidFill>
+            </a:endParaRPr>
+          </a:p>
+        </p:txBody>
+      </p:sp>
+      <p:sp>
+        <p:nvSpPr>
+          <p:cNvPr id="9" name="Dikdörtgen: Üst Köşeleri Yuvarlatılmış 8">
+            <a:extLst>
+              <a:ext uri="{FF2B5EF4-FFF2-40B4-BE49-F238E27FC236}">
+                <a16:creationId xmlns:a16="http://schemas.microsoft.com/office/drawing/2014/main" id="{8960AD68-9065-3C5A-2910-54AD292D8F34}"/>
+              </a:ext>
+            </a:extLst>
+          </p:cNvPr>
+          <p:cNvSpPr/>
+          <p:nvPr/>
+        </p:nvSpPr>
+        <p:spPr>
+          <a:xfrm>
+            <a:off x="4095748" y="4543425"/>
+            <a:ext cx="4000501" cy="1121256"/>
+          </a:xfrm>
+          <a:prstGeom prst="round2SameRect">
+            <a:avLst>
+              <a:gd name="adj1" fmla="val 0"/>
+              <a:gd name="adj2" fmla="val 0"/>
+            </a:avLst>
+          </a:prstGeom>
+          <a:ln>
+            <a:solidFill>
+              <a:schemeClr val="tx2">
+                <a:lumMod val="50000"/>
+                <a:lumOff val="50000"/>
+              </a:schemeClr>
+            </a:solidFill>
+          </a:ln>
+          <a:effectLst>
+            <a:glow rad="63500">
+              <a:schemeClr val="accent1">
+                <a:satMod val="175000"/>
+                <a:alpha val="40000"/>
+              </a:schemeClr>
+            </a:glow>
+          </a:effectLst>
+        </p:spPr>
+        <p:style>
+          <a:lnRef idx="2">
+            <a:schemeClr val="accent1"/>
+          </a:lnRef>
+          <a:fillRef idx="1">
+            <a:schemeClr val="lt1"/>
+          </a:fillRef>
+          <a:effectRef idx="0">
+            <a:schemeClr val="accent1"/>
+          </a:effectRef>
+          <a:fontRef idx="minor">
+            <a:schemeClr val="dk1"/>
+          </a:fontRef>
+        </p:style>
+        <p:txBody>
+          <a:bodyPr lIns="216000" tIns="72000" rIns="288000" bIns="288000" rtlCol="0" anchor="t"/>
+          <a:lstStyle/>
+          <a:p>
+            <a:r>
+              <a:rPr lang="tr-TR" dirty="0">
+                <a:solidFill>
+                  <a:srgbClr val="C00000"/>
+                </a:solidFill>
+              </a:rPr>
+              <a:t>Mevzun:</a:t>
+            </a:r>
+            <a:endParaRPr lang="ar-AE" dirty="0">
+              <a:solidFill>
+                <a:srgbClr val="C00000"/>
+              </a:solidFill>
+            </a:endParaRPr>
+          </a:p>
+          <a:p>
+            <a:pPr algn="r"/>
+            <a:r>
+              <a:rPr lang="ar-AE" sz="3600" dirty="0">
+                <a:solidFill>
+                  <a:schemeClr val="tx1">
+                    <a:lumMod val="65000"/>
+                    <a:lumOff val="35000"/>
+                  </a:schemeClr>
+                </a:solidFill>
+              </a:rPr>
+              <a:t>اِحْمَرَّ – يَحْمَرُّ - اِحْمِرَارًا	</a:t>
+            </a:r>
+            <a:endParaRPr lang="tr-TR" sz="3600" dirty="0">
+              <a:solidFill>
+                <a:schemeClr val="tx1">
+                  <a:lumMod val="65000"/>
+                  <a:lumOff val="35000"/>
+                </a:schemeClr>
+              </a:solidFill>
+            </a:endParaRPr>
+          </a:p>
+        </p:txBody>
+      </p:sp>
+      <p:sp>
+        <p:nvSpPr>
+          <p:cNvPr id="2" name="İkizkenar Üçgen 1">
+            <a:extLst>
+              <a:ext uri="{FF2B5EF4-FFF2-40B4-BE49-F238E27FC236}">
+                <a16:creationId xmlns:a16="http://schemas.microsoft.com/office/drawing/2014/main" id="{F761A71F-29CB-9CF0-1D02-9D53577DA23F}"/>
+              </a:ext>
+            </a:extLst>
+          </p:cNvPr>
+          <p:cNvSpPr/>
+          <p:nvPr/>
+        </p:nvSpPr>
+        <p:spPr>
+          <a:xfrm rot="18876393">
+            <a:off x="-810273" y="-176755"/>
+            <a:ext cx="2538637" cy="1259992"/>
+          </a:xfrm>
+          <a:prstGeom prst="triangle">
+            <a:avLst/>
+          </a:prstGeom>
+          <a:solidFill>
+            <a:schemeClr val="accent6">
+              <a:lumMod val="75000"/>
+            </a:schemeClr>
+          </a:solidFill>
+          <a:ln>
+            <a:solidFill>
+              <a:schemeClr val="accent6">
+                <a:lumMod val="60000"/>
+                <a:lumOff val="40000"/>
+              </a:schemeClr>
+            </a:solidFill>
+          </a:ln>
+        </p:spPr>
+        <p:style>
+          <a:lnRef idx="2">
+            <a:schemeClr val="accent1">
+              <a:shade val="15000"/>
+            </a:schemeClr>
+          </a:lnRef>
+          <a:fillRef idx="1">
+            <a:schemeClr val="accent1"/>
+          </a:fillRef>
+          <a:effectRef idx="0">
+            <a:schemeClr val="accent1"/>
+          </a:effectRef>
+          <a:fontRef idx="minor">
+            <a:schemeClr val="lt1"/>
+          </a:fontRef>
+        </p:style>
+        <p:txBody>
+          <a:bodyPr rtlCol="0" anchor="ctr"/>
+          <a:lstStyle/>
+          <a:p>
+            <a:r>
+              <a:rPr lang="ar-AE" sz="2400" b="1" dirty="0">
+                <a:solidFill>
+                  <a:schemeClr val="bg1"/>
+                </a:solidFill>
+              </a:rPr>
+              <a:t>2</a:t>
+            </a:r>
+            <a:r>
+              <a:rPr lang="tr-TR" sz="2400" b="1" dirty="0">
+                <a:solidFill>
+                  <a:schemeClr val="bg1"/>
+                </a:solidFill>
+              </a:rPr>
+              <a:t>. NEVİ</a:t>
+            </a:r>
+          </a:p>
+        </p:txBody>
+      </p:sp>
+    </p:spTree>
+    <p:extLst>
+      <p:ext uri="{BB962C8B-B14F-4D97-AF65-F5344CB8AC3E}">
+        <p14:creationId xmlns:p14="http://schemas.microsoft.com/office/powerpoint/2010/main" val="1671729752"/>
+      </p:ext>
+    </p:extLst>
+  </p:cSld>
+  <p:clrMapOvr>
+    <a:masterClrMapping/>
+  </p:clrMapOvr>
+</p:sld>
+</file>
+
+<file path=ppt/slides/slide15.xml><?xml version="1.0" encoding="utf-8"?>
+<p:sld xmlns:a="http://schemas.openxmlformats.org/drawingml/2006/main" xmlns:r="http://schemas.openxmlformats.org/officeDocument/2006/relationships" xmlns:p="http://schemas.openxmlformats.org/presentationml/2006/main">
+  <p:cSld>
+    <p:spTree>
+      <p:nvGrpSpPr>
+        <p:cNvPr id="1" name=""/>
+        <p:cNvGrpSpPr/>
+        <p:nvPr/>
+      </p:nvGrpSpPr>
+      <p:grpSpPr>
+        <a:xfrm>
+          <a:off x="0" y="0"/>
+          <a:ext cx="0" cy="0"/>
+          <a:chOff x="0" y="0"/>
+          <a:chExt cx="0" cy="0"/>
+        </a:xfrm>
+      </p:grpSpPr>
+      <p:sp>
+        <p:nvSpPr>
+          <p:cNvPr id="4" name="Dikdörtgen: Köşeleri Yuvarlatılmış 3">
+            <a:extLst>
+              <a:ext uri="{FF2B5EF4-FFF2-40B4-BE49-F238E27FC236}">
+                <a16:creationId xmlns:a16="http://schemas.microsoft.com/office/drawing/2014/main" id="{24824917-9527-9A35-B85F-969A69D3B615}"/>
+              </a:ext>
+            </a:extLst>
+          </p:cNvPr>
+          <p:cNvSpPr/>
+          <p:nvPr/>
+        </p:nvSpPr>
+        <p:spPr>
+          <a:xfrm>
+            <a:off x="4241320" y="2523226"/>
+            <a:ext cx="3709359" cy="1811548"/>
+          </a:xfrm>
+          <a:prstGeom prst="roundRect">
+            <a:avLst/>
+          </a:prstGeom>
+          <a:scene3d>
+            <a:camera prst="orthographicFront"/>
+            <a:lightRig rig="threePt" dir="t"/>
+          </a:scene3d>
+          <a:sp3d>
+            <a:bevelT w="114300" prst="artDeco"/>
+          </a:sp3d>
+        </p:spPr>
+        <p:style>
+          <a:lnRef idx="2">
+            <a:schemeClr val="accent1">
+              <a:shade val="15000"/>
+            </a:schemeClr>
+          </a:lnRef>
+          <a:fillRef idx="1">
+            <a:schemeClr val="accent1"/>
+          </a:fillRef>
+          <a:effectRef idx="0">
+            <a:schemeClr val="accent1"/>
+          </a:effectRef>
+          <a:fontRef idx="minor">
+            <a:schemeClr val="lt1"/>
+          </a:fontRef>
+        </p:style>
+        <p:txBody>
+          <a:bodyPr rtlCol="0" anchor="ctr"/>
+          <a:lstStyle/>
+          <a:p>
+            <a:pPr algn="ctr"/>
+            <a:r>
+              <a:rPr lang="tr-TR" dirty="0"/>
+              <a:t>SÜLASİ MEZİD </a:t>
+            </a:r>
+            <a:r>
+              <a:rPr lang="ar-AE" dirty="0"/>
+              <a:t>2</a:t>
+            </a:r>
+            <a:r>
+              <a:rPr lang="tr-TR" dirty="0"/>
+              <a:t>. NEVİ</a:t>
+            </a:r>
+          </a:p>
+          <a:p>
+            <a:pPr algn="ctr"/>
+            <a:r>
+              <a:rPr lang="ar-AE" dirty="0"/>
+              <a:t>4</a:t>
+            </a:r>
+            <a:r>
+              <a:rPr lang="tr-TR" dirty="0"/>
+              <a:t>. BAB</a:t>
+            </a:r>
+          </a:p>
+          <a:p>
+            <a:pPr algn="ctr"/>
+            <a:r>
+              <a:rPr lang="tr-TR" sz="3200" b="1" dirty="0"/>
+              <a:t>  </a:t>
+            </a:r>
+            <a:r>
+              <a:rPr lang="ar-AE" sz="3200" dirty="0"/>
+              <a:t> </a:t>
+            </a:r>
+            <a:r>
+              <a:rPr lang="ar-AE" sz="3200" b="1" dirty="0"/>
+              <a:t>تَفَعُّل</a:t>
+            </a:r>
+            <a:endParaRPr lang="tr-TR" sz="3200" b="1" dirty="0"/>
+          </a:p>
+        </p:txBody>
+      </p:sp>
+      <p:sp>
+        <p:nvSpPr>
+          <p:cNvPr id="5" name="Dikdörtgen: Üst Köşeleri Yuvarlatılmış 4">
+            <a:extLst>
+              <a:ext uri="{FF2B5EF4-FFF2-40B4-BE49-F238E27FC236}">
+                <a16:creationId xmlns:a16="http://schemas.microsoft.com/office/drawing/2014/main" id="{DE25C558-0A44-EE66-F7E7-E1CB66230352}"/>
+              </a:ext>
+            </a:extLst>
+          </p:cNvPr>
+          <p:cNvSpPr/>
+          <p:nvPr/>
+        </p:nvSpPr>
+        <p:spPr>
+          <a:xfrm>
+            <a:off x="4241320" y="1014153"/>
+            <a:ext cx="3709359" cy="1300421"/>
+          </a:xfrm>
+          <a:prstGeom prst="round2SameRect">
+            <a:avLst>
+              <a:gd name="adj1" fmla="val 0"/>
+              <a:gd name="adj2" fmla="val 0"/>
+            </a:avLst>
+          </a:prstGeom>
+          <a:ln>
+            <a:solidFill>
+              <a:schemeClr val="tx2">
+                <a:lumMod val="50000"/>
+                <a:lumOff val="50000"/>
+              </a:schemeClr>
+            </a:solidFill>
+          </a:ln>
+          <a:effectLst>
+            <a:glow rad="63500">
+              <a:schemeClr val="accent1">
+                <a:satMod val="175000"/>
+                <a:alpha val="40000"/>
+              </a:schemeClr>
+            </a:glow>
+          </a:effectLst>
+        </p:spPr>
+        <p:style>
+          <a:lnRef idx="2">
+            <a:schemeClr val="accent1"/>
+          </a:lnRef>
+          <a:fillRef idx="1">
+            <a:schemeClr val="lt1"/>
+          </a:fillRef>
+          <a:effectRef idx="0">
+            <a:schemeClr val="accent1"/>
+          </a:effectRef>
+          <a:fontRef idx="minor">
+            <a:schemeClr val="dk1"/>
+          </a:fontRef>
+        </p:style>
+        <p:txBody>
+          <a:bodyPr lIns="216000" tIns="72000" rIns="288000" bIns="288000" rtlCol="0" anchor="t"/>
+          <a:lstStyle/>
+          <a:p>
+            <a:r>
+              <a:rPr lang="tr-TR" dirty="0">
+                <a:solidFill>
+                  <a:srgbClr val="C00000"/>
+                </a:solidFill>
+              </a:rPr>
+              <a:t>ALAMETİ: </a:t>
+            </a:r>
+            <a:r>
+              <a:rPr lang="tr-TR" dirty="0">
+                <a:solidFill>
+                  <a:schemeClr val="tx1"/>
+                </a:solidFill>
+              </a:rPr>
+              <a:t>Evveline Te(</a:t>
+            </a:r>
+            <a:r>
+              <a:rPr lang="ar-AE" dirty="0">
+                <a:solidFill>
+                  <a:schemeClr val="tx1"/>
+                </a:solidFill>
+              </a:rPr>
+              <a:t>ت</a:t>
+            </a:r>
+            <a:r>
+              <a:rPr lang="tr-TR" dirty="0">
+                <a:solidFill>
+                  <a:schemeClr val="tx1"/>
+                </a:solidFill>
+              </a:rPr>
+              <a:t>)</a:t>
+            </a:r>
+            <a:r>
+              <a:rPr lang="ar-AE" dirty="0">
+                <a:solidFill>
+                  <a:schemeClr val="tx1"/>
+                </a:solidFill>
+              </a:rPr>
+              <a:t>  </a:t>
+            </a:r>
+            <a:r>
+              <a:rPr lang="tr-TR" dirty="0">
+                <a:solidFill>
+                  <a:schemeClr val="tx1"/>
+                </a:solidFill>
+              </a:rPr>
+              <a:t> </a:t>
+            </a:r>
+            <a:r>
+              <a:rPr lang="tr-TR" dirty="0" err="1">
+                <a:solidFill>
+                  <a:schemeClr val="tx1"/>
+                </a:solidFill>
+              </a:rPr>
+              <a:t>fael</a:t>
+            </a:r>
+            <a:r>
+              <a:rPr lang="tr-TR" dirty="0">
+                <a:solidFill>
+                  <a:schemeClr val="tx1"/>
+                </a:solidFill>
+              </a:rPr>
+              <a:t> fiili ile </a:t>
+            </a:r>
+            <a:r>
+              <a:rPr lang="tr-TR" dirty="0" err="1">
+                <a:solidFill>
+                  <a:schemeClr val="tx1"/>
+                </a:solidFill>
+              </a:rPr>
+              <a:t>aynel</a:t>
+            </a:r>
+            <a:r>
+              <a:rPr lang="tr-TR" dirty="0">
+                <a:solidFill>
+                  <a:schemeClr val="tx1"/>
+                </a:solidFill>
+              </a:rPr>
+              <a:t> fiili arasına </a:t>
+            </a:r>
+            <a:r>
+              <a:rPr lang="tr-TR" dirty="0" err="1">
+                <a:solidFill>
+                  <a:schemeClr val="tx1"/>
+                </a:solidFill>
+              </a:rPr>
+              <a:t>aynel</a:t>
+            </a:r>
+            <a:r>
+              <a:rPr lang="tr-TR" dirty="0">
+                <a:solidFill>
+                  <a:schemeClr val="tx1"/>
+                </a:solidFill>
+              </a:rPr>
+              <a:t> fiili cinsinden harfler ziyadesi ile mazisinin 5 harf üzere olmasıdır.</a:t>
+            </a:r>
+            <a:endParaRPr lang="tr-TR" dirty="0">
+              <a:solidFill>
+                <a:srgbClr val="C00000"/>
+              </a:solidFill>
+            </a:endParaRPr>
+          </a:p>
+        </p:txBody>
+      </p:sp>
+      <p:sp>
+        <p:nvSpPr>
+          <p:cNvPr id="7" name="Dikdörtgen: Üst Köşeleri Yuvarlatılmış 6">
+            <a:extLst>
+              <a:ext uri="{FF2B5EF4-FFF2-40B4-BE49-F238E27FC236}">
+                <a16:creationId xmlns:a16="http://schemas.microsoft.com/office/drawing/2014/main" id="{035ECAAF-6A44-611A-A787-ED2E34D3FDD0}"/>
+              </a:ext>
+            </a:extLst>
+          </p:cNvPr>
+          <p:cNvSpPr/>
+          <p:nvPr/>
+        </p:nvSpPr>
+        <p:spPr>
+          <a:xfrm>
+            <a:off x="240820" y="2868372"/>
+            <a:ext cx="3709359" cy="1121255"/>
+          </a:xfrm>
+          <a:prstGeom prst="round2SameRect">
+            <a:avLst>
+              <a:gd name="adj1" fmla="val 0"/>
+              <a:gd name="adj2" fmla="val 0"/>
+            </a:avLst>
+          </a:prstGeom>
+          <a:ln>
+            <a:solidFill>
+              <a:schemeClr val="tx2">
+                <a:lumMod val="50000"/>
+                <a:lumOff val="50000"/>
+              </a:schemeClr>
+            </a:solidFill>
+          </a:ln>
+          <a:effectLst>
+            <a:glow rad="63500">
+              <a:schemeClr val="accent1">
+                <a:satMod val="175000"/>
+                <a:alpha val="40000"/>
+              </a:schemeClr>
+            </a:glow>
+          </a:effectLst>
+        </p:spPr>
+        <p:style>
+          <a:lnRef idx="2">
+            <a:schemeClr val="accent1"/>
+          </a:lnRef>
+          <a:fillRef idx="1">
+            <a:schemeClr val="lt1"/>
+          </a:fillRef>
+          <a:effectRef idx="0">
+            <a:schemeClr val="accent1"/>
+          </a:effectRef>
+          <a:fontRef idx="minor">
+            <a:schemeClr val="dk1"/>
+          </a:fontRef>
+        </p:style>
+        <p:txBody>
+          <a:bodyPr lIns="216000" tIns="72000" rIns="288000" bIns="288000" rtlCol="0" anchor="t"/>
+          <a:lstStyle/>
+          <a:p>
+            <a:r>
+              <a:rPr lang="tr-TR" dirty="0">
+                <a:solidFill>
+                  <a:srgbClr val="C00000"/>
+                </a:solidFill>
+              </a:rPr>
+              <a:t>Binası: </a:t>
+            </a:r>
+            <a:r>
+              <a:rPr lang="tr-TR" dirty="0">
+                <a:solidFill>
+                  <a:schemeClr val="tx1"/>
+                </a:solidFill>
+              </a:rPr>
+              <a:t>Tekellüf içindir(Talep edilen bir şeyin derece </a:t>
+            </a:r>
+            <a:r>
+              <a:rPr lang="tr-TR" dirty="0" err="1">
+                <a:solidFill>
+                  <a:schemeClr val="tx1"/>
+                </a:solidFill>
+              </a:rPr>
+              <a:t>derece</a:t>
+            </a:r>
+            <a:r>
+              <a:rPr lang="tr-TR" dirty="0">
+                <a:solidFill>
+                  <a:schemeClr val="tx1"/>
+                </a:solidFill>
+              </a:rPr>
+              <a:t> elde edilmesidir.)</a:t>
+            </a:r>
+            <a:endParaRPr lang="tr-TR" dirty="0">
+              <a:solidFill>
+                <a:srgbClr val="C00000"/>
+              </a:solidFill>
+            </a:endParaRPr>
+          </a:p>
+        </p:txBody>
+      </p:sp>
+      <p:sp>
+        <p:nvSpPr>
+          <p:cNvPr id="8" name="Dikdörtgen: Üst Köşeleri Yuvarlatılmış 7">
+            <a:extLst>
+              <a:ext uri="{FF2B5EF4-FFF2-40B4-BE49-F238E27FC236}">
+                <a16:creationId xmlns:a16="http://schemas.microsoft.com/office/drawing/2014/main" id="{30BE5D54-F616-EC32-A7B3-9070EBCFD1C5}"/>
+              </a:ext>
+            </a:extLst>
+          </p:cNvPr>
+          <p:cNvSpPr/>
+          <p:nvPr/>
+        </p:nvSpPr>
+        <p:spPr>
+          <a:xfrm>
+            <a:off x="8063345" y="2868371"/>
+            <a:ext cx="3887835" cy="1121256"/>
+          </a:xfrm>
+          <a:prstGeom prst="round2SameRect">
+            <a:avLst>
+              <a:gd name="adj1" fmla="val 0"/>
+              <a:gd name="adj2" fmla="val 0"/>
+            </a:avLst>
+          </a:prstGeom>
+          <a:ln>
+            <a:solidFill>
+              <a:schemeClr val="tx2">
+                <a:lumMod val="50000"/>
+                <a:lumOff val="50000"/>
+              </a:schemeClr>
+            </a:solidFill>
+          </a:ln>
+          <a:effectLst>
+            <a:glow rad="63500">
+              <a:schemeClr val="accent1">
+                <a:satMod val="175000"/>
+                <a:alpha val="40000"/>
+              </a:schemeClr>
+            </a:glow>
+          </a:effectLst>
+        </p:spPr>
+        <p:style>
+          <a:lnRef idx="2">
+            <a:schemeClr val="accent1"/>
+          </a:lnRef>
+          <a:fillRef idx="1">
+            <a:schemeClr val="lt1"/>
+          </a:fillRef>
+          <a:effectRef idx="0">
+            <a:schemeClr val="accent1"/>
+          </a:effectRef>
+          <a:fontRef idx="minor">
+            <a:schemeClr val="dk1"/>
+          </a:fontRef>
+        </p:style>
+        <p:txBody>
+          <a:bodyPr lIns="216000" tIns="72000" rIns="288000" bIns="288000" rtlCol="0" anchor="t"/>
+          <a:lstStyle/>
+          <a:p>
+            <a:r>
+              <a:rPr lang="tr-TR" dirty="0">
+                <a:solidFill>
+                  <a:srgbClr val="C00000"/>
+                </a:solidFill>
+              </a:rPr>
+              <a:t>Vezni:</a:t>
+            </a:r>
+            <a:endParaRPr lang="ar-AE" dirty="0">
+              <a:solidFill>
+                <a:srgbClr val="C00000"/>
+              </a:solidFill>
+            </a:endParaRPr>
+          </a:p>
+          <a:p>
+            <a:pPr algn="r"/>
+            <a:r>
+              <a:rPr lang="ar-AE" sz="3600" dirty="0">
+                <a:solidFill>
+                  <a:schemeClr val="tx1">
+                    <a:lumMod val="65000"/>
+                    <a:lumOff val="35000"/>
+                  </a:schemeClr>
+                </a:solidFill>
+              </a:rPr>
+              <a:t>تَفَعَّلَ – يَفَعَّلُ - تَفَعُّلًا	</a:t>
+            </a:r>
+            <a:endParaRPr lang="tr-TR" sz="3600" dirty="0">
+              <a:solidFill>
+                <a:schemeClr val="tx1">
+                  <a:lumMod val="65000"/>
+                  <a:lumOff val="35000"/>
+                </a:schemeClr>
+              </a:solidFill>
+            </a:endParaRPr>
+          </a:p>
+        </p:txBody>
+      </p:sp>
+      <p:sp>
+        <p:nvSpPr>
+          <p:cNvPr id="9" name="Dikdörtgen: Üst Köşeleri Yuvarlatılmış 8">
+            <a:extLst>
+              <a:ext uri="{FF2B5EF4-FFF2-40B4-BE49-F238E27FC236}">
+                <a16:creationId xmlns:a16="http://schemas.microsoft.com/office/drawing/2014/main" id="{8960AD68-9065-3C5A-2910-54AD292D8F34}"/>
+              </a:ext>
+            </a:extLst>
+          </p:cNvPr>
+          <p:cNvSpPr/>
+          <p:nvPr/>
+        </p:nvSpPr>
+        <p:spPr>
+          <a:xfrm>
+            <a:off x="4241320" y="4543425"/>
+            <a:ext cx="3822025" cy="1121256"/>
+          </a:xfrm>
+          <a:prstGeom prst="round2SameRect">
+            <a:avLst>
+              <a:gd name="adj1" fmla="val 0"/>
+              <a:gd name="adj2" fmla="val 0"/>
+            </a:avLst>
+          </a:prstGeom>
+          <a:ln>
+            <a:solidFill>
+              <a:schemeClr val="tx2">
+                <a:lumMod val="50000"/>
+                <a:lumOff val="50000"/>
+              </a:schemeClr>
+            </a:solidFill>
+          </a:ln>
+          <a:effectLst>
+            <a:glow rad="63500">
+              <a:schemeClr val="accent1">
+                <a:satMod val="175000"/>
+                <a:alpha val="40000"/>
+              </a:schemeClr>
+            </a:glow>
+          </a:effectLst>
+        </p:spPr>
+        <p:style>
+          <a:lnRef idx="2">
+            <a:schemeClr val="accent1"/>
+          </a:lnRef>
+          <a:fillRef idx="1">
+            <a:schemeClr val="lt1"/>
+          </a:fillRef>
+          <a:effectRef idx="0">
+            <a:schemeClr val="accent1"/>
+          </a:effectRef>
+          <a:fontRef idx="minor">
+            <a:schemeClr val="dk1"/>
+          </a:fontRef>
+        </p:style>
+        <p:txBody>
+          <a:bodyPr lIns="216000" tIns="72000" rIns="288000" bIns="288000" rtlCol="0" anchor="t"/>
+          <a:lstStyle/>
+          <a:p>
+            <a:r>
+              <a:rPr lang="tr-TR" dirty="0">
+                <a:solidFill>
+                  <a:srgbClr val="C00000"/>
+                </a:solidFill>
+              </a:rPr>
+              <a:t>Mevzun:</a:t>
+            </a:r>
+            <a:endParaRPr lang="ar-AE" dirty="0">
+              <a:solidFill>
+                <a:srgbClr val="C00000"/>
+              </a:solidFill>
+            </a:endParaRPr>
+          </a:p>
+          <a:p>
+            <a:pPr algn="r"/>
+            <a:r>
+              <a:rPr lang="ar-AE" sz="3600" dirty="0">
+                <a:solidFill>
+                  <a:schemeClr val="tx1">
+                    <a:lumMod val="65000"/>
+                    <a:lumOff val="35000"/>
+                  </a:schemeClr>
+                </a:solidFill>
+              </a:rPr>
+              <a:t>تَكَلَّمَ – يَتَكَلَّمُ - تَكَلُّمًا	</a:t>
+            </a:r>
+            <a:endParaRPr lang="tr-TR" sz="3600" dirty="0">
+              <a:solidFill>
+                <a:schemeClr val="tx1">
+                  <a:lumMod val="65000"/>
+                  <a:lumOff val="35000"/>
+                </a:schemeClr>
+              </a:solidFill>
+            </a:endParaRPr>
+          </a:p>
+        </p:txBody>
+      </p:sp>
+      <p:sp>
+        <p:nvSpPr>
+          <p:cNvPr id="2" name="İkizkenar Üçgen 1">
+            <a:extLst>
+              <a:ext uri="{FF2B5EF4-FFF2-40B4-BE49-F238E27FC236}">
+                <a16:creationId xmlns:a16="http://schemas.microsoft.com/office/drawing/2014/main" id="{F761A71F-29CB-9CF0-1D02-9D53577DA23F}"/>
+              </a:ext>
+            </a:extLst>
+          </p:cNvPr>
+          <p:cNvSpPr/>
+          <p:nvPr/>
+        </p:nvSpPr>
+        <p:spPr>
+          <a:xfrm rot="18876393">
+            <a:off x="-810273" y="-176755"/>
+            <a:ext cx="2538637" cy="1259992"/>
+          </a:xfrm>
+          <a:prstGeom prst="triangle">
+            <a:avLst/>
+          </a:prstGeom>
+          <a:solidFill>
+            <a:schemeClr val="accent6">
+              <a:lumMod val="75000"/>
+            </a:schemeClr>
+          </a:solidFill>
+          <a:ln>
+            <a:solidFill>
+              <a:schemeClr val="accent6">
+                <a:lumMod val="60000"/>
+                <a:lumOff val="40000"/>
+              </a:schemeClr>
+            </a:solidFill>
+          </a:ln>
+        </p:spPr>
+        <p:style>
+          <a:lnRef idx="2">
+            <a:schemeClr val="accent1">
+              <a:shade val="15000"/>
+            </a:schemeClr>
+          </a:lnRef>
+          <a:fillRef idx="1">
+            <a:schemeClr val="accent1"/>
+          </a:fillRef>
+          <a:effectRef idx="0">
+            <a:schemeClr val="accent1"/>
+          </a:effectRef>
+          <a:fontRef idx="minor">
+            <a:schemeClr val="lt1"/>
+          </a:fontRef>
+        </p:style>
+        <p:txBody>
+          <a:bodyPr rtlCol="0" anchor="ctr"/>
+          <a:lstStyle/>
+          <a:p>
+            <a:r>
+              <a:rPr lang="ar-AE" sz="2400" b="1" dirty="0">
+                <a:solidFill>
+                  <a:schemeClr val="bg1"/>
+                </a:solidFill>
+              </a:rPr>
+              <a:t>2</a:t>
+            </a:r>
+            <a:r>
+              <a:rPr lang="tr-TR" sz="2400" b="1" dirty="0">
+                <a:solidFill>
+                  <a:schemeClr val="bg1"/>
+                </a:solidFill>
+              </a:rPr>
+              <a:t>. NEVİ</a:t>
+            </a:r>
+          </a:p>
+        </p:txBody>
+      </p:sp>
+    </p:spTree>
+    <p:extLst>
+      <p:ext uri="{BB962C8B-B14F-4D97-AF65-F5344CB8AC3E}">
+        <p14:creationId xmlns:p14="http://schemas.microsoft.com/office/powerpoint/2010/main" val="3596893070"/>
+      </p:ext>
+    </p:extLst>
+  </p:cSld>
+  <p:clrMapOvr>
+    <a:masterClrMapping/>
+  </p:clrMapOvr>
+</p:sld>
+</file>
+
+<file path=ppt/slides/slide16.xml><?xml version="1.0" encoding="utf-8"?>
+<p:sld xmlns:a="http://schemas.openxmlformats.org/drawingml/2006/main" xmlns:r="http://schemas.openxmlformats.org/officeDocument/2006/relationships" xmlns:p="http://schemas.openxmlformats.org/presentationml/2006/main">
+  <p:cSld>
+    <p:spTree>
+      <p:nvGrpSpPr>
+        <p:cNvPr id="1" name=""/>
+        <p:cNvGrpSpPr/>
+        <p:nvPr/>
+      </p:nvGrpSpPr>
+      <p:grpSpPr>
+        <a:xfrm>
+          <a:off x="0" y="0"/>
+          <a:ext cx="0" cy="0"/>
+          <a:chOff x="0" y="0"/>
+          <a:chExt cx="0" cy="0"/>
+        </a:xfrm>
+      </p:grpSpPr>
+      <p:sp>
+        <p:nvSpPr>
+          <p:cNvPr id="4" name="Dikdörtgen: Köşeleri Yuvarlatılmış 3">
+            <a:extLst>
+              <a:ext uri="{FF2B5EF4-FFF2-40B4-BE49-F238E27FC236}">
+                <a16:creationId xmlns:a16="http://schemas.microsoft.com/office/drawing/2014/main" id="{24824917-9527-9A35-B85F-969A69D3B615}"/>
+              </a:ext>
+            </a:extLst>
+          </p:cNvPr>
+          <p:cNvSpPr/>
+          <p:nvPr/>
+        </p:nvSpPr>
+        <p:spPr>
+          <a:xfrm>
+            <a:off x="4241320" y="2523226"/>
+            <a:ext cx="3709359" cy="1811548"/>
+          </a:xfrm>
+          <a:prstGeom prst="roundRect">
+            <a:avLst/>
+          </a:prstGeom>
+          <a:scene3d>
+            <a:camera prst="orthographicFront"/>
+            <a:lightRig rig="threePt" dir="t"/>
+          </a:scene3d>
+          <a:sp3d>
+            <a:bevelT w="114300" prst="artDeco"/>
+          </a:sp3d>
+        </p:spPr>
+        <p:style>
+          <a:lnRef idx="2">
+            <a:schemeClr val="accent1">
+              <a:shade val="15000"/>
+            </a:schemeClr>
+          </a:lnRef>
+          <a:fillRef idx="1">
+            <a:schemeClr val="accent1"/>
+          </a:fillRef>
+          <a:effectRef idx="0">
+            <a:schemeClr val="accent1"/>
+          </a:effectRef>
+          <a:fontRef idx="minor">
+            <a:schemeClr val="lt1"/>
+          </a:fontRef>
+        </p:style>
+        <p:txBody>
+          <a:bodyPr rtlCol="0" anchor="ctr"/>
+          <a:lstStyle/>
+          <a:p>
+            <a:pPr algn="ctr"/>
+            <a:r>
+              <a:rPr lang="tr-TR" dirty="0"/>
+              <a:t>SÜLASİ MEZİD </a:t>
+            </a:r>
+            <a:r>
+              <a:rPr lang="ar-AE" dirty="0"/>
+              <a:t>2</a:t>
+            </a:r>
+            <a:r>
+              <a:rPr lang="tr-TR" dirty="0"/>
+              <a:t>. NEVİ</a:t>
+            </a:r>
+          </a:p>
+          <a:p>
+            <a:pPr algn="ctr"/>
+            <a:r>
+              <a:rPr lang="ar-AE" dirty="0"/>
+              <a:t>5</a:t>
+            </a:r>
+            <a:r>
+              <a:rPr lang="tr-TR" dirty="0"/>
+              <a:t>. BAB</a:t>
+            </a:r>
+          </a:p>
+          <a:p>
+            <a:pPr algn="ctr"/>
+            <a:r>
+              <a:rPr lang="ar-AE" sz="3200" b="1" dirty="0"/>
+              <a:t>تَفَاعُلْ</a:t>
+            </a:r>
+            <a:endParaRPr lang="tr-TR" sz="3200" b="1" dirty="0"/>
+          </a:p>
+        </p:txBody>
+      </p:sp>
+      <p:sp>
+        <p:nvSpPr>
+          <p:cNvPr id="5" name="Dikdörtgen: Üst Köşeleri Yuvarlatılmış 4">
+            <a:extLst>
+              <a:ext uri="{FF2B5EF4-FFF2-40B4-BE49-F238E27FC236}">
+                <a16:creationId xmlns:a16="http://schemas.microsoft.com/office/drawing/2014/main" id="{DE25C558-0A44-EE66-F7E7-E1CB66230352}"/>
+              </a:ext>
+            </a:extLst>
+          </p:cNvPr>
+          <p:cNvSpPr/>
+          <p:nvPr/>
+        </p:nvSpPr>
+        <p:spPr>
+          <a:xfrm>
+            <a:off x="4241320" y="1005841"/>
+            <a:ext cx="3709359" cy="1308734"/>
+          </a:xfrm>
+          <a:prstGeom prst="round2SameRect">
+            <a:avLst>
+              <a:gd name="adj1" fmla="val 0"/>
+              <a:gd name="adj2" fmla="val 0"/>
+            </a:avLst>
+          </a:prstGeom>
+          <a:ln>
+            <a:solidFill>
+              <a:schemeClr val="tx2">
+                <a:lumMod val="50000"/>
+                <a:lumOff val="50000"/>
+              </a:schemeClr>
+            </a:solidFill>
+          </a:ln>
+          <a:effectLst>
+            <a:glow rad="63500">
+              <a:schemeClr val="accent1">
+                <a:satMod val="175000"/>
+                <a:alpha val="40000"/>
+              </a:schemeClr>
+            </a:glow>
+          </a:effectLst>
+        </p:spPr>
+        <p:style>
+          <a:lnRef idx="2">
+            <a:schemeClr val="accent1"/>
+          </a:lnRef>
+          <a:fillRef idx="1">
+            <a:schemeClr val="lt1"/>
+          </a:fillRef>
+          <a:effectRef idx="0">
+            <a:schemeClr val="accent1"/>
+          </a:effectRef>
+          <a:fontRef idx="minor">
+            <a:schemeClr val="dk1"/>
+          </a:fontRef>
+        </p:style>
+        <p:txBody>
+          <a:bodyPr lIns="216000" tIns="72000" rIns="288000" bIns="288000" rtlCol="0" anchor="t"/>
+          <a:lstStyle/>
+          <a:p>
+            <a:r>
+              <a:rPr lang="tr-TR" dirty="0">
+                <a:solidFill>
+                  <a:srgbClr val="C00000"/>
+                </a:solidFill>
+              </a:rPr>
+              <a:t>ALAMETİ: </a:t>
+            </a:r>
+            <a:r>
+              <a:rPr lang="tr-TR" dirty="0">
+                <a:solidFill>
+                  <a:schemeClr val="tx1"/>
+                </a:solidFill>
+              </a:rPr>
+              <a:t>Evveline Te(</a:t>
+            </a:r>
+            <a:r>
+              <a:rPr lang="ar-AE" dirty="0">
+                <a:solidFill>
+                  <a:schemeClr val="tx1"/>
+                </a:solidFill>
+              </a:rPr>
+              <a:t>ت</a:t>
+            </a:r>
+            <a:r>
+              <a:rPr lang="tr-TR" dirty="0">
+                <a:solidFill>
+                  <a:schemeClr val="tx1"/>
+                </a:solidFill>
+              </a:rPr>
+              <a:t>)</a:t>
+            </a:r>
+            <a:r>
+              <a:rPr lang="ar-AE" dirty="0">
+                <a:solidFill>
+                  <a:schemeClr val="tx1"/>
+                </a:solidFill>
+              </a:rPr>
+              <a:t>  </a:t>
+            </a:r>
+            <a:r>
+              <a:rPr lang="tr-TR" dirty="0">
+                <a:solidFill>
+                  <a:schemeClr val="tx1"/>
+                </a:solidFill>
+              </a:rPr>
+              <a:t> </a:t>
+            </a:r>
+            <a:r>
+              <a:rPr lang="tr-TR" dirty="0" err="1">
+                <a:solidFill>
+                  <a:schemeClr val="tx1"/>
+                </a:solidFill>
+              </a:rPr>
+              <a:t>Fael</a:t>
+            </a:r>
+            <a:r>
+              <a:rPr lang="tr-TR" dirty="0">
+                <a:solidFill>
+                  <a:schemeClr val="tx1"/>
+                </a:solidFill>
+              </a:rPr>
+              <a:t> fiili ile </a:t>
+            </a:r>
+            <a:r>
+              <a:rPr lang="tr-TR" dirty="0" err="1">
+                <a:solidFill>
+                  <a:schemeClr val="tx1"/>
+                </a:solidFill>
+              </a:rPr>
+              <a:t>aynel</a:t>
+            </a:r>
+            <a:r>
+              <a:rPr lang="tr-TR" dirty="0">
+                <a:solidFill>
+                  <a:schemeClr val="tx1"/>
+                </a:solidFill>
+              </a:rPr>
+              <a:t> fiili arasına Elif(</a:t>
+            </a:r>
+            <a:r>
+              <a:rPr lang="ar-AE" dirty="0">
+                <a:solidFill>
+                  <a:schemeClr val="tx1"/>
+                </a:solidFill>
+              </a:rPr>
+              <a:t>ا</a:t>
+            </a:r>
+            <a:r>
+              <a:rPr lang="tr-TR" dirty="0">
+                <a:solidFill>
+                  <a:schemeClr val="tx1"/>
+                </a:solidFill>
+              </a:rPr>
+              <a:t>) harfleri ziyadesi ile mazisinin 5 harf üzere olmasıdır.</a:t>
+            </a:r>
+            <a:endParaRPr lang="tr-TR" dirty="0">
+              <a:solidFill>
+                <a:srgbClr val="C00000"/>
+              </a:solidFill>
+            </a:endParaRPr>
+          </a:p>
+        </p:txBody>
+      </p:sp>
+      <p:sp>
+        <p:nvSpPr>
+          <p:cNvPr id="7" name="Dikdörtgen: Üst Köşeleri Yuvarlatılmış 6">
+            <a:extLst>
+              <a:ext uri="{FF2B5EF4-FFF2-40B4-BE49-F238E27FC236}">
+                <a16:creationId xmlns:a16="http://schemas.microsoft.com/office/drawing/2014/main" id="{035ECAAF-6A44-611A-A787-ED2E34D3FDD0}"/>
+              </a:ext>
+            </a:extLst>
+          </p:cNvPr>
+          <p:cNvSpPr/>
+          <p:nvPr/>
+        </p:nvSpPr>
+        <p:spPr>
+          <a:xfrm>
+            <a:off x="240820" y="2868372"/>
+            <a:ext cx="3709359" cy="1121255"/>
+          </a:xfrm>
+          <a:prstGeom prst="round2SameRect">
+            <a:avLst>
+              <a:gd name="adj1" fmla="val 0"/>
+              <a:gd name="adj2" fmla="val 0"/>
+            </a:avLst>
+          </a:prstGeom>
+          <a:ln>
+            <a:solidFill>
+              <a:schemeClr val="tx2">
+                <a:lumMod val="50000"/>
+                <a:lumOff val="50000"/>
+              </a:schemeClr>
+            </a:solidFill>
+          </a:ln>
+          <a:effectLst>
+            <a:glow rad="63500">
+              <a:schemeClr val="accent1">
+                <a:satMod val="175000"/>
+                <a:alpha val="40000"/>
+              </a:schemeClr>
+            </a:glow>
+          </a:effectLst>
+        </p:spPr>
+        <p:style>
+          <a:lnRef idx="2">
+            <a:schemeClr val="accent1"/>
+          </a:lnRef>
+          <a:fillRef idx="1">
+            <a:schemeClr val="lt1"/>
+          </a:fillRef>
+          <a:effectRef idx="0">
+            <a:schemeClr val="accent1"/>
+          </a:effectRef>
+          <a:fontRef idx="minor">
+            <a:schemeClr val="dk1"/>
+          </a:fontRef>
+        </p:style>
+        <p:txBody>
+          <a:bodyPr lIns="216000" tIns="72000" rIns="288000" bIns="288000" rtlCol="0" anchor="t"/>
+          <a:lstStyle/>
+          <a:p>
+            <a:r>
+              <a:rPr lang="tr-TR" dirty="0">
+                <a:solidFill>
+                  <a:srgbClr val="C00000"/>
+                </a:solidFill>
+              </a:rPr>
+              <a:t>Binası: </a:t>
+            </a:r>
+            <a:r>
+              <a:rPr lang="tr-TR" dirty="0">
+                <a:solidFill>
+                  <a:schemeClr val="tx1"/>
+                </a:solidFill>
+              </a:rPr>
+              <a:t>İki yada daha çok kişi arasında müşareket içindir.</a:t>
+            </a:r>
+            <a:endParaRPr lang="tr-TR" dirty="0">
+              <a:solidFill>
+                <a:srgbClr val="C00000"/>
+              </a:solidFill>
+            </a:endParaRPr>
+          </a:p>
+        </p:txBody>
+      </p:sp>
+      <p:sp>
+        <p:nvSpPr>
+          <p:cNvPr id="8" name="Dikdörtgen: Üst Köşeleri Yuvarlatılmış 7">
+            <a:extLst>
+              <a:ext uri="{FF2B5EF4-FFF2-40B4-BE49-F238E27FC236}">
+                <a16:creationId xmlns:a16="http://schemas.microsoft.com/office/drawing/2014/main" id="{30BE5D54-F616-EC32-A7B3-9070EBCFD1C5}"/>
+              </a:ext>
+            </a:extLst>
+          </p:cNvPr>
+          <p:cNvSpPr/>
+          <p:nvPr/>
+        </p:nvSpPr>
+        <p:spPr>
+          <a:xfrm>
+            <a:off x="8241821" y="2868371"/>
+            <a:ext cx="3709359" cy="1121256"/>
+          </a:xfrm>
+          <a:prstGeom prst="round2SameRect">
+            <a:avLst>
+              <a:gd name="adj1" fmla="val 0"/>
+              <a:gd name="adj2" fmla="val 0"/>
+            </a:avLst>
+          </a:prstGeom>
+          <a:ln>
+            <a:solidFill>
+              <a:schemeClr val="tx2">
+                <a:lumMod val="50000"/>
+                <a:lumOff val="50000"/>
+              </a:schemeClr>
+            </a:solidFill>
+          </a:ln>
+          <a:effectLst>
+            <a:glow rad="63500">
+              <a:schemeClr val="accent1">
+                <a:satMod val="175000"/>
+                <a:alpha val="40000"/>
+              </a:schemeClr>
+            </a:glow>
+          </a:effectLst>
+        </p:spPr>
+        <p:style>
+          <a:lnRef idx="2">
+            <a:schemeClr val="accent1"/>
+          </a:lnRef>
+          <a:fillRef idx="1">
+            <a:schemeClr val="lt1"/>
+          </a:fillRef>
+          <a:effectRef idx="0">
+            <a:schemeClr val="accent1"/>
+          </a:effectRef>
+          <a:fontRef idx="minor">
+            <a:schemeClr val="dk1"/>
+          </a:fontRef>
+        </p:style>
+        <p:txBody>
+          <a:bodyPr lIns="216000" tIns="72000" rIns="288000" bIns="288000" rtlCol="0" anchor="t"/>
+          <a:lstStyle/>
+          <a:p>
+            <a:r>
+              <a:rPr lang="tr-TR" dirty="0">
+                <a:solidFill>
+                  <a:srgbClr val="C00000"/>
+                </a:solidFill>
+              </a:rPr>
+              <a:t>Vezni:</a:t>
+            </a:r>
+            <a:endParaRPr lang="ar-AE" dirty="0">
+              <a:solidFill>
+                <a:srgbClr val="C00000"/>
+              </a:solidFill>
+            </a:endParaRPr>
+          </a:p>
+          <a:p>
+            <a:pPr algn="r"/>
+            <a:r>
+              <a:rPr lang="ar-AE" sz="3600" dirty="0">
+                <a:solidFill>
+                  <a:schemeClr val="tx1">
+                    <a:lumMod val="65000"/>
+                    <a:lumOff val="35000"/>
+                  </a:schemeClr>
+                </a:solidFill>
+              </a:rPr>
+              <a:t>اِفْعَلَ – يُفْعِلُ - اِفْعَالًا	</a:t>
+            </a:r>
+            <a:endParaRPr lang="tr-TR" sz="3600" dirty="0">
+              <a:solidFill>
+                <a:schemeClr val="tx1">
+                  <a:lumMod val="65000"/>
+                  <a:lumOff val="35000"/>
+                </a:schemeClr>
+              </a:solidFill>
+            </a:endParaRPr>
+          </a:p>
+        </p:txBody>
+      </p:sp>
+      <p:sp>
+        <p:nvSpPr>
+          <p:cNvPr id="9" name="Dikdörtgen: Üst Köşeleri Yuvarlatılmış 8">
+            <a:extLst>
+              <a:ext uri="{FF2B5EF4-FFF2-40B4-BE49-F238E27FC236}">
+                <a16:creationId xmlns:a16="http://schemas.microsoft.com/office/drawing/2014/main" id="{8960AD68-9065-3C5A-2910-54AD292D8F34}"/>
+              </a:ext>
+            </a:extLst>
+          </p:cNvPr>
+          <p:cNvSpPr/>
+          <p:nvPr/>
+        </p:nvSpPr>
+        <p:spPr>
+          <a:xfrm>
+            <a:off x="4241320" y="4543425"/>
+            <a:ext cx="3822025" cy="1121256"/>
+          </a:xfrm>
+          <a:prstGeom prst="round2SameRect">
+            <a:avLst>
+              <a:gd name="adj1" fmla="val 0"/>
+              <a:gd name="adj2" fmla="val 0"/>
+            </a:avLst>
+          </a:prstGeom>
+          <a:ln>
+            <a:solidFill>
+              <a:schemeClr val="tx2">
+                <a:lumMod val="50000"/>
+                <a:lumOff val="50000"/>
+              </a:schemeClr>
+            </a:solidFill>
+          </a:ln>
+          <a:effectLst>
+            <a:glow rad="63500">
+              <a:schemeClr val="accent1">
+                <a:satMod val="175000"/>
+                <a:alpha val="40000"/>
+              </a:schemeClr>
+            </a:glow>
+          </a:effectLst>
+        </p:spPr>
+        <p:style>
+          <a:lnRef idx="2">
+            <a:schemeClr val="accent1"/>
+          </a:lnRef>
+          <a:fillRef idx="1">
+            <a:schemeClr val="lt1"/>
+          </a:fillRef>
+          <a:effectRef idx="0">
+            <a:schemeClr val="accent1"/>
+          </a:effectRef>
+          <a:fontRef idx="minor">
+            <a:schemeClr val="dk1"/>
+          </a:fontRef>
+        </p:style>
+        <p:txBody>
+          <a:bodyPr lIns="216000" tIns="72000" rIns="288000" bIns="288000" rtlCol="0" anchor="t"/>
+          <a:lstStyle/>
+          <a:p>
+            <a:r>
+              <a:rPr lang="tr-TR" dirty="0">
+                <a:solidFill>
+                  <a:srgbClr val="C00000"/>
+                </a:solidFill>
+              </a:rPr>
+              <a:t>Mevzun:</a:t>
+            </a:r>
+            <a:endParaRPr lang="ar-AE" dirty="0">
+              <a:solidFill>
+                <a:srgbClr val="C00000"/>
+              </a:solidFill>
+            </a:endParaRPr>
+          </a:p>
+          <a:p>
+            <a:pPr algn="r"/>
+            <a:r>
+              <a:rPr lang="ar-AE" sz="3600" dirty="0">
+                <a:solidFill>
+                  <a:schemeClr val="tx1">
+                    <a:lumMod val="65000"/>
+                    <a:lumOff val="35000"/>
+                  </a:schemeClr>
+                </a:solidFill>
+              </a:rPr>
+              <a:t>اَكْرَمَ – يُكْرِمُ - اِكْرَامًا	</a:t>
+            </a:r>
+            <a:endParaRPr lang="tr-TR" sz="3600" dirty="0">
+              <a:solidFill>
+                <a:schemeClr val="tx1">
+                  <a:lumMod val="65000"/>
+                  <a:lumOff val="35000"/>
+                </a:schemeClr>
+              </a:solidFill>
+            </a:endParaRPr>
+          </a:p>
+        </p:txBody>
+      </p:sp>
+      <p:sp>
+        <p:nvSpPr>
+          <p:cNvPr id="2" name="İkizkenar Üçgen 1">
+            <a:extLst>
+              <a:ext uri="{FF2B5EF4-FFF2-40B4-BE49-F238E27FC236}">
+                <a16:creationId xmlns:a16="http://schemas.microsoft.com/office/drawing/2014/main" id="{F761A71F-29CB-9CF0-1D02-9D53577DA23F}"/>
+              </a:ext>
+            </a:extLst>
+          </p:cNvPr>
+          <p:cNvSpPr/>
+          <p:nvPr/>
+        </p:nvSpPr>
+        <p:spPr>
+          <a:xfrm rot="18876393">
+            <a:off x="-810273" y="-176755"/>
+            <a:ext cx="2538637" cy="1259992"/>
+          </a:xfrm>
+          <a:prstGeom prst="triangle">
+            <a:avLst/>
+          </a:prstGeom>
+          <a:solidFill>
+            <a:schemeClr val="accent6">
+              <a:lumMod val="75000"/>
+            </a:schemeClr>
+          </a:solidFill>
+          <a:ln>
+            <a:solidFill>
+              <a:schemeClr val="accent6">
+                <a:lumMod val="60000"/>
+                <a:lumOff val="40000"/>
+              </a:schemeClr>
+            </a:solidFill>
+          </a:ln>
+        </p:spPr>
+        <p:style>
+          <a:lnRef idx="2">
+            <a:schemeClr val="accent1">
+              <a:shade val="15000"/>
+            </a:schemeClr>
+          </a:lnRef>
+          <a:fillRef idx="1">
+            <a:schemeClr val="accent1"/>
+          </a:fillRef>
+          <a:effectRef idx="0">
+            <a:schemeClr val="accent1"/>
+          </a:effectRef>
+          <a:fontRef idx="minor">
+            <a:schemeClr val="lt1"/>
+          </a:fontRef>
+        </p:style>
+        <p:txBody>
+          <a:bodyPr rtlCol="0" anchor="ctr"/>
+          <a:lstStyle/>
+          <a:p>
+            <a:r>
+              <a:rPr lang="ar-AE" sz="2400" b="1" dirty="0">
+                <a:solidFill>
+                  <a:schemeClr val="bg1"/>
+                </a:solidFill>
+              </a:rPr>
+              <a:t>2</a:t>
+            </a:r>
+            <a:r>
+              <a:rPr lang="tr-TR" sz="2400" b="1" dirty="0">
+                <a:solidFill>
+                  <a:schemeClr val="bg1"/>
+                </a:solidFill>
+              </a:rPr>
+              <a:t>. NEVİ</a:t>
+            </a:r>
+          </a:p>
+        </p:txBody>
+      </p:sp>
+    </p:spTree>
+    <p:extLst>
+      <p:ext uri="{BB962C8B-B14F-4D97-AF65-F5344CB8AC3E}">
+        <p14:creationId xmlns:p14="http://schemas.microsoft.com/office/powerpoint/2010/main" val="230666391"/>
+      </p:ext>
+    </p:extLst>
+  </p:cSld>
+  <p:clrMapOvr>
+    <a:masterClrMapping/>
+  </p:clrMapOvr>
+</p:sld>
+</file>
+
+<file path=ppt/slides/slide17.xml><?xml version="1.0" encoding="utf-8"?>
+<p:sld xmlns:a="http://schemas.openxmlformats.org/drawingml/2006/main" xmlns:r="http://schemas.openxmlformats.org/officeDocument/2006/relationships" xmlns:p="http://schemas.openxmlformats.org/presentationml/2006/main">
+  <p:cSld>
+    <p:spTree>
+      <p:nvGrpSpPr>
+        <p:cNvPr id="1" name=""/>
+        <p:cNvGrpSpPr/>
+        <p:nvPr/>
+      </p:nvGrpSpPr>
+      <p:grpSpPr>
+        <a:xfrm>
+          <a:off x="0" y="0"/>
+          <a:ext cx="0" cy="0"/>
+          <a:chOff x="0" y="0"/>
+          <a:chExt cx="0" cy="0"/>
+        </a:xfrm>
+      </p:grpSpPr>
+      <p:sp>
+        <p:nvSpPr>
+          <p:cNvPr id="4" name="Dikdörtgen: Köşeleri Yuvarlatılmış 3">
+            <a:extLst>
+              <a:ext uri="{FF2B5EF4-FFF2-40B4-BE49-F238E27FC236}">
+                <a16:creationId xmlns:a16="http://schemas.microsoft.com/office/drawing/2014/main" id="{24824917-9527-9A35-B85F-969A69D3B615}"/>
+              </a:ext>
+            </a:extLst>
+          </p:cNvPr>
+          <p:cNvSpPr/>
+          <p:nvPr/>
+        </p:nvSpPr>
+        <p:spPr>
+          <a:xfrm>
+            <a:off x="4188228" y="2653995"/>
+            <a:ext cx="3501045" cy="1550009"/>
+          </a:xfrm>
+          <a:prstGeom prst="roundRect">
+            <a:avLst/>
+          </a:prstGeom>
+          <a:scene3d>
+            <a:camera prst="orthographicFront"/>
+            <a:lightRig rig="threePt" dir="t"/>
+          </a:scene3d>
+          <a:sp3d>
+            <a:bevelT w="114300" prst="artDeco"/>
+          </a:sp3d>
+        </p:spPr>
+        <p:style>
+          <a:lnRef idx="2">
+            <a:schemeClr val="accent1">
+              <a:shade val="15000"/>
+            </a:schemeClr>
+          </a:lnRef>
+          <a:fillRef idx="1">
+            <a:schemeClr val="accent1"/>
+          </a:fillRef>
+          <a:effectRef idx="0">
+            <a:schemeClr val="accent1"/>
+          </a:effectRef>
+          <a:fontRef idx="minor">
+            <a:schemeClr val="lt1"/>
+          </a:fontRef>
+        </p:style>
+        <p:txBody>
+          <a:bodyPr rtlCol="0" anchor="ctr"/>
+          <a:lstStyle/>
+          <a:p>
+            <a:pPr algn="ctr"/>
+            <a:r>
+              <a:rPr lang="tr-TR" dirty="0"/>
+              <a:t>SÜLASİ MEZİD 3. NEVİ</a:t>
+            </a:r>
+          </a:p>
+          <a:p>
+            <a:pPr algn="ctr"/>
+            <a:r>
+              <a:rPr lang="tr-TR" dirty="0"/>
+              <a:t>1. BAB</a:t>
+            </a:r>
+          </a:p>
+          <a:p>
+            <a:pPr algn="ctr"/>
+            <a:r>
+              <a:rPr lang="ar-AE" sz="3200" b="1" dirty="0"/>
+              <a:t>اِسْتِفْعَالْ</a:t>
+            </a:r>
+            <a:endParaRPr lang="tr-TR" sz="3200" b="1" dirty="0"/>
+          </a:p>
+        </p:txBody>
+      </p:sp>
+      <p:sp>
+        <p:nvSpPr>
+          <p:cNvPr id="5" name="Dikdörtgen: Üst Köşeleri Yuvarlatılmış 4">
+            <a:extLst>
+              <a:ext uri="{FF2B5EF4-FFF2-40B4-BE49-F238E27FC236}">
+                <a16:creationId xmlns:a16="http://schemas.microsoft.com/office/drawing/2014/main" id="{DE25C558-0A44-EE66-F7E7-E1CB66230352}"/>
+              </a:ext>
+            </a:extLst>
+          </p:cNvPr>
+          <p:cNvSpPr/>
+          <p:nvPr/>
+        </p:nvSpPr>
+        <p:spPr>
+          <a:xfrm>
+            <a:off x="4088476" y="1005841"/>
+            <a:ext cx="3709359" cy="1308734"/>
+          </a:xfrm>
+          <a:prstGeom prst="round2SameRect">
+            <a:avLst>
+              <a:gd name="adj1" fmla="val 0"/>
+              <a:gd name="adj2" fmla="val 0"/>
+            </a:avLst>
+          </a:prstGeom>
+          <a:ln>
+            <a:solidFill>
+              <a:schemeClr val="tx2">
+                <a:lumMod val="50000"/>
+                <a:lumOff val="50000"/>
+              </a:schemeClr>
+            </a:solidFill>
+          </a:ln>
+          <a:effectLst>
+            <a:glow rad="63500">
+              <a:schemeClr val="accent1">
+                <a:satMod val="175000"/>
+                <a:alpha val="40000"/>
+              </a:schemeClr>
+            </a:glow>
+          </a:effectLst>
+        </p:spPr>
+        <p:style>
+          <a:lnRef idx="2">
+            <a:schemeClr val="accent1"/>
+          </a:lnRef>
+          <a:fillRef idx="1">
+            <a:schemeClr val="lt1"/>
+          </a:fillRef>
+          <a:effectRef idx="0">
+            <a:schemeClr val="accent1"/>
+          </a:effectRef>
+          <a:fontRef idx="minor">
+            <a:schemeClr val="dk1"/>
+          </a:fontRef>
+        </p:style>
+        <p:txBody>
+          <a:bodyPr lIns="216000" tIns="72000" rIns="288000" bIns="288000" rtlCol="0" anchor="t"/>
+          <a:lstStyle/>
+          <a:p>
+            <a:r>
+              <a:rPr lang="tr-TR" dirty="0">
+                <a:solidFill>
+                  <a:srgbClr val="C00000"/>
+                </a:solidFill>
+              </a:rPr>
+              <a:t>ALAMETİ: </a:t>
+            </a:r>
+            <a:r>
+              <a:rPr lang="tr-TR" dirty="0">
+                <a:solidFill>
+                  <a:schemeClr val="tx1"/>
+                </a:solidFill>
+              </a:rPr>
+              <a:t>Evveline Elif(</a:t>
+            </a:r>
+            <a:r>
+              <a:rPr lang="ar-AE" dirty="0">
+                <a:solidFill>
+                  <a:schemeClr val="tx1"/>
+                </a:solidFill>
+              </a:rPr>
+              <a:t>ا</a:t>
+            </a:r>
+            <a:r>
+              <a:rPr lang="tr-TR" dirty="0">
+                <a:solidFill>
+                  <a:schemeClr val="tx1"/>
+                </a:solidFill>
+              </a:rPr>
+              <a:t>), Se(</a:t>
+            </a:r>
+            <a:r>
+              <a:rPr lang="ar-AE" dirty="0">
+                <a:solidFill>
+                  <a:schemeClr val="tx1"/>
+                </a:solidFill>
+              </a:rPr>
+              <a:t>س</a:t>
+            </a:r>
+            <a:r>
+              <a:rPr lang="tr-TR" dirty="0">
+                <a:solidFill>
+                  <a:schemeClr val="tx1"/>
+                </a:solidFill>
+              </a:rPr>
+              <a:t>),  Te(</a:t>
+            </a:r>
+            <a:r>
+              <a:rPr lang="ar-AE" dirty="0">
+                <a:solidFill>
+                  <a:schemeClr val="tx1"/>
+                </a:solidFill>
+              </a:rPr>
+              <a:t>ت</a:t>
+            </a:r>
+            <a:r>
+              <a:rPr lang="tr-TR" dirty="0">
+                <a:solidFill>
+                  <a:schemeClr val="tx1"/>
+                </a:solidFill>
+              </a:rPr>
+              <a:t>)</a:t>
+            </a:r>
+            <a:r>
+              <a:rPr lang="ar-AE" dirty="0">
+                <a:solidFill>
+                  <a:schemeClr val="tx1"/>
+                </a:solidFill>
+              </a:rPr>
+              <a:t> </a:t>
+            </a:r>
+            <a:r>
+              <a:rPr lang="tr-TR" dirty="0">
+                <a:solidFill>
+                  <a:schemeClr val="tx1"/>
+                </a:solidFill>
+              </a:rPr>
+              <a:t>harfleri ziyadesi ile mazisinin 6 harf üzere olmasıdır.</a:t>
+            </a:r>
+            <a:endParaRPr lang="tr-TR" dirty="0">
+              <a:solidFill>
+                <a:srgbClr val="C00000"/>
+              </a:solidFill>
+            </a:endParaRPr>
+          </a:p>
+        </p:txBody>
+      </p:sp>
+      <p:sp>
+        <p:nvSpPr>
+          <p:cNvPr id="7" name="Dikdörtgen: Üst Köşeleri Yuvarlatılmış 6">
+            <a:extLst>
+              <a:ext uri="{FF2B5EF4-FFF2-40B4-BE49-F238E27FC236}">
+                <a16:creationId xmlns:a16="http://schemas.microsoft.com/office/drawing/2014/main" id="{035ECAAF-6A44-611A-A787-ED2E34D3FDD0}"/>
+              </a:ext>
+            </a:extLst>
+          </p:cNvPr>
+          <p:cNvSpPr/>
+          <p:nvPr/>
+        </p:nvSpPr>
+        <p:spPr>
+          <a:xfrm>
+            <a:off x="113607" y="2868372"/>
+            <a:ext cx="3709359" cy="1121255"/>
+          </a:xfrm>
+          <a:prstGeom prst="round2SameRect">
+            <a:avLst>
+              <a:gd name="adj1" fmla="val 0"/>
+              <a:gd name="adj2" fmla="val 0"/>
+            </a:avLst>
+          </a:prstGeom>
+          <a:ln>
+            <a:solidFill>
+              <a:schemeClr val="tx2">
+                <a:lumMod val="50000"/>
+                <a:lumOff val="50000"/>
+              </a:schemeClr>
+            </a:solidFill>
+          </a:ln>
+          <a:effectLst>
+            <a:glow rad="63500">
+              <a:schemeClr val="accent1">
+                <a:satMod val="175000"/>
+                <a:alpha val="40000"/>
+              </a:schemeClr>
+            </a:glow>
+          </a:effectLst>
+        </p:spPr>
+        <p:style>
+          <a:lnRef idx="2">
+            <a:schemeClr val="accent1"/>
+          </a:lnRef>
+          <a:fillRef idx="1">
+            <a:schemeClr val="lt1"/>
+          </a:fillRef>
+          <a:effectRef idx="0">
+            <a:schemeClr val="accent1"/>
+          </a:effectRef>
+          <a:fontRef idx="minor">
+            <a:schemeClr val="dk1"/>
+          </a:fontRef>
+        </p:style>
+        <p:txBody>
+          <a:bodyPr lIns="216000" tIns="72000" rIns="288000" bIns="288000" rtlCol="0" anchor="t"/>
+          <a:lstStyle/>
+          <a:p>
+            <a:r>
+              <a:rPr lang="tr-TR" dirty="0">
+                <a:solidFill>
+                  <a:srgbClr val="C00000"/>
+                </a:solidFill>
+              </a:rPr>
+              <a:t>Binası:</a:t>
+            </a:r>
+            <a:r>
+              <a:rPr lang="ar-AE" dirty="0">
+                <a:solidFill>
+                  <a:schemeClr val="tx1"/>
+                </a:solidFill>
+              </a:rPr>
+              <a:t>.</a:t>
+            </a:r>
+            <a:r>
+              <a:rPr lang="tr-TR" dirty="0">
+                <a:solidFill>
+                  <a:schemeClr val="tx1"/>
+                </a:solidFill>
+              </a:rPr>
+              <a:t>Çoğu kere </a:t>
+            </a:r>
+            <a:r>
+              <a:rPr lang="tr-TR" dirty="0" err="1">
+                <a:solidFill>
+                  <a:schemeClr val="tx1"/>
+                </a:solidFill>
+              </a:rPr>
+              <a:t>müteaddi</a:t>
+            </a:r>
+            <a:r>
+              <a:rPr lang="tr-TR" dirty="0">
+                <a:solidFill>
+                  <a:schemeClr val="tx1"/>
+                </a:solidFill>
+              </a:rPr>
+              <a:t>, bazen lazım olur.</a:t>
+            </a:r>
+            <a:endParaRPr lang="tr-TR" dirty="0">
+              <a:solidFill>
+                <a:srgbClr val="C00000"/>
+              </a:solidFill>
+            </a:endParaRPr>
+          </a:p>
+        </p:txBody>
+      </p:sp>
+      <p:sp>
+        <p:nvSpPr>
+          <p:cNvPr id="8" name="Dikdörtgen: Üst Köşeleri Yuvarlatılmış 7">
+            <a:extLst>
+              <a:ext uri="{FF2B5EF4-FFF2-40B4-BE49-F238E27FC236}">
+                <a16:creationId xmlns:a16="http://schemas.microsoft.com/office/drawing/2014/main" id="{30BE5D54-F616-EC32-A7B3-9070EBCFD1C5}"/>
+              </a:ext>
+            </a:extLst>
+          </p:cNvPr>
+          <p:cNvSpPr/>
+          <p:nvPr/>
+        </p:nvSpPr>
+        <p:spPr>
+          <a:xfrm>
+            <a:off x="7797836" y="2868371"/>
+            <a:ext cx="4280558" cy="1121256"/>
+          </a:xfrm>
+          <a:prstGeom prst="round2SameRect">
+            <a:avLst>
+              <a:gd name="adj1" fmla="val 0"/>
+              <a:gd name="adj2" fmla="val 0"/>
+            </a:avLst>
+          </a:prstGeom>
+          <a:ln>
+            <a:solidFill>
+              <a:schemeClr val="tx2">
+                <a:lumMod val="50000"/>
+                <a:lumOff val="50000"/>
+              </a:schemeClr>
+            </a:solidFill>
+          </a:ln>
+          <a:effectLst>
+            <a:glow rad="63500">
+              <a:schemeClr val="accent1">
+                <a:satMod val="175000"/>
+                <a:alpha val="40000"/>
+              </a:schemeClr>
+            </a:glow>
+          </a:effectLst>
+        </p:spPr>
+        <p:style>
+          <a:lnRef idx="2">
+            <a:schemeClr val="accent1"/>
+          </a:lnRef>
+          <a:fillRef idx="1">
+            <a:schemeClr val="lt1"/>
+          </a:fillRef>
+          <a:effectRef idx="0">
+            <a:schemeClr val="accent1"/>
+          </a:effectRef>
+          <a:fontRef idx="minor">
+            <a:schemeClr val="dk1"/>
+          </a:fontRef>
+        </p:style>
+        <p:txBody>
+          <a:bodyPr lIns="216000" tIns="72000" rIns="288000" bIns="288000" rtlCol="0" anchor="t"/>
+          <a:lstStyle/>
+          <a:p>
+            <a:r>
+              <a:rPr lang="tr-TR" dirty="0">
+                <a:solidFill>
+                  <a:srgbClr val="C00000"/>
+                </a:solidFill>
+              </a:rPr>
+              <a:t>Vezni:</a:t>
+            </a:r>
+            <a:endParaRPr lang="ar-AE" dirty="0">
+              <a:solidFill>
+                <a:srgbClr val="C00000"/>
+              </a:solidFill>
+            </a:endParaRPr>
+          </a:p>
+          <a:p>
+            <a:pPr algn="r"/>
+            <a:r>
+              <a:rPr lang="ar-AE" sz="3200" dirty="0">
+                <a:solidFill>
+                  <a:schemeClr val="tx1">
+                    <a:lumMod val="65000"/>
+                    <a:lumOff val="35000"/>
+                  </a:schemeClr>
+                </a:solidFill>
+              </a:rPr>
+              <a:t>اِسْتَفْعَلَ – يَسْتَفْعِلُ - اِسْتِفْعَالًا	</a:t>
+            </a:r>
+            <a:endParaRPr lang="tr-TR" sz="3200" dirty="0">
+              <a:solidFill>
+                <a:schemeClr val="tx1">
+                  <a:lumMod val="65000"/>
+                  <a:lumOff val="35000"/>
+                </a:schemeClr>
+              </a:solidFill>
+            </a:endParaRPr>
+          </a:p>
+        </p:txBody>
+      </p:sp>
+      <p:sp>
+        <p:nvSpPr>
+          <p:cNvPr id="9" name="Dikdörtgen: Üst Köşeleri Yuvarlatılmış 8">
+            <a:extLst>
+              <a:ext uri="{FF2B5EF4-FFF2-40B4-BE49-F238E27FC236}">
+                <a16:creationId xmlns:a16="http://schemas.microsoft.com/office/drawing/2014/main" id="{8960AD68-9065-3C5A-2910-54AD292D8F34}"/>
+              </a:ext>
+            </a:extLst>
+          </p:cNvPr>
+          <p:cNvSpPr/>
+          <p:nvPr/>
+        </p:nvSpPr>
+        <p:spPr>
+          <a:xfrm>
+            <a:off x="3532910" y="4543425"/>
+            <a:ext cx="4879570" cy="1121256"/>
+          </a:xfrm>
+          <a:prstGeom prst="round2SameRect">
+            <a:avLst>
+              <a:gd name="adj1" fmla="val 0"/>
+              <a:gd name="adj2" fmla="val 0"/>
+            </a:avLst>
+          </a:prstGeom>
+          <a:ln>
+            <a:solidFill>
+              <a:schemeClr val="tx2">
+                <a:lumMod val="50000"/>
+                <a:lumOff val="50000"/>
+              </a:schemeClr>
+            </a:solidFill>
+          </a:ln>
+          <a:effectLst>
+            <a:glow rad="63500">
+              <a:schemeClr val="accent1">
+                <a:satMod val="175000"/>
+                <a:alpha val="40000"/>
+              </a:schemeClr>
+            </a:glow>
+          </a:effectLst>
+        </p:spPr>
+        <p:style>
+          <a:lnRef idx="2">
+            <a:schemeClr val="accent1"/>
+          </a:lnRef>
+          <a:fillRef idx="1">
+            <a:schemeClr val="lt1"/>
+          </a:fillRef>
+          <a:effectRef idx="0">
+            <a:schemeClr val="accent1"/>
+          </a:effectRef>
+          <a:fontRef idx="minor">
+            <a:schemeClr val="dk1"/>
+          </a:fontRef>
+        </p:style>
+        <p:txBody>
+          <a:bodyPr lIns="216000" tIns="72000" rIns="288000" bIns="288000" rtlCol="0" anchor="t"/>
+          <a:lstStyle/>
+          <a:p>
+            <a:r>
+              <a:rPr lang="tr-TR" dirty="0">
+                <a:solidFill>
+                  <a:srgbClr val="C00000"/>
+                </a:solidFill>
+              </a:rPr>
+              <a:t>Mevzun:</a:t>
+            </a:r>
+            <a:endParaRPr lang="ar-AE" dirty="0">
+              <a:solidFill>
+                <a:srgbClr val="C00000"/>
+              </a:solidFill>
+            </a:endParaRPr>
+          </a:p>
+          <a:p>
+            <a:pPr algn="r"/>
+            <a:r>
+              <a:rPr lang="ar-AE" sz="3200" dirty="0">
+                <a:solidFill>
+                  <a:schemeClr val="tx1">
+                    <a:lumMod val="65000"/>
+                    <a:lumOff val="35000"/>
+                  </a:schemeClr>
+                </a:solidFill>
+              </a:rPr>
+              <a:t>اِسْتَخْرَجَ – يَسْتَخْرِجُ - اِسْتِخْرَاجًا	</a:t>
+            </a:r>
+            <a:endParaRPr lang="tr-TR" sz="3200" dirty="0">
+              <a:solidFill>
+                <a:schemeClr val="tx1">
+                  <a:lumMod val="65000"/>
+                  <a:lumOff val="35000"/>
+                </a:schemeClr>
+              </a:solidFill>
+            </a:endParaRPr>
+          </a:p>
+        </p:txBody>
+      </p:sp>
+      <p:sp>
+        <p:nvSpPr>
+          <p:cNvPr id="2" name="İkizkenar Üçgen 1">
+            <a:extLst>
+              <a:ext uri="{FF2B5EF4-FFF2-40B4-BE49-F238E27FC236}">
+                <a16:creationId xmlns:a16="http://schemas.microsoft.com/office/drawing/2014/main" id="{F761A71F-29CB-9CF0-1D02-9D53577DA23F}"/>
+              </a:ext>
+            </a:extLst>
+          </p:cNvPr>
+          <p:cNvSpPr/>
+          <p:nvPr/>
+        </p:nvSpPr>
+        <p:spPr>
+          <a:xfrm rot="18876393">
+            <a:off x="-810273" y="-176755"/>
+            <a:ext cx="2538637" cy="1259992"/>
+          </a:xfrm>
+          <a:prstGeom prst="triangle">
+            <a:avLst/>
+          </a:prstGeom>
+          <a:solidFill>
+            <a:schemeClr val="accent2">
+              <a:lumMod val="50000"/>
+            </a:schemeClr>
+          </a:solidFill>
+          <a:ln>
+            <a:solidFill>
+              <a:schemeClr val="accent2"/>
+            </a:solidFill>
+          </a:ln>
+        </p:spPr>
+        <p:style>
+          <a:lnRef idx="2">
+            <a:schemeClr val="accent1">
+              <a:shade val="15000"/>
+            </a:schemeClr>
+          </a:lnRef>
+          <a:fillRef idx="1">
+            <a:schemeClr val="accent1"/>
+          </a:fillRef>
+          <a:effectRef idx="0">
+            <a:schemeClr val="accent1"/>
+          </a:effectRef>
+          <a:fontRef idx="minor">
+            <a:schemeClr val="lt1"/>
+          </a:fontRef>
+        </p:style>
+        <p:txBody>
+          <a:bodyPr rtlCol="0" anchor="ctr"/>
+          <a:lstStyle/>
+          <a:p>
+            <a:r>
+              <a:rPr lang="tr-TR" sz="2400" b="1" dirty="0">
+                <a:solidFill>
+                  <a:schemeClr val="bg1"/>
+                </a:solidFill>
+              </a:rPr>
+              <a:t>3. NEVİ</a:t>
+            </a:r>
+          </a:p>
+        </p:txBody>
+      </p:sp>
+    </p:spTree>
+    <p:extLst>
+      <p:ext uri="{BB962C8B-B14F-4D97-AF65-F5344CB8AC3E}">
+        <p14:creationId xmlns:p14="http://schemas.microsoft.com/office/powerpoint/2010/main" val="4265281997"/>
+      </p:ext>
+    </p:extLst>
+  </p:cSld>
+  <p:clrMapOvr>
+    <a:masterClrMapping/>
+  </p:clrMapOvr>
+</p:sld>
+</file>
+
+<file path=ppt/slides/slide18.xml><?xml version="1.0" encoding="utf-8"?>
+<p:sld xmlns:a="http://schemas.openxmlformats.org/drawingml/2006/main" xmlns:r="http://schemas.openxmlformats.org/officeDocument/2006/relationships" xmlns:p="http://schemas.openxmlformats.org/presentationml/2006/main">
+  <p:cSld>
+    <p:spTree>
+      <p:nvGrpSpPr>
+        <p:cNvPr id="1" name=""/>
+        <p:cNvGrpSpPr/>
+        <p:nvPr/>
+      </p:nvGrpSpPr>
+      <p:grpSpPr>
+        <a:xfrm>
+          <a:off x="0" y="0"/>
+          <a:ext cx="0" cy="0"/>
+          <a:chOff x="0" y="0"/>
+          <a:chExt cx="0" cy="0"/>
+        </a:xfrm>
+      </p:grpSpPr>
+      <p:sp>
+        <p:nvSpPr>
+          <p:cNvPr id="4" name="Dikdörtgen: Köşeleri Yuvarlatılmış 3">
+            <a:extLst>
+              <a:ext uri="{FF2B5EF4-FFF2-40B4-BE49-F238E27FC236}">
+                <a16:creationId xmlns:a16="http://schemas.microsoft.com/office/drawing/2014/main" id="{24824917-9527-9A35-B85F-969A69D3B615}"/>
+              </a:ext>
+            </a:extLst>
+          </p:cNvPr>
+          <p:cNvSpPr/>
+          <p:nvPr/>
+        </p:nvSpPr>
+        <p:spPr>
+          <a:xfrm>
+            <a:off x="4378035" y="2626822"/>
+            <a:ext cx="3435930" cy="1604356"/>
+          </a:xfrm>
+          <a:prstGeom prst="roundRect">
+            <a:avLst/>
+          </a:prstGeom>
+          <a:scene3d>
+            <a:camera prst="orthographicFront"/>
+            <a:lightRig rig="threePt" dir="t"/>
+          </a:scene3d>
+          <a:sp3d>
+            <a:bevelT w="114300" prst="artDeco"/>
+          </a:sp3d>
+        </p:spPr>
+        <p:style>
+          <a:lnRef idx="2">
+            <a:schemeClr val="accent1">
+              <a:shade val="15000"/>
+            </a:schemeClr>
+          </a:lnRef>
+          <a:fillRef idx="1">
+            <a:schemeClr val="accent1"/>
+          </a:fillRef>
+          <a:effectRef idx="0">
+            <a:schemeClr val="accent1"/>
+          </a:effectRef>
+          <a:fontRef idx="minor">
+            <a:schemeClr val="lt1"/>
+          </a:fontRef>
+        </p:style>
+        <p:txBody>
+          <a:bodyPr rtlCol="0" anchor="ctr"/>
+          <a:lstStyle/>
+          <a:p>
+            <a:pPr algn="ctr"/>
+            <a:r>
+              <a:rPr lang="tr-TR" dirty="0"/>
+              <a:t>SÜLASİ MEZİD 3. NEVİ</a:t>
+            </a:r>
+          </a:p>
+          <a:p>
+            <a:pPr algn="ctr"/>
+            <a:r>
+              <a:rPr lang="tr-TR" dirty="0"/>
+              <a:t>2. BAB</a:t>
+            </a:r>
+          </a:p>
+          <a:p>
+            <a:pPr algn="ctr"/>
+            <a:r>
+              <a:rPr lang="ar-AE" sz="3200" b="1" dirty="0"/>
+              <a:t>اِفْعِيعَالْ</a:t>
+            </a:r>
+            <a:endParaRPr lang="tr-TR" sz="3200" b="1" dirty="0"/>
+          </a:p>
+        </p:txBody>
+      </p:sp>
+      <p:sp>
+        <p:nvSpPr>
+          <p:cNvPr id="5" name="Dikdörtgen: Üst Köşeleri Yuvarlatılmış 4">
+            <a:extLst>
+              <a:ext uri="{FF2B5EF4-FFF2-40B4-BE49-F238E27FC236}">
+                <a16:creationId xmlns:a16="http://schemas.microsoft.com/office/drawing/2014/main" id="{DE25C558-0A44-EE66-F7E7-E1CB66230352}"/>
+              </a:ext>
+            </a:extLst>
+          </p:cNvPr>
+          <p:cNvSpPr/>
+          <p:nvPr/>
+        </p:nvSpPr>
+        <p:spPr>
+          <a:xfrm>
+            <a:off x="4164676" y="789709"/>
+            <a:ext cx="3898669" cy="1524866"/>
+          </a:xfrm>
+          <a:prstGeom prst="round2SameRect">
+            <a:avLst>
+              <a:gd name="adj1" fmla="val 0"/>
+              <a:gd name="adj2" fmla="val 0"/>
+            </a:avLst>
+          </a:prstGeom>
+          <a:ln>
+            <a:solidFill>
+              <a:schemeClr val="tx2">
+                <a:lumMod val="50000"/>
+                <a:lumOff val="50000"/>
+              </a:schemeClr>
+            </a:solidFill>
+          </a:ln>
+          <a:effectLst>
+            <a:glow rad="63500">
+              <a:schemeClr val="accent1">
+                <a:satMod val="175000"/>
+                <a:alpha val="40000"/>
+              </a:schemeClr>
+            </a:glow>
+          </a:effectLst>
+        </p:spPr>
+        <p:style>
+          <a:lnRef idx="2">
+            <a:schemeClr val="accent1"/>
+          </a:lnRef>
+          <a:fillRef idx="1">
+            <a:schemeClr val="lt1"/>
+          </a:fillRef>
+          <a:effectRef idx="0">
+            <a:schemeClr val="accent1"/>
+          </a:effectRef>
+          <a:fontRef idx="minor">
+            <a:schemeClr val="dk1"/>
+          </a:fontRef>
+        </p:style>
+        <p:txBody>
+          <a:bodyPr lIns="216000" tIns="72000" rIns="288000" bIns="288000" rtlCol="0" anchor="t"/>
+          <a:lstStyle/>
+          <a:p>
+            <a:r>
+              <a:rPr lang="tr-TR" dirty="0">
+                <a:solidFill>
+                  <a:srgbClr val="C00000"/>
+                </a:solidFill>
+              </a:rPr>
+              <a:t>ALAMETİ: </a:t>
+            </a:r>
+            <a:r>
+              <a:rPr lang="tr-TR" dirty="0">
+                <a:solidFill>
+                  <a:schemeClr val="tx1"/>
+                </a:solidFill>
+              </a:rPr>
+              <a:t>Evveline Hemze(</a:t>
+            </a:r>
+            <a:r>
+              <a:rPr lang="ar-AE" dirty="0">
+                <a:solidFill>
+                  <a:schemeClr val="tx1"/>
+                </a:solidFill>
+              </a:rPr>
+              <a:t>ا</a:t>
+            </a:r>
+            <a:r>
+              <a:rPr lang="tr-TR" dirty="0">
+                <a:solidFill>
+                  <a:schemeClr val="tx1"/>
+                </a:solidFill>
+              </a:rPr>
+              <a:t>), </a:t>
+            </a:r>
+            <a:r>
+              <a:rPr lang="tr-TR" dirty="0" err="1">
+                <a:solidFill>
+                  <a:schemeClr val="tx1"/>
+                </a:solidFill>
+              </a:rPr>
+              <a:t>Aynel</a:t>
+            </a:r>
+            <a:r>
+              <a:rPr lang="tr-TR" dirty="0">
+                <a:solidFill>
+                  <a:schemeClr val="tx1"/>
+                </a:solidFill>
+              </a:rPr>
+              <a:t> fiili ile Lamel fiili arasına </a:t>
+            </a:r>
+            <a:r>
+              <a:rPr lang="tr-TR" dirty="0" err="1">
+                <a:solidFill>
+                  <a:schemeClr val="tx1"/>
+                </a:solidFill>
+              </a:rPr>
+              <a:t>vav</a:t>
+            </a:r>
+            <a:r>
+              <a:rPr lang="tr-TR" dirty="0">
+                <a:solidFill>
+                  <a:schemeClr val="tx1"/>
+                </a:solidFill>
+              </a:rPr>
+              <a:t>(</a:t>
+            </a:r>
+            <a:r>
+              <a:rPr lang="ar-AE" dirty="0">
+                <a:solidFill>
+                  <a:schemeClr val="tx1"/>
+                </a:solidFill>
+              </a:rPr>
+              <a:t>و</a:t>
+            </a:r>
+            <a:r>
+              <a:rPr lang="tr-TR" dirty="0">
+                <a:solidFill>
+                  <a:schemeClr val="tx1"/>
+                </a:solidFill>
+              </a:rPr>
+              <a:t>) ve </a:t>
+            </a:r>
+            <a:r>
+              <a:rPr lang="tr-TR" dirty="0" err="1">
+                <a:solidFill>
+                  <a:schemeClr val="tx1"/>
+                </a:solidFill>
+              </a:rPr>
+              <a:t>Aynel</a:t>
+            </a:r>
+            <a:r>
+              <a:rPr lang="tr-TR" dirty="0">
+                <a:solidFill>
+                  <a:schemeClr val="tx1"/>
+                </a:solidFill>
+              </a:rPr>
+              <a:t> fiili cinsinden harfler ziyadesi ile mazisinin 6 harf üzere olmasıdır.</a:t>
+            </a:r>
+            <a:endParaRPr lang="tr-TR" dirty="0">
+              <a:solidFill>
+                <a:srgbClr val="C00000"/>
+              </a:solidFill>
+            </a:endParaRPr>
+          </a:p>
+        </p:txBody>
+      </p:sp>
+      <p:sp>
+        <p:nvSpPr>
+          <p:cNvPr id="7" name="Dikdörtgen: Üst Köşeleri Yuvarlatılmış 6">
+            <a:extLst>
+              <a:ext uri="{FF2B5EF4-FFF2-40B4-BE49-F238E27FC236}">
+                <a16:creationId xmlns:a16="http://schemas.microsoft.com/office/drawing/2014/main" id="{035ECAAF-6A44-611A-A787-ED2E34D3FDD0}"/>
+              </a:ext>
+            </a:extLst>
+          </p:cNvPr>
+          <p:cNvSpPr/>
+          <p:nvPr/>
+        </p:nvSpPr>
+        <p:spPr>
+          <a:xfrm>
+            <a:off x="240820" y="2868372"/>
+            <a:ext cx="4037463" cy="1121255"/>
+          </a:xfrm>
+          <a:prstGeom prst="round2SameRect">
+            <a:avLst>
+              <a:gd name="adj1" fmla="val 0"/>
+              <a:gd name="adj2" fmla="val 0"/>
+            </a:avLst>
+          </a:prstGeom>
+          <a:ln>
+            <a:solidFill>
+              <a:schemeClr val="tx2">
+                <a:lumMod val="50000"/>
+                <a:lumOff val="50000"/>
+              </a:schemeClr>
+            </a:solidFill>
+          </a:ln>
+          <a:effectLst>
+            <a:glow rad="63500">
+              <a:schemeClr val="accent1">
+                <a:satMod val="175000"/>
+                <a:alpha val="40000"/>
+              </a:schemeClr>
+            </a:glow>
+          </a:effectLst>
+        </p:spPr>
+        <p:style>
+          <a:lnRef idx="2">
+            <a:schemeClr val="accent1"/>
+          </a:lnRef>
+          <a:fillRef idx="1">
+            <a:schemeClr val="lt1"/>
+          </a:fillRef>
+          <a:effectRef idx="0">
+            <a:schemeClr val="accent1"/>
+          </a:effectRef>
+          <a:fontRef idx="minor">
+            <a:schemeClr val="dk1"/>
+          </a:fontRef>
+        </p:style>
+        <p:txBody>
+          <a:bodyPr lIns="216000" tIns="72000" rIns="288000" bIns="288000" rtlCol="0" anchor="t"/>
+          <a:lstStyle/>
+          <a:p>
+            <a:r>
+              <a:rPr lang="tr-TR" dirty="0">
+                <a:solidFill>
+                  <a:srgbClr val="C00000"/>
+                </a:solidFill>
+              </a:rPr>
+              <a:t>Binası: </a:t>
+            </a:r>
+            <a:r>
+              <a:rPr lang="tr-TR" dirty="0">
+                <a:solidFill>
+                  <a:schemeClr val="tx1"/>
+                </a:solidFill>
+              </a:rPr>
+              <a:t>Lazımın mübalağası içindir.</a:t>
+            </a:r>
+            <a:endParaRPr lang="tr-TR" dirty="0">
+              <a:solidFill>
+                <a:srgbClr val="C00000"/>
+              </a:solidFill>
+            </a:endParaRPr>
+          </a:p>
+        </p:txBody>
+      </p:sp>
+      <p:sp>
+        <p:nvSpPr>
+          <p:cNvPr id="8" name="Dikdörtgen: Üst Köşeleri Yuvarlatılmış 7">
+            <a:extLst>
+              <a:ext uri="{FF2B5EF4-FFF2-40B4-BE49-F238E27FC236}">
+                <a16:creationId xmlns:a16="http://schemas.microsoft.com/office/drawing/2014/main" id="{30BE5D54-F616-EC32-A7B3-9070EBCFD1C5}"/>
+              </a:ext>
+            </a:extLst>
+          </p:cNvPr>
+          <p:cNvSpPr/>
+          <p:nvPr/>
+        </p:nvSpPr>
+        <p:spPr>
+          <a:xfrm>
+            <a:off x="7913717" y="2868371"/>
+            <a:ext cx="4186844" cy="1121256"/>
+          </a:xfrm>
+          <a:prstGeom prst="round2SameRect">
+            <a:avLst>
+              <a:gd name="adj1" fmla="val 0"/>
+              <a:gd name="adj2" fmla="val 0"/>
+            </a:avLst>
+          </a:prstGeom>
+          <a:ln>
+            <a:solidFill>
+              <a:schemeClr val="tx2">
+                <a:lumMod val="50000"/>
+                <a:lumOff val="50000"/>
+              </a:schemeClr>
+            </a:solidFill>
+          </a:ln>
+          <a:effectLst>
+            <a:glow rad="63500">
+              <a:schemeClr val="accent1">
+                <a:satMod val="175000"/>
+                <a:alpha val="40000"/>
+              </a:schemeClr>
+            </a:glow>
+          </a:effectLst>
+        </p:spPr>
+        <p:style>
+          <a:lnRef idx="2">
+            <a:schemeClr val="accent1"/>
+          </a:lnRef>
+          <a:fillRef idx="1">
+            <a:schemeClr val="lt1"/>
+          </a:fillRef>
+          <a:effectRef idx="0">
+            <a:schemeClr val="accent1"/>
+          </a:effectRef>
+          <a:fontRef idx="minor">
+            <a:schemeClr val="dk1"/>
+          </a:fontRef>
+        </p:style>
+        <p:txBody>
+          <a:bodyPr lIns="216000" tIns="72000" rIns="288000" bIns="288000" rtlCol="0" anchor="t"/>
+          <a:lstStyle/>
+          <a:p>
+            <a:r>
+              <a:rPr lang="tr-TR" dirty="0">
+                <a:solidFill>
+                  <a:srgbClr val="C00000"/>
+                </a:solidFill>
+              </a:rPr>
+              <a:t>Vezni:</a:t>
+            </a:r>
+            <a:endParaRPr lang="ar-AE" dirty="0">
+              <a:solidFill>
+                <a:srgbClr val="C00000"/>
+              </a:solidFill>
+            </a:endParaRPr>
+          </a:p>
+          <a:p>
+            <a:pPr algn="r"/>
+            <a:r>
+              <a:rPr lang="ar-AE" sz="3200" dirty="0">
+                <a:solidFill>
+                  <a:schemeClr val="tx1">
+                    <a:lumMod val="65000"/>
+                    <a:lumOff val="35000"/>
+                  </a:schemeClr>
+                </a:solidFill>
+              </a:rPr>
+              <a:t>اِفْعَوْعَلَ – يَفْعَوْعَلُ – اِفْعِيعَالًا	</a:t>
+            </a:r>
+            <a:endParaRPr lang="tr-TR" sz="3200" dirty="0">
+              <a:solidFill>
+                <a:schemeClr val="tx1">
+                  <a:lumMod val="65000"/>
+                  <a:lumOff val="35000"/>
+                </a:schemeClr>
+              </a:solidFill>
+            </a:endParaRPr>
+          </a:p>
+        </p:txBody>
+      </p:sp>
+      <p:sp>
+        <p:nvSpPr>
+          <p:cNvPr id="9" name="Dikdörtgen: Üst Köşeleri Yuvarlatılmış 8">
+            <a:extLst>
+              <a:ext uri="{FF2B5EF4-FFF2-40B4-BE49-F238E27FC236}">
+                <a16:creationId xmlns:a16="http://schemas.microsoft.com/office/drawing/2014/main" id="{8960AD68-9065-3C5A-2910-54AD292D8F34}"/>
+              </a:ext>
+            </a:extLst>
+          </p:cNvPr>
+          <p:cNvSpPr/>
+          <p:nvPr/>
+        </p:nvSpPr>
+        <p:spPr>
+          <a:xfrm>
+            <a:off x="3668684" y="4543423"/>
+            <a:ext cx="4854632" cy="1034415"/>
+          </a:xfrm>
+          <a:prstGeom prst="round2SameRect">
+            <a:avLst>
+              <a:gd name="adj1" fmla="val 0"/>
+              <a:gd name="adj2" fmla="val 0"/>
+            </a:avLst>
+          </a:prstGeom>
+          <a:ln>
+            <a:solidFill>
+              <a:schemeClr val="tx2">
+                <a:lumMod val="50000"/>
+                <a:lumOff val="50000"/>
+              </a:schemeClr>
+            </a:solidFill>
+          </a:ln>
+          <a:effectLst>
+            <a:glow rad="63500">
+              <a:schemeClr val="accent1">
+                <a:satMod val="175000"/>
+                <a:alpha val="40000"/>
+              </a:schemeClr>
+            </a:glow>
+          </a:effectLst>
+        </p:spPr>
+        <p:style>
+          <a:lnRef idx="2">
+            <a:schemeClr val="accent1"/>
+          </a:lnRef>
+          <a:fillRef idx="1">
+            <a:schemeClr val="lt1"/>
+          </a:fillRef>
+          <a:effectRef idx="0">
+            <a:schemeClr val="accent1"/>
+          </a:effectRef>
+          <a:fontRef idx="minor">
+            <a:schemeClr val="dk1"/>
+          </a:fontRef>
+        </p:style>
+        <p:txBody>
+          <a:bodyPr lIns="216000" tIns="72000" rIns="288000" bIns="288000" rtlCol="0" anchor="t"/>
+          <a:lstStyle/>
+          <a:p>
+            <a:r>
+              <a:rPr lang="tr-TR" dirty="0">
+                <a:solidFill>
+                  <a:srgbClr val="C00000"/>
+                </a:solidFill>
+              </a:rPr>
+              <a:t>Mevzun:</a:t>
+            </a:r>
+            <a:endParaRPr lang="ar-AE" dirty="0">
+              <a:solidFill>
+                <a:srgbClr val="C00000"/>
+              </a:solidFill>
+            </a:endParaRPr>
+          </a:p>
+          <a:p>
+            <a:pPr algn="r"/>
+            <a:r>
+              <a:rPr lang="ar-AE" sz="3200" dirty="0">
+                <a:solidFill>
+                  <a:schemeClr val="tx1">
+                    <a:lumMod val="65000"/>
+                    <a:lumOff val="35000"/>
+                  </a:schemeClr>
+                </a:solidFill>
+              </a:rPr>
+              <a:t>اِعْشَوْشَبَ – يَعْشَوْشَبُ - اِعْشِيشَابًا	</a:t>
+            </a:r>
+            <a:endParaRPr lang="tr-TR" sz="3200" dirty="0">
+              <a:solidFill>
+                <a:schemeClr val="tx1">
+                  <a:lumMod val="65000"/>
+                  <a:lumOff val="35000"/>
+                </a:schemeClr>
+              </a:solidFill>
+            </a:endParaRPr>
+          </a:p>
+        </p:txBody>
+      </p:sp>
+      <p:sp>
+        <p:nvSpPr>
+          <p:cNvPr id="2" name="İkizkenar Üçgen 1">
+            <a:extLst>
+              <a:ext uri="{FF2B5EF4-FFF2-40B4-BE49-F238E27FC236}">
+                <a16:creationId xmlns:a16="http://schemas.microsoft.com/office/drawing/2014/main" id="{F761A71F-29CB-9CF0-1D02-9D53577DA23F}"/>
+              </a:ext>
+            </a:extLst>
+          </p:cNvPr>
+          <p:cNvSpPr/>
+          <p:nvPr/>
+        </p:nvSpPr>
+        <p:spPr>
+          <a:xfrm rot="18876393">
+            <a:off x="-810273" y="-176755"/>
+            <a:ext cx="2538637" cy="1259992"/>
+          </a:xfrm>
+          <a:prstGeom prst="triangle">
+            <a:avLst/>
+          </a:prstGeom>
+          <a:solidFill>
+            <a:schemeClr val="accent2">
+              <a:lumMod val="50000"/>
+            </a:schemeClr>
+          </a:solidFill>
+          <a:ln>
+            <a:solidFill>
+              <a:schemeClr val="accent2"/>
+            </a:solidFill>
+          </a:ln>
+        </p:spPr>
+        <p:style>
+          <a:lnRef idx="2">
+            <a:schemeClr val="accent1">
+              <a:shade val="15000"/>
+            </a:schemeClr>
+          </a:lnRef>
+          <a:fillRef idx="1">
+            <a:schemeClr val="accent1"/>
+          </a:fillRef>
+          <a:effectRef idx="0">
+            <a:schemeClr val="accent1"/>
+          </a:effectRef>
+          <a:fontRef idx="minor">
+            <a:schemeClr val="lt1"/>
+          </a:fontRef>
+        </p:style>
+        <p:txBody>
+          <a:bodyPr rtlCol="0" anchor="ctr"/>
+          <a:lstStyle/>
+          <a:p>
+            <a:r>
+              <a:rPr lang="tr-TR" sz="2400" b="1" dirty="0">
+                <a:solidFill>
+                  <a:schemeClr val="bg1"/>
+                </a:solidFill>
+              </a:rPr>
+              <a:t>3. NEVİ</a:t>
+            </a:r>
+          </a:p>
+        </p:txBody>
+      </p:sp>
+    </p:spTree>
+    <p:extLst>
+      <p:ext uri="{BB962C8B-B14F-4D97-AF65-F5344CB8AC3E}">
+        <p14:creationId xmlns:p14="http://schemas.microsoft.com/office/powerpoint/2010/main" val="848089597"/>
+      </p:ext>
+    </p:extLst>
+  </p:cSld>
+  <p:clrMapOvr>
+    <a:masterClrMapping/>
+  </p:clrMapOvr>
+</p:sld>
+</file>
+
+<file path=ppt/slides/slide19.xml><?xml version="1.0" encoding="utf-8"?>
+<p:sld xmlns:a="http://schemas.openxmlformats.org/drawingml/2006/main" xmlns:r="http://schemas.openxmlformats.org/officeDocument/2006/relationships" xmlns:p="http://schemas.openxmlformats.org/presentationml/2006/main">
+  <p:cSld>
+    <p:spTree>
+      <p:nvGrpSpPr>
+        <p:cNvPr id="1" name=""/>
+        <p:cNvGrpSpPr/>
+        <p:nvPr/>
+      </p:nvGrpSpPr>
+      <p:grpSpPr>
+        <a:xfrm>
+          <a:off x="0" y="0"/>
+          <a:ext cx="0" cy="0"/>
+          <a:chOff x="0" y="0"/>
+          <a:chExt cx="0" cy="0"/>
+        </a:xfrm>
+      </p:grpSpPr>
+      <p:sp>
+        <p:nvSpPr>
+          <p:cNvPr id="4" name="Dikdörtgen: Köşeleri Yuvarlatılmış 3">
+            <a:extLst>
+              <a:ext uri="{FF2B5EF4-FFF2-40B4-BE49-F238E27FC236}">
+                <a16:creationId xmlns:a16="http://schemas.microsoft.com/office/drawing/2014/main" id="{24824917-9527-9A35-B85F-969A69D3B615}"/>
+              </a:ext>
+            </a:extLst>
+          </p:cNvPr>
+          <p:cNvSpPr/>
+          <p:nvPr/>
+        </p:nvSpPr>
+        <p:spPr>
+          <a:xfrm>
+            <a:off x="4461163" y="2651760"/>
+            <a:ext cx="3269674" cy="1554480"/>
+          </a:xfrm>
+          <a:prstGeom prst="roundRect">
+            <a:avLst/>
+          </a:prstGeom>
+          <a:scene3d>
+            <a:camera prst="orthographicFront"/>
+            <a:lightRig rig="threePt" dir="t"/>
+          </a:scene3d>
+          <a:sp3d>
+            <a:bevelT w="114300" prst="artDeco"/>
+          </a:sp3d>
+        </p:spPr>
+        <p:style>
+          <a:lnRef idx="2">
+            <a:schemeClr val="accent1">
+              <a:shade val="15000"/>
+            </a:schemeClr>
+          </a:lnRef>
+          <a:fillRef idx="1">
+            <a:schemeClr val="accent1"/>
+          </a:fillRef>
+          <a:effectRef idx="0">
+            <a:schemeClr val="accent1"/>
+          </a:effectRef>
+          <a:fontRef idx="minor">
+            <a:schemeClr val="lt1"/>
+          </a:fontRef>
+        </p:style>
+        <p:txBody>
+          <a:bodyPr rtlCol="0" anchor="ctr"/>
+          <a:lstStyle/>
+          <a:p>
+            <a:pPr algn="ctr"/>
+            <a:r>
+              <a:rPr lang="tr-TR" dirty="0"/>
+              <a:t>SÜLASİ MEZİD 3. NEVİ</a:t>
+            </a:r>
+          </a:p>
+          <a:p>
+            <a:pPr algn="ctr"/>
+            <a:r>
+              <a:rPr lang="tr-TR" dirty="0"/>
+              <a:t>3. BAB</a:t>
+            </a:r>
+          </a:p>
+          <a:p>
+            <a:pPr algn="ctr"/>
+            <a:r>
+              <a:rPr lang="ar-AE" sz="3200" b="1" dirty="0"/>
+              <a:t>اِفْعِوَّالْ</a:t>
+            </a:r>
+            <a:endParaRPr lang="tr-TR" sz="3200" b="1" dirty="0"/>
+          </a:p>
+        </p:txBody>
+      </p:sp>
+      <p:sp>
+        <p:nvSpPr>
+          <p:cNvPr id="5" name="Dikdörtgen: Üst Köşeleri Yuvarlatılmış 4">
+            <a:extLst>
+              <a:ext uri="{FF2B5EF4-FFF2-40B4-BE49-F238E27FC236}">
+                <a16:creationId xmlns:a16="http://schemas.microsoft.com/office/drawing/2014/main" id="{DE25C558-0A44-EE66-F7E7-E1CB66230352}"/>
+              </a:ext>
+            </a:extLst>
+          </p:cNvPr>
+          <p:cNvSpPr/>
+          <p:nvPr/>
+        </p:nvSpPr>
+        <p:spPr>
+          <a:xfrm>
+            <a:off x="4241320" y="1005841"/>
+            <a:ext cx="3709359" cy="1308734"/>
+          </a:xfrm>
+          <a:prstGeom prst="round2SameRect">
+            <a:avLst>
+              <a:gd name="adj1" fmla="val 0"/>
+              <a:gd name="adj2" fmla="val 0"/>
+            </a:avLst>
+          </a:prstGeom>
+          <a:ln>
+            <a:solidFill>
+              <a:schemeClr val="tx2">
+                <a:lumMod val="50000"/>
+                <a:lumOff val="50000"/>
+              </a:schemeClr>
+            </a:solidFill>
+          </a:ln>
+          <a:effectLst>
+            <a:glow rad="63500">
+              <a:schemeClr val="accent1">
+                <a:satMod val="175000"/>
+                <a:alpha val="40000"/>
+              </a:schemeClr>
+            </a:glow>
+          </a:effectLst>
+        </p:spPr>
+        <p:style>
+          <a:lnRef idx="2">
+            <a:schemeClr val="accent1"/>
+          </a:lnRef>
+          <a:fillRef idx="1">
+            <a:schemeClr val="lt1"/>
+          </a:fillRef>
+          <a:effectRef idx="0">
+            <a:schemeClr val="accent1"/>
+          </a:effectRef>
+          <a:fontRef idx="minor">
+            <a:schemeClr val="dk1"/>
+          </a:fontRef>
+        </p:style>
+        <p:txBody>
+          <a:bodyPr lIns="216000" tIns="72000" rIns="288000" bIns="288000" rtlCol="0" anchor="t"/>
+          <a:lstStyle/>
+          <a:p>
+            <a:r>
+              <a:rPr lang="tr-TR" dirty="0">
+                <a:solidFill>
+                  <a:srgbClr val="C00000"/>
+                </a:solidFill>
+              </a:rPr>
+              <a:t>ALAMETİ: </a:t>
+            </a:r>
+            <a:r>
+              <a:rPr lang="tr-TR" dirty="0">
+                <a:solidFill>
+                  <a:schemeClr val="tx1"/>
+                </a:solidFill>
+              </a:rPr>
+              <a:t>Evveline Hemze(</a:t>
+            </a:r>
+            <a:r>
+              <a:rPr lang="ar-AE" dirty="0">
+                <a:solidFill>
+                  <a:schemeClr val="tx1"/>
+                </a:solidFill>
+              </a:rPr>
+              <a:t>ا</a:t>
+            </a:r>
+            <a:r>
+              <a:rPr lang="tr-TR" dirty="0">
+                <a:solidFill>
+                  <a:schemeClr val="tx1"/>
+                </a:solidFill>
+              </a:rPr>
+              <a:t>), </a:t>
+            </a:r>
+            <a:r>
+              <a:rPr lang="tr-TR" dirty="0" err="1">
+                <a:solidFill>
+                  <a:schemeClr val="tx1"/>
+                </a:solidFill>
+              </a:rPr>
+              <a:t>Aynel</a:t>
+            </a:r>
+            <a:r>
+              <a:rPr lang="tr-TR" dirty="0">
+                <a:solidFill>
+                  <a:schemeClr val="tx1"/>
+                </a:solidFill>
+              </a:rPr>
+              <a:t> fiili ile Lamel fiili arasına 2 </a:t>
+            </a:r>
+            <a:r>
+              <a:rPr lang="tr-TR" dirty="0" err="1">
+                <a:solidFill>
+                  <a:schemeClr val="tx1"/>
+                </a:solidFill>
+              </a:rPr>
+              <a:t>vav</a:t>
+            </a:r>
+            <a:r>
+              <a:rPr lang="tr-TR" dirty="0">
+                <a:solidFill>
+                  <a:schemeClr val="tx1"/>
+                </a:solidFill>
+              </a:rPr>
+              <a:t>(</a:t>
+            </a:r>
+            <a:r>
+              <a:rPr lang="ar-AE" dirty="0">
+                <a:solidFill>
+                  <a:schemeClr val="tx1"/>
+                </a:solidFill>
+              </a:rPr>
+              <a:t>و</a:t>
+            </a:r>
+            <a:r>
+              <a:rPr lang="tr-TR" dirty="0">
+                <a:solidFill>
+                  <a:schemeClr val="tx1"/>
+                </a:solidFill>
+              </a:rPr>
+              <a:t>) harfleri ziyadesi ile mazisinin 6 harf üzere olmasıdır.</a:t>
+            </a:r>
+            <a:endParaRPr lang="tr-TR" dirty="0">
+              <a:solidFill>
+                <a:srgbClr val="C00000"/>
+              </a:solidFill>
+            </a:endParaRPr>
+          </a:p>
+        </p:txBody>
+      </p:sp>
+      <p:sp>
+        <p:nvSpPr>
+          <p:cNvPr id="7" name="Dikdörtgen: Üst Köşeleri Yuvarlatılmış 6">
+            <a:extLst>
+              <a:ext uri="{FF2B5EF4-FFF2-40B4-BE49-F238E27FC236}">
+                <a16:creationId xmlns:a16="http://schemas.microsoft.com/office/drawing/2014/main" id="{035ECAAF-6A44-611A-A787-ED2E34D3FDD0}"/>
+              </a:ext>
+            </a:extLst>
+          </p:cNvPr>
+          <p:cNvSpPr/>
+          <p:nvPr/>
+        </p:nvSpPr>
+        <p:spPr>
+          <a:xfrm>
+            <a:off x="240820" y="2868372"/>
+            <a:ext cx="3709359" cy="1121255"/>
+          </a:xfrm>
+          <a:prstGeom prst="round2SameRect">
+            <a:avLst>
+              <a:gd name="adj1" fmla="val 0"/>
+              <a:gd name="adj2" fmla="val 0"/>
+            </a:avLst>
+          </a:prstGeom>
+          <a:ln>
+            <a:solidFill>
+              <a:schemeClr val="tx2">
+                <a:lumMod val="50000"/>
+                <a:lumOff val="50000"/>
+              </a:schemeClr>
+            </a:solidFill>
+          </a:ln>
+          <a:effectLst>
+            <a:glow rad="63500">
+              <a:schemeClr val="accent1">
+                <a:satMod val="175000"/>
+                <a:alpha val="40000"/>
+              </a:schemeClr>
+            </a:glow>
+          </a:effectLst>
+        </p:spPr>
+        <p:style>
+          <a:lnRef idx="2">
+            <a:schemeClr val="accent1"/>
+          </a:lnRef>
+          <a:fillRef idx="1">
+            <a:schemeClr val="lt1"/>
+          </a:fillRef>
+          <a:effectRef idx="0">
+            <a:schemeClr val="accent1"/>
+          </a:effectRef>
+          <a:fontRef idx="minor">
+            <a:schemeClr val="dk1"/>
+          </a:fontRef>
+        </p:style>
+        <p:txBody>
+          <a:bodyPr lIns="216000" tIns="72000" rIns="288000" bIns="288000" rtlCol="0" anchor="t"/>
+          <a:lstStyle/>
+          <a:p>
+            <a:r>
+              <a:rPr lang="tr-TR" dirty="0">
+                <a:solidFill>
+                  <a:srgbClr val="C00000"/>
+                </a:solidFill>
+              </a:rPr>
+              <a:t>Binası: </a:t>
+            </a:r>
+            <a:r>
+              <a:rPr lang="tr-TR" dirty="0">
+                <a:solidFill>
+                  <a:schemeClr val="tx1"/>
+                </a:solidFill>
+              </a:rPr>
+              <a:t>Lazımın mübalağası içindir. Bu bab günlük </a:t>
+            </a:r>
+            <a:r>
+              <a:rPr lang="tr-TR" dirty="0" err="1">
+                <a:solidFill>
+                  <a:schemeClr val="tx1"/>
+                </a:solidFill>
+              </a:rPr>
+              <a:t>arapça</a:t>
+            </a:r>
+            <a:r>
+              <a:rPr lang="ar-AE" dirty="0">
+                <a:solidFill>
+                  <a:schemeClr val="tx1"/>
+                </a:solidFill>
+              </a:rPr>
+              <a:t> </a:t>
+            </a:r>
+            <a:r>
+              <a:rPr lang="tr-TR" dirty="0">
+                <a:solidFill>
+                  <a:schemeClr val="tx1"/>
+                </a:solidFill>
+              </a:rPr>
+              <a:t>da çok az kullanılır.</a:t>
+            </a:r>
+            <a:endParaRPr lang="tr-TR" dirty="0">
+              <a:solidFill>
+                <a:srgbClr val="C00000"/>
+              </a:solidFill>
+            </a:endParaRPr>
+          </a:p>
+        </p:txBody>
+      </p:sp>
+      <p:sp>
+        <p:nvSpPr>
+          <p:cNvPr id="8" name="Dikdörtgen: Üst Köşeleri Yuvarlatılmış 7">
+            <a:extLst>
+              <a:ext uri="{FF2B5EF4-FFF2-40B4-BE49-F238E27FC236}">
+                <a16:creationId xmlns:a16="http://schemas.microsoft.com/office/drawing/2014/main" id="{30BE5D54-F616-EC32-A7B3-9070EBCFD1C5}"/>
+              </a:ext>
+            </a:extLst>
+          </p:cNvPr>
+          <p:cNvSpPr/>
+          <p:nvPr/>
+        </p:nvSpPr>
+        <p:spPr>
+          <a:xfrm>
+            <a:off x="7847215" y="2868371"/>
+            <a:ext cx="4272741" cy="1121256"/>
+          </a:xfrm>
+          <a:prstGeom prst="round2SameRect">
+            <a:avLst>
+              <a:gd name="adj1" fmla="val 0"/>
+              <a:gd name="adj2" fmla="val 0"/>
+            </a:avLst>
+          </a:prstGeom>
+          <a:ln>
+            <a:solidFill>
+              <a:schemeClr val="tx2">
+                <a:lumMod val="50000"/>
+                <a:lumOff val="50000"/>
+              </a:schemeClr>
+            </a:solidFill>
+          </a:ln>
+          <a:effectLst>
+            <a:glow rad="63500">
+              <a:schemeClr val="accent1">
+                <a:satMod val="175000"/>
+                <a:alpha val="40000"/>
+              </a:schemeClr>
+            </a:glow>
+          </a:effectLst>
+        </p:spPr>
+        <p:style>
+          <a:lnRef idx="2">
+            <a:schemeClr val="accent1"/>
+          </a:lnRef>
+          <a:fillRef idx="1">
+            <a:schemeClr val="lt1"/>
+          </a:fillRef>
+          <a:effectRef idx="0">
+            <a:schemeClr val="accent1"/>
+          </a:effectRef>
+          <a:fontRef idx="minor">
+            <a:schemeClr val="dk1"/>
+          </a:fontRef>
+        </p:style>
+        <p:txBody>
+          <a:bodyPr lIns="216000" tIns="72000" rIns="288000" bIns="288000" rtlCol="0" anchor="t"/>
+          <a:lstStyle/>
+          <a:p>
+            <a:r>
+              <a:rPr lang="tr-TR" dirty="0">
+                <a:solidFill>
+                  <a:srgbClr val="C00000"/>
+                </a:solidFill>
+              </a:rPr>
+              <a:t>Vezni:</a:t>
+            </a:r>
+            <a:endParaRPr lang="ar-AE" dirty="0">
+              <a:solidFill>
+                <a:srgbClr val="C00000"/>
+              </a:solidFill>
+            </a:endParaRPr>
+          </a:p>
+          <a:p>
+            <a:pPr algn="r"/>
+            <a:r>
+              <a:rPr lang="ar-AE" sz="3200" dirty="0">
+                <a:solidFill>
+                  <a:schemeClr val="tx1">
+                    <a:lumMod val="65000"/>
+                    <a:lumOff val="35000"/>
+                  </a:schemeClr>
+                </a:solidFill>
+              </a:rPr>
+              <a:t>اِفْعَوَّلَ – يَفْعَوِّلُ - اِفْعِوَّالًا	</a:t>
+            </a:r>
+            <a:endParaRPr lang="tr-TR" sz="3200" dirty="0">
+              <a:solidFill>
+                <a:schemeClr val="tx1">
+                  <a:lumMod val="65000"/>
+                  <a:lumOff val="35000"/>
+                </a:schemeClr>
+              </a:solidFill>
+            </a:endParaRPr>
+          </a:p>
+        </p:txBody>
+      </p:sp>
+      <p:sp>
+        <p:nvSpPr>
+          <p:cNvPr id="9" name="Dikdörtgen: Üst Köşeleri Yuvarlatılmış 8">
+            <a:extLst>
+              <a:ext uri="{FF2B5EF4-FFF2-40B4-BE49-F238E27FC236}">
+                <a16:creationId xmlns:a16="http://schemas.microsoft.com/office/drawing/2014/main" id="{8960AD68-9065-3C5A-2910-54AD292D8F34}"/>
+              </a:ext>
+            </a:extLst>
+          </p:cNvPr>
+          <p:cNvSpPr/>
+          <p:nvPr/>
+        </p:nvSpPr>
+        <p:spPr>
+          <a:xfrm>
+            <a:off x="4241320" y="4543425"/>
+            <a:ext cx="3946716" cy="1121256"/>
+          </a:xfrm>
+          <a:prstGeom prst="round2SameRect">
+            <a:avLst>
+              <a:gd name="adj1" fmla="val 0"/>
+              <a:gd name="adj2" fmla="val 0"/>
+            </a:avLst>
+          </a:prstGeom>
+          <a:ln>
+            <a:solidFill>
+              <a:schemeClr val="tx2">
+                <a:lumMod val="50000"/>
+                <a:lumOff val="50000"/>
+              </a:schemeClr>
+            </a:solidFill>
+          </a:ln>
+          <a:effectLst>
+            <a:glow rad="63500">
+              <a:schemeClr val="accent1">
+                <a:satMod val="175000"/>
+                <a:alpha val="40000"/>
+              </a:schemeClr>
+            </a:glow>
+          </a:effectLst>
+        </p:spPr>
+        <p:style>
+          <a:lnRef idx="2">
+            <a:schemeClr val="accent1"/>
+          </a:lnRef>
+          <a:fillRef idx="1">
+            <a:schemeClr val="lt1"/>
+          </a:fillRef>
+          <a:effectRef idx="0">
+            <a:schemeClr val="accent1"/>
+          </a:effectRef>
+          <a:fontRef idx="minor">
+            <a:schemeClr val="dk1"/>
+          </a:fontRef>
+        </p:style>
+        <p:txBody>
+          <a:bodyPr lIns="216000" tIns="72000" rIns="288000" bIns="288000" rtlCol="0" anchor="t"/>
+          <a:lstStyle/>
+          <a:p>
+            <a:r>
+              <a:rPr lang="tr-TR" dirty="0">
+                <a:solidFill>
+                  <a:srgbClr val="C00000"/>
+                </a:solidFill>
+              </a:rPr>
+              <a:t>Mevzun:</a:t>
+            </a:r>
+            <a:endParaRPr lang="ar-AE" dirty="0">
+              <a:solidFill>
+                <a:srgbClr val="C00000"/>
+              </a:solidFill>
+            </a:endParaRPr>
+          </a:p>
+          <a:p>
+            <a:pPr algn="r"/>
+            <a:r>
+              <a:rPr lang="ar-AE" sz="3600" dirty="0">
+                <a:solidFill>
+                  <a:schemeClr val="tx1">
+                    <a:lumMod val="65000"/>
+                    <a:lumOff val="35000"/>
+                  </a:schemeClr>
+                </a:solidFill>
+              </a:rPr>
+              <a:t>اِجْلَوَّذَ – يَجْلَوِّذُ - اِجْلِوَّاذًا	</a:t>
+            </a:r>
+            <a:endParaRPr lang="tr-TR" sz="3600" dirty="0">
+              <a:solidFill>
+                <a:schemeClr val="tx1">
+                  <a:lumMod val="65000"/>
+                  <a:lumOff val="35000"/>
+                </a:schemeClr>
+              </a:solidFill>
+            </a:endParaRPr>
+          </a:p>
+        </p:txBody>
+      </p:sp>
+      <p:sp>
+        <p:nvSpPr>
+          <p:cNvPr id="2" name="İkizkenar Üçgen 1">
+            <a:extLst>
+              <a:ext uri="{FF2B5EF4-FFF2-40B4-BE49-F238E27FC236}">
+                <a16:creationId xmlns:a16="http://schemas.microsoft.com/office/drawing/2014/main" id="{F761A71F-29CB-9CF0-1D02-9D53577DA23F}"/>
+              </a:ext>
+            </a:extLst>
+          </p:cNvPr>
+          <p:cNvSpPr/>
+          <p:nvPr/>
+        </p:nvSpPr>
+        <p:spPr>
+          <a:xfrm rot="18876393">
+            <a:off x="-810273" y="-176755"/>
+            <a:ext cx="2538637" cy="1259992"/>
+          </a:xfrm>
+          <a:prstGeom prst="triangle">
+            <a:avLst/>
+          </a:prstGeom>
+          <a:solidFill>
+            <a:schemeClr val="accent2">
+              <a:lumMod val="50000"/>
+            </a:schemeClr>
+          </a:solidFill>
+          <a:ln>
+            <a:solidFill>
+              <a:schemeClr val="accent2"/>
+            </a:solidFill>
+          </a:ln>
+        </p:spPr>
+        <p:style>
+          <a:lnRef idx="2">
+            <a:schemeClr val="accent1">
+              <a:shade val="15000"/>
+            </a:schemeClr>
+          </a:lnRef>
+          <a:fillRef idx="1">
+            <a:schemeClr val="accent1"/>
+          </a:fillRef>
+          <a:effectRef idx="0">
+            <a:schemeClr val="accent1"/>
+          </a:effectRef>
+          <a:fontRef idx="minor">
+            <a:schemeClr val="lt1"/>
+          </a:fontRef>
+        </p:style>
+        <p:txBody>
+          <a:bodyPr rtlCol="0" anchor="ctr"/>
+          <a:lstStyle/>
+          <a:p>
+            <a:r>
+              <a:rPr lang="tr-TR" sz="2400" b="1" dirty="0">
+                <a:solidFill>
+                  <a:schemeClr val="bg1"/>
+                </a:solidFill>
+              </a:rPr>
+              <a:t>3. NEVİ</a:t>
+            </a:r>
+          </a:p>
+        </p:txBody>
+      </p:sp>
+    </p:spTree>
+    <p:extLst>
+      <p:ext uri="{BB962C8B-B14F-4D97-AF65-F5344CB8AC3E}">
+        <p14:creationId xmlns:p14="http://schemas.microsoft.com/office/powerpoint/2010/main" val="4006609543"/>
+      </p:ext>
+    </p:extLst>
+  </p:cSld>
+  <p:clrMapOvr>
+    <a:masterClrMapping/>
+  </p:clrMapOvr>
+</p:sld>
+</file>
+
+<file path=ppt/slides/slide2.xml><?xml version="1.0" encoding="utf-8"?>
+<p:sld xmlns:a="http://schemas.openxmlformats.org/drawingml/2006/main" xmlns:r="http://schemas.openxmlformats.org/officeDocument/2006/relationships" xmlns:p="http://schemas.openxmlformats.org/presentationml/2006/main">
+  <p:cSld>
+    <p:spTree>
+      <p:nvGrpSpPr>
+        <p:cNvPr id="1" name=""/>
+        <p:cNvGrpSpPr/>
+        <p:nvPr/>
+      </p:nvGrpSpPr>
+      <p:grpSpPr>
+        <a:xfrm>
+          <a:off x="0" y="0"/>
+          <a:ext cx="0" cy="0"/>
+          <a:chOff x="0" y="0"/>
+          <a:chExt cx="0" cy="0"/>
+        </a:xfrm>
+      </p:grpSpPr>
+      <p:sp>
+        <p:nvSpPr>
+          <p:cNvPr id="4" name="Dikdörtgen: Köşeleri Yuvarlatılmış 3">
+            <a:extLst>
+              <a:ext uri="{FF2B5EF4-FFF2-40B4-BE49-F238E27FC236}">
+                <a16:creationId xmlns:a16="http://schemas.microsoft.com/office/drawing/2014/main" id="{24824917-9527-9A35-B85F-969A69D3B615}"/>
+              </a:ext>
+            </a:extLst>
+          </p:cNvPr>
+          <p:cNvSpPr/>
+          <p:nvPr/>
+        </p:nvSpPr>
+        <p:spPr>
+          <a:xfrm>
+            <a:off x="4241320" y="2523226"/>
+            <a:ext cx="3709359" cy="1811548"/>
+          </a:xfrm>
+          <a:prstGeom prst="roundRect">
+            <a:avLst/>
+          </a:prstGeom>
+          <a:scene3d>
+            <a:camera prst="orthographicFront"/>
+            <a:lightRig rig="threePt" dir="t"/>
+          </a:scene3d>
+          <a:sp3d>
+            <a:bevelT w="114300" prst="artDeco"/>
+          </a:sp3d>
+        </p:spPr>
+        <p:style>
+          <a:lnRef idx="2">
+            <a:schemeClr val="accent1">
+              <a:shade val="15000"/>
+            </a:schemeClr>
+          </a:lnRef>
+          <a:fillRef idx="1">
+            <a:schemeClr val="accent1"/>
+          </a:fillRef>
+          <a:effectRef idx="0">
+            <a:schemeClr val="accent1"/>
+          </a:effectRef>
+          <a:fontRef idx="minor">
+            <a:schemeClr val="lt1"/>
+          </a:fontRef>
+        </p:style>
+        <p:txBody>
+          <a:bodyPr rtlCol="0" anchor="ctr"/>
+          <a:lstStyle/>
+          <a:p>
+            <a:pPr algn="ctr"/>
+            <a:r>
+              <a:rPr lang="tr-TR" dirty="0"/>
               <a:t>SÜLASİ MÜCERRED 1. BAB</a:t>
             </a:r>
             <a:endParaRPr lang="ar-AE" dirty="0"/>
@@ -5524,6 +12275,621 @@
     <p:extLst>
       <p:ext uri="{BB962C8B-B14F-4D97-AF65-F5344CB8AC3E}">
         <p14:creationId xmlns:p14="http://schemas.microsoft.com/office/powerpoint/2010/main" val="1437482128"/>
+      </p:ext>
+    </p:extLst>
+  </p:cSld>
+  <p:clrMapOvr>
+    <a:masterClrMapping/>
+  </p:clrMapOvr>
+</p:sld>
+</file>
+
+<file path=ppt/slides/slide20.xml><?xml version="1.0" encoding="utf-8"?>
+<p:sld xmlns:a="http://schemas.openxmlformats.org/drawingml/2006/main" xmlns:r="http://schemas.openxmlformats.org/officeDocument/2006/relationships" xmlns:p="http://schemas.openxmlformats.org/presentationml/2006/main">
+  <p:cSld>
+    <p:spTree>
+      <p:nvGrpSpPr>
+        <p:cNvPr id="1" name=""/>
+        <p:cNvGrpSpPr/>
+        <p:nvPr/>
+      </p:nvGrpSpPr>
+      <p:grpSpPr>
+        <a:xfrm>
+          <a:off x="0" y="0"/>
+          <a:ext cx="0" cy="0"/>
+          <a:chOff x="0" y="0"/>
+          <a:chExt cx="0" cy="0"/>
+        </a:xfrm>
+      </p:grpSpPr>
+      <p:sp>
+        <p:nvSpPr>
+          <p:cNvPr id="4" name="Dikdörtgen: Köşeleri Yuvarlatılmış 3">
+            <a:extLst>
+              <a:ext uri="{FF2B5EF4-FFF2-40B4-BE49-F238E27FC236}">
+                <a16:creationId xmlns:a16="http://schemas.microsoft.com/office/drawing/2014/main" id="{24824917-9527-9A35-B85F-969A69D3B615}"/>
+              </a:ext>
+            </a:extLst>
+          </p:cNvPr>
+          <p:cNvSpPr/>
+          <p:nvPr/>
+        </p:nvSpPr>
+        <p:spPr>
+          <a:xfrm>
+            <a:off x="4241320" y="2523226"/>
+            <a:ext cx="3709359" cy="1811548"/>
+          </a:xfrm>
+          <a:prstGeom prst="roundRect">
+            <a:avLst/>
+          </a:prstGeom>
+          <a:scene3d>
+            <a:camera prst="orthographicFront"/>
+            <a:lightRig rig="threePt" dir="t"/>
+          </a:scene3d>
+          <a:sp3d>
+            <a:bevelT w="114300" prst="artDeco"/>
+          </a:sp3d>
+        </p:spPr>
+        <p:style>
+          <a:lnRef idx="2">
+            <a:schemeClr val="accent1">
+              <a:shade val="15000"/>
+            </a:schemeClr>
+          </a:lnRef>
+          <a:fillRef idx="1">
+            <a:schemeClr val="accent1"/>
+          </a:fillRef>
+          <a:effectRef idx="0">
+            <a:schemeClr val="accent1"/>
+          </a:effectRef>
+          <a:fontRef idx="minor">
+            <a:schemeClr val="lt1"/>
+          </a:fontRef>
+        </p:style>
+        <p:txBody>
+          <a:bodyPr rtlCol="0" anchor="ctr"/>
+          <a:lstStyle/>
+          <a:p>
+            <a:pPr algn="ctr"/>
+            <a:r>
+              <a:rPr lang="tr-TR" dirty="0"/>
+              <a:t>SÜLASİ MEZİD 3. NEVİ</a:t>
+            </a:r>
+          </a:p>
+          <a:p>
+            <a:pPr algn="ctr"/>
+            <a:r>
+              <a:rPr lang="tr-TR" dirty="0"/>
+              <a:t>4. BAB</a:t>
+            </a:r>
+          </a:p>
+          <a:p>
+            <a:pPr algn="ctr"/>
+            <a:r>
+              <a:rPr lang="ar-AE" sz="3200" b="1" dirty="0"/>
+              <a:t>اِفْعِيلَالْ</a:t>
+            </a:r>
+            <a:endParaRPr lang="tr-TR" sz="3200" b="1" dirty="0"/>
+          </a:p>
+        </p:txBody>
+      </p:sp>
+      <p:sp>
+        <p:nvSpPr>
+          <p:cNvPr id="5" name="Dikdörtgen: Üst Köşeleri Yuvarlatılmış 4">
+            <a:extLst>
+              <a:ext uri="{FF2B5EF4-FFF2-40B4-BE49-F238E27FC236}">
+                <a16:creationId xmlns:a16="http://schemas.microsoft.com/office/drawing/2014/main" id="{DE25C558-0A44-EE66-F7E7-E1CB66230352}"/>
+              </a:ext>
+            </a:extLst>
+          </p:cNvPr>
+          <p:cNvSpPr/>
+          <p:nvPr/>
+        </p:nvSpPr>
+        <p:spPr>
+          <a:xfrm>
+            <a:off x="4010419" y="781396"/>
+            <a:ext cx="4171160" cy="1533179"/>
+          </a:xfrm>
+          <a:prstGeom prst="round2SameRect">
+            <a:avLst>
+              <a:gd name="adj1" fmla="val 0"/>
+              <a:gd name="adj2" fmla="val 0"/>
+            </a:avLst>
+          </a:prstGeom>
+          <a:ln>
+            <a:solidFill>
+              <a:schemeClr val="tx2">
+                <a:lumMod val="50000"/>
+                <a:lumOff val="50000"/>
+              </a:schemeClr>
+            </a:solidFill>
+          </a:ln>
+          <a:effectLst>
+            <a:glow rad="63500">
+              <a:schemeClr val="accent1">
+                <a:satMod val="175000"/>
+                <a:alpha val="40000"/>
+              </a:schemeClr>
+            </a:glow>
+          </a:effectLst>
+        </p:spPr>
+        <p:style>
+          <a:lnRef idx="2">
+            <a:schemeClr val="accent1"/>
+          </a:lnRef>
+          <a:fillRef idx="1">
+            <a:schemeClr val="lt1"/>
+          </a:fillRef>
+          <a:effectRef idx="0">
+            <a:schemeClr val="accent1"/>
+          </a:effectRef>
+          <a:fontRef idx="minor">
+            <a:schemeClr val="dk1"/>
+          </a:fontRef>
+        </p:style>
+        <p:txBody>
+          <a:bodyPr lIns="216000" tIns="72000" rIns="288000" bIns="288000" rtlCol="0" anchor="t"/>
+          <a:lstStyle/>
+          <a:p>
+            <a:r>
+              <a:rPr lang="tr-TR" dirty="0">
+                <a:solidFill>
+                  <a:srgbClr val="C00000"/>
+                </a:solidFill>
+              </a:rPr>
+              <a:t>ALAMETİ: </a:t>
+            </a:r>
+            <a:r>
+              <a:rPr lang="tr-TR" dirty="0">
+                <a:solidFill>
+                  <a:schemeClr val="tx1"/>
+                </a:solidFill>
+              </a:rPr>
+              <a:t>Evveline Hemze(</a:t>
+            </a:r>
+            <a:r>
+              <a:rPr lang="ar-AE" dirty="0">
+                <a:solidFill>
+                  <a:schemeClr val="tx1"/>
+                </a:solidFill>
+              </a:rPr>
+              <a:t>ا</a:t>
+            </a:r>
+            <a:r>
+              <a:rPr lang="tr-TR" dirty="0">
+                <a:solidFill>
+                  <a:schemeClr val="tx1"/>
+                </a:solidFill>
+              </a:rPr>
+              <a:t>), </a:t>
+            </a:r>
+            <a:r>
+              <a:rPr lang="tr-TR" dirty="0" err="1">
+                <a:solidFill>
+                  <a:schemeClr val="tx1"/>
+                </a:solidFill>
+              </a:rPr>
+              <a:t>Aynel</a:t>
+            </a:r>
+            <a:r>
+              <a:rPr lang="tr-TR" dirty="0">
+                <a:solidFill>
+                  <a:schemeClr val="tx1"/>
+                </a:solidFill>
+              </a:rPr>
+              <a:t> fiili ile Lamel fiili arasına Elif(</a:t>
+            </a:r>
+            <a:r>
+              <a:rPr lang="ar-AE" dirty="0">
+                <a:solidFill>
+                  <a:schemeClr val="tx1"/>
+                </a:solidFill>
+              </a:rPr>
+              <a:t>ا</a:t>
+            </a:r>
+            <a:r>
+              <a:rPr lang="tr-TR" dirty="0">
+                <a:solidFill>
+                  <a:schemeClr val="tx1"/>
+                </a:solidFill>
+              </a:rPr>
+              <a:t>)</a:t>
+            </a:r>
+            <a:r>
+              <a:rPr lang="ar-AE" dirty="0">
+                <a:solidFill>
+                  <a:schemeClr val="tx1"/>
+                </a:solidFill>
+              </a:rPr>
+              <a:t> </a:t>
+            </a:r>
+            <a:r>
+              <a:rPr lang="tr-TR" dirty="0">
+                <a:solidFill>
+                  <a:schemeClr val="tx1"/>
+                </a:solidFill>
+              </a:rPr>
+              <a:t> ve sonuna Lamel cinsinden harfler ziyadesi ile mazisinin 6 harf üzere olmasıdır.</a:t>
+            </a:r>
+            <a:endParaRPr lang="tr-TR" dirty="0">
+              <a:solidFill>
+                <a:srgbClr val="C00000"/>
+              </a:solidFill>
+            </a:endParaRPr>
+          </a:p>
+        </p:txBody>
+      </p:sp>
+      <p:sp>
+        <p:nvSpPr>
+          <p:cNvPr id="7" name="Dikdörtgen: Üst Köşeleri Yuvarlatılmış 6">
+            <a:extLst>
+              <a:ext uri="{FF2B5EF4-FFF2-40B4-BE49-F238E27FC236}">
+                <a16:creationId xmlns:a16="http://schemas.microsoft.com/office/drawing/2014/main" id="{035ECAAF-6A44-611A-A787-ED2E34D3FDD0}"/>
+              </a:ext>
+            </a:extLst>
+          </p:cNvPr>
+          <p:cNvSpPr/>
+          <p:nvPr/>
+        </p:nvSpPr>
+        <p:spPr>
+          <a:xfrm>
+            <a:off x="240820" y="2868372"/>
+            <a:ext cx="3709359" cy="1238115"/>
+          </a:xfrm>
+          <a:prstGeom prst="round2SameRect">
+            <a:avLst>
+              <a:gd name="adj1" fmla="val 0"/>
+              <a:gd name="adj2" fmla="val 0"/>
+            </a:avLst>
+          </a:prstGeom>
+          <a:ln>
+            <a:solidFill>
+              <a:schemeClr val="tx2">
+                <a:lumMod val="50000"/>
+                <a:lumOff val="50000"/>
+              </a:schemeClr>
+            </a:solidFill>
+          </a:ln>
+          <a:effectLst>
+            <a:glow rad="63500">
+              <a:schemeClr val="accent1">
+                <a:satMod val="175000"/>
+                <a:alpha val="40000"/>
+              </a:schemeClr>
+            </a:glow>
+          </a:effectLst>
+        </p:spPr>
+        <p:style>
+          <a:lnRef idx="2">
+            <a:schemeClr val="accent1"/>
+          </a:lnRef>
+          <a:fillRef idx="1">
+            <a:schemeClr val="lt1"/>
+          </a:fillRef>
+          <a:effectRef idx="0">
+            <a:schemeClr val="accent1"/>
+          </a:effectRef>
+          <a:fontRef idx="minor">
+            <a:schemeClr val="dk1"/>
+          </a:fontRef>
+        </p:style>
+        <p:txBody>
+          <a:bodyPr lIns="216000" tIns="72000" rIns="288000" bIns="288000" rtlCol="0" anchor="t"/>
+          <a:lstStyle/>
+          <a:p>
+            <a:r>
+              <a:rPr lang="tr-TR" dirty="0">
+                <a:solidFill>
+                  <a:srgbClr val="C00000"/>
+                </a:solidFill>
+              </a:rPr>
+              <a:t>Binası: </a:t>
+            </a:r>
+            <a:r>
+              <a:rPr lang="tr-TR" dirty="0">
+                <a:solidFill>
+                  <a:schemeClr val="tx1"/>
+                </a:solidFill>
+              </a:rPr>
+              <a:t>Lazımın mübalağası içindir. Ancak bu </a:t>
+            </a:r>
+            <a:r>
+              <a:rPr lang="tr-TR" dirty="0" err="1">
+                <a:solidFill>
+                  <a:schemeClr val="tx1"/>
+                </a:solidFill>
+              </a:rPr>
+              <a:t>bab’ın</a:t>
+            </a:r>
+            <a:r>
+              <a:rPr lang="tr-TR" dirty="0">
+                <a:solidFill>
+                  <a:schemeClr val="tx1"/>
+                </a:solidFill>
+              </a:rPr>
+              <a:t> binası </a:t>
+            </a:r>
+            <a:r>
+              <a:rPr lang="ar-AE" sz="1800" b="1" dirty="0"/>
+              <a:t>اِفْعِلَالْ</a:t>
+            </a:r>
+            <a:r>
+              <a:rPr lang="tr-TR" sz="1800" b="1" dirty="0"/>
+              <a:t> </a:t>
+            </a:r>
+            <a:r>
+              <a:rPr lang="tr-TR" sz="1800" dirty="0" err="1"/>
+              <a:t>bab’ından</a:t>
+            </a:r>
+            <a:r>
+              <a:rPr lang="tr-TR" sz="1800" dirty="0"/>
+              <a:t> daha mübalağalıdır.</a:t>
+            </a:r>
+            <a:endParaRPr lang="tr-TR" dirty="0">
+              <a:solidFill>
+                <a:srgbClr val="C00000"/>
+              </a:solidFill>
+            </a:endParaRPr>
+          </a:p>
+        </p:txBody>
+      </p:sp>
+      <p:sp>
+        <p:nvSpPr>
+          <p:cNvPr id="8" name="Dikdörtgen: Üst Köşeleri Yuvarlatılmış 7">
+            <a:extLst>
+              <a:ext uri="{FF2B5EF4-FFF2-40B4-BE49-F238E27FC236}">
+                <a16:creationId xmlns:a16="http://schemas.microsoft.com/office/drawing/2014/main" id="{30BE5D54-F616-EC32-A7B3-9070EBCFD1C5}"/>
+              </a:ext>
+            </a:extLst>
+          </p:cNvPr>
+          <p:cNvSpPr/>
+          <p:nvPr/>
+        </p:nvSpPr>
+        <p:spPr>
+          <a:xfrm>
+            <a:off x="8063345" y="2868371"/>
+            <a:ext cx="3887835" cy="1121256"/>
+          </a:xfrm>
+          <a:prstGeom prst="round2SameRect">
+            <a:avLst>
+              <a:gd name="adj1" fmla="val 0"/>
+              <a:gd name="adj2" fmla="val 0"/>
+            </a:avLst>
+          </a:prstGeom>
+          <a:ln>
+            <a:solidFill>
+              <a:schemeClr val="tx2">
+                <a:lumMod val="50000"/>
+                <a:lumOff val="50000"/>
+              </a:schemeClr>
+            </a:solidFill>
+          </a:ln>
+          <a:effectLst>
+            <a:glow rad="63500">
+              <a:schemeClr val="accent1">
+                <a:satMod val="175000"/>
+                <a:alpha val="40000"/>
+              </a:schemeClr>
+            </a:glow>
+          </a:effectLst>
+        </p:spPr>
+        <p:style>
+          <a:lnRef idx="2">
+            <a:schemeClr val="accent1"/>
+          </a:lnRef>
+          <a:fillRef idx="1">
+            <a:schemeClr val="lt1"/>
+          </a:fillRef>
+          <a:effectRef idx="0">
+            <a:schemeClr val="accent1"/>
+          </a:effectRef>
+          <a:fontRef idx="minor">
+            <a:schemeClr val="dk1"/>
+          </a:fontRef>
+        </p:style>
+        <p:txBody>
+          <a:bodyPr lIns="216000" tIns="72000" rIns="288000" bIns="288000" rtlCol="0" anchor="t"/>
+          <a:lstStyle/>
+          <a:p>
+            <a:r>
+              <a:rPr lang="tr-TR" dirty="0">
+                <a:solidFill>
+                  <a:srgbClr val="C00000"/>
+                </a:solidFill>
+              </a:rPr>
+              <a:t>Vezni:</a:t>
+            </a:r>
+            <a:endParaRPr lang="ar-AE" dirty="0">
+              <a:solidFill>
+                <a:srgbClr val="C00000"/>
+              </a:solidFill>
+            </a:endParaRPr>
+          </a:p>
+          <a:p>
+            <a:pPr algn="r"/>
+            <a:r>
+              <a:rPr lang="ar-AE" sz="3600" dirty="0">
+                <a:solidFill>
+                  <a:schemeClr val="tx1">
+                    <a:lumMod val="65000"/>
+                    <a:lumOff val="35000"/>
+                  </a:schemeClr>
+                </a:solidFill>
+              </a:rPr>
+              <a:t>اِفْعَالَّ – يُفْعَالُّ - اِفْعِيلَالًا	</a:t>
+            </a:r>
+            <a:endParaRPr lang="tr-TR" sz="3600" dirty="0">
+              <a:solidFill>
+                <a:schemeClr val="tx1">
+                  <a:lumMod val="65000"/>
+                  <a:lumOff val="35000"/>
+                </a:schemeClr>
+              </a:solidFill>
+            </a:endParaRPr>
+          </a:p>
+        </p:txBody>
+      </p:sp>
+      <p:sp>
+        <p:nvSpPr>
+          <p:cNvPr id="9" name="Dikdörtgen: Üst Köşeleri Yuvarlatılmış 8">
+            <a:extLst>
+              <a:ext uri="{FF2B5EF4-FFF2-40B4-BE49-F238E27FC236}">
+                <a16:creationId xmlns:a16="http://schemas.microsoft.com/office/drawing/2014/main" id="{8960AD68-9065-3C5A-2910-54AD292D8F34}"/>
+              </a:ext>
+            </a:extLst>
+          </p:cNvPr>
+          <p:cNvSpPr/>
+          <p:nvPr/>
+        </p:nvSpPr>
+        <p:spPr>
+          <a:xfrm>
+            <a:off x="3890812" y="4498039"/>
+            <a:ext cx="4410374" cy="1121256"/>
+          </a:xfrm>
+          <a:prstGeom prst="round2SameRect">
+            <a:avLst>
+              <a:gd name="adj1" fmla="val 0"/>
+              <a:gd name="adj2" fmla="val 0"/>
+            </a:avLst>
+          </a:prstGeom>
+          <a:ln>
+            <a:solidFill>
+              <a:schemeClr val="tx2">
+                <a:lumMod val="50000"/>
+                <a:lumOff val="50000"/>
+              </a:schemeClr>
+            </a:solidFill>
+          </a:ln>
+          <a:effectLst>
+            <a:glow rad="63500">
+              <a:schemeClr val="accent1">
+                <a:satMod val="175000"/>
+                <a:alpha val="40000"/>
+              </a:schemeClr>
+            </a:glow>
+          </a:effectLst>
+        </p:spPr>
+        <p:style>
+          <a:lnRef idx="2">
+            <a:schemeClr val="accent1"/>
+          </a:lnRef>
+          <a:fillRef idx="1">
+            <a:schemeClr val="lt1"/>
+          </a:fillRef>
+          <a:effectRef idx="0">
+            <a:schemeClr val="accent1"/>
+          </a:effectRef>
+          <a:fontRef idx="minor">
+            <a:schemeClr val="dk1"/>
+          </a:fontRef>
+        </p:style>
+        <p:txBody>
+          <a:bodyPr lIns="216000" tIns="72000" rIns="288000" bIns="288000" rtlCol="0" anchor="t"/>
+          <a:lstStyle/>
+          <a:p>
+            <a:r>
+              <a:rPr lang="tr-TR" dirty="0">
+                <a:solidFill>
+                  <a:srgbClr val="C00000"/>
+                </a:solidFill>
+              </a:rPr>
+              <a:t>Mevzun:</a:t>
+            </a:r>
+            <a:endParaRPr lang="ar-AE" dirty="0">
+              <a:solidFill>
+                <a:srgbClr val="C00000"/>
+              </a:solidFill>
+            </a:endParaRPr>
+          </a:p>
+          <a:p>
+            <a:pPr algn="r"/>
+            <a:r>
+              <a:rPr lang="ar-AE" sz="3600" dirty="0">
+                <a:solidFill>
+                  <a:schemeClr val="tx1">
+                    <a:lumMod val="65000"/>
+                    <a:lumOff val="35000"/>
+                  </a:schemeClr>
+                </a:solidFill>
+              </a:rPr>
+              <a:t>اِحْمَارَّ – يَحْمَارُّ - اِحْمِيرَارًا	</a:t>
+            </a:r>
+            <a:endParaRPr lang="tr-TR" sz="3600" dirty="0">
+              <a:solidFill>
+                <a:schemeClr val="tx1">
+                  <a:lumMod val="65000"/>
+                  <a:lumOff val="35000"/>
+                </a:schemeClr>
+              </a:solidFill>
+            </a:endParaRPr>
+          </a:p>
+        </p:txBody>
+      </p:sp>
+      <p:sp>
+        <p:nvSpPr>
+          <p:cNvPr id="2" name="İkizkenar Üçgen 1">
+            <a:extLst>
+              <a:ext uri="{FF2B5EF4-FFF2-40B4-BE49-F238E27FC236}">
+                <a16:creationId xmlns:a16="http://schemas.microsoft.com/office/drawing/2014/main" id="{F761A71F-29CB-9CF0-1D02-9D53577DA23F}"/>
+              </a:ext>
+            </a:extLst>
+          </p:cNvPr>
+          <p:cNvSpPr/>
+          <p:nvPr/>
+        </p:nvSpPr>
+        <p:spPr>
+          <a:xfrm rot="18876393">
+            <a:off x="-810273" y="-176755"/>
+            <a:ext cx="2538637" cy="1259992"/>
+          </a:xfrm>
+          <a:prstGeom prst="triangle">
+            <a:avLst/>
+          </a:prstGeom>
+          <a:solidFill>
+            <a:schemeClr val="accent2">
+              <a:lumMod val="50000"/>
+            </a:schemeClr>
+          </a:solidFill>
+          <a:ln>
+            <a:solidFill>
+              <a:schemeClr val="accent2"/>
+            </a:solidFill>
+          </a:ln>
+        </p:spPr>
+        <p:style>
+          <a:lnRef idx="2">
+            <a:schemeClr val="accent1">
+              <a:shade val="15000"/>
+            </a:schemeClr>
+          </a:lnRef>
+          <a:fillRef idx="1">
+            <a:schemeClr val="accent1"/>
+          </a:fillRef>
+          <a:effectRef idx="0">
+            <a:schemeClr val="accent1"/>
+          </a:effectRef>
+          <a:fontRef idx="minor">
+            <a:schemeClr val="lt1"/>
+          </a:fontRef>
+        </p:style>
+        <p:txBody>
+          <a:bodyPr rtlCol="0" anchor="ctr"/>
+          <a:lstStyle/>
+          <a:p>
+            <a:r>
+              <a:rPr lang="tr-TR" sz="2400" b="1" dirty="0">
+                <a:solidFill>
+                  <a:schemeClr val="bg1"/>
+                </a:solidFill>
+              </a:rPr>
+              <a:t>3. NEVİ</a:t>
+            </a:r>
+          </a:p>
+        </p:txBody>
+      </p:sp>
+    </p:spTree>
+    <p:extLst>
+      <p:ext uri="{BB962C8B-B14F-4D97-AF65-F5344CB8AC3E}">
+        <p14:creationId xmlns:p14="http://schemas.microsoft.com/office/powerpoint/2010/main" val="975404287"/>
       </p:ext>
     </p:extLst>
   </p:cSld>
@@ -8423,6 +15789,10 @@
           <a:lstStyle/>
           <a:p>
             <a:pPr algn="ctr"/>
+            <a:r>
+              <a:rPr lang="ar-AE" dirty="0"/>
+              <a:t>ْ</a:t>
+            </a:r>
             <a:endParaRPr lang="tr-TR" dirty="0"/>
           </a:p>
         </p:txBody>
@@ -9249,10 +16619,855 @@
           </a:p>
         </p:txBody>
       </p:sp>
+      <p:sp>
+        <p:nvSpPr>
+          <p:cNvPr id="2" name="Dikdörtgen: Köşeleri Yuvarlatılmış 1">
+            <a:extLst>
+              <a:ext uri="{FF2B5EF4-FFF2-40B4-BE49-F238E27FC236}">
+                <a16:creationId xmlns:a16="http://schemas.microsoft.com/office/drawing/2014/main" id="{3B295E69-6286-6485-1F65-DC910A5E7DBA}"/>
+              </a:ext>
+            </a:extLst>
+          </p:cNvPr>
+          <p:cNvSpPr/>
+          <p:nvPr/>
+        </p:nvSpPr>
+        <p:spPr>
+          <a:xfrm>
+            <a:off x="9348789" y="2987165"/>
+            <a:ext cx="1366838" cy="508958"/>
+          </a:xfrm>
+          <a:prstGeom prst="roundRect">
+            <a:avLst/>
+          </a:prstGeom>
+          <a:solidFill>
+            <a:schemeClr val="accent3">
+              <a:lumMod val="75000"/>
+            </a:schemeClr>
+          </a:solidFill>
+          <a:ln w="3175">
+            <a:solidFill>
+              <a:schemeClr val="bg2">
+                <a:lumMod val="90000"/>
+              </a:schemeClr>
+            </a:solidFill>
+          </a:ln>
+          <a:effectLst>
+            <a:outerShdw blurRad="50800" dist="38100" dir="18900000" algn="bl" rotWithShape="0">
+              <a:prstClr val="black">
+                <a:alpha val="40000"/>
+              </a:prstClr>
+            </a:outerShdw>
+          </a:effectLst>
+          <a:scene3d>
+            <a:camera prst="orthographicFront"/>
+            <a:lightRig rig="threePt" dir="t"/>
+          </a:scene3d>
+          <a:sp3d>
+            <a:bevelT/>
+          </a:sp3d>
+        </p:spPr>
+        <p:style>
+          <a:lnRef idx="2">
+            <a:schemeClr val="accent1">
+              <a:shade val="15000"/>
+            </a:schemeClr>
+          </a:lnRef>
+          <a:fillRef idx="1">
+            <a:schemeClr val="accent1"/>
+          </a:fillRef>
+          <a:effectRef idx="0">
+            <a:schemeClr val="accent1"/>
+          </a:effectRef>
+          <a:fontRef idx="minor">
+            <a:schemeClr val="lt1"/>
+          </a:fontRef>
+        </p:style>
+        <p:txBody>
+          <a:bodyPr rtlCol="0" anchor="ctr"/>
+          <a:lstStyle/>
+          <a:p>
+            <a:pPr algn="ctr"/>
+            <a:r>
+              <a:rPr lang="ar-AE" sz="2400" dirty="0"/>
+              <a:t>اِفْعِيعَالْ</a:t>
+            </a:r>
+            <a:endParaRPr lang="tr-TR" sz="2400" dirty="0"/>
+          </a:p>
+        </p:txBody>
+      </p:sp>
+      <p:sp>
+        <p:nvSpPr>
+          <p:cNvPr id="3" name="Dikdörtgen: Köşeleri Yuvarlatılmış 2">
+            <a:extLst>
+              <a:ext uri="{FF2B5EF4-FFF2-40B4-BE49-F238E27FC236}">
+                <a16:creationId xmlns:a16="http://schemas.microsoft.com/office/drawing/2014/main" id="{020B9EB4-B12B-15D2-2CDE-2C26A576A8A8}"/>
+              </a:ext>
+            </a:extLst>
+          </p:cNvPr>
+          <p:cNvSpPr/>
+          <p:nvPr/>
+        </p:nvSpPr>
+        <p:spPr>
+          <a:xfrm>
+            <a:off x="9348789" y="3751456"/>
+            <a:ext cx="1366838" cy="508958"/>
+          </a:xfrm>
+          <a:prstGeom prst="roundRect">
+            <a:avLst>
+              <a:gd name="adj" fmla="val 20410"/>
+            </a:avLst>
+          </a:prstGeom>
+          <a:solidFill>
+            <a:schemeClr val="accent3">
+              <a:lumMod val="75000"/>
+            </a:schemeClr>
+          </a:solidFill>
+          <a:ln w="3175">
+            <a:solidFill>
+              <a:schemeClr val="bg2">
+                <a:lumMod val="90000"/>
+              </a:schemeClr>
+            </a:solidFill>
+          </a:ln>
+          <a:effectLst>
+            <a:outerShdw blurRad="50800" dist="38100" dir="18900000" algn="bl" rotWithShape="0">
+              <a:prstClr val="black">
+                <a:alpha val="40000"/>
+              </a:prstClr>
+            </a:outerShdw>
+          </a:effectLst>
+          <a:scene3d>
+            <a:camera prst="orthographicFront"/>
+            <a:lightRig rig="threePt" dir="t"/>
+          </a:scene3d>
+          <a:sp3d>
+            <a:bevelT/>
+          </a:sp3d>
+        </p:spPr>
+        <p:style>
+          <a:lnRef idx="2">
+            <a:schemeClr val="accent1">
+              <a:shade val="15000"/>
+            </a:schemeClr>
+          </a:lnRef>
+          <a:fillRef idx="1">
+            <a:schemeClr val="accent1"/>
+          </a:fillRef>
+          <a:effectRef idx="0">
+            <a:schemeClr val="accent1"/>
+          </a:effectRef>
+          <a:fontRef idx="minor">
+            <a:schemeClr val="lt1"/>
+          </a:fontRef>
+        </p:style>
+        <p:txBody>
+          <a:bodyPr rtlCol="0" anchor="ctr"/>
+          <a:lstStyle/>
+          <a:p>
+            <a:pPr algn="ctr"/>
+            <a:r>
+              <a:rPr lang="ar-AE" sz="2400" dirty="0"/>
+              <a:t>اِفْعِوَّالْ</a:t>
+            </a:r>
+            <a:endParaRPr lang="tr-TR" sz="2400" dirty="0"/>
+          </a:p>
+        </p:txBody>
+      </p:sp>
+      <p:sp>
+        <p:nvSpPr>
+          <p:cNvPr id="4" name="Dikdörtgen: Köşeleri Yuvarlatılmış 3">
+            <a:extLst>
+              <a:ext uri="{FF2B5EF4-FFF2-40B4-BE49-F238E27FC236}">
+                <a16:creationId xmlns:a16="http://schemas.microsoft.com/office/drawing/2014/main" id="{A9D5BA4E-799C-9C1F-2433-093781773619}"/>
+              </a:ext>
+            </a:extLst>
+          </p:cNvPr>
+          <p:cNvSpPr/>
+          <p:nvPr/>
+        </p:nvSpPr>
+        <p:spPr>
+          <a:xfrm>
+            <a:off x="9348789" y="2222874"/>
+            <a:ext cx="1366838" cy="508958"/>
+          </a:xfrm>
+          <a:prstGeom prst="roundRect">
+            <a:avLst/>
+          </a:prstGeom>
+          <a:solidFill>
+            <a:schemeClr val="accent3">
+              <a:lumMod val="75000"/>
+            </a:schemeClr>
+          </a:solidFill>
+          <a:ln w="3175">
+            <a:solidFill>
+              <a:schemeClr val="bg2">
+                <a:lumMod val="90000"/>
+              </a:schemeClr>
+            </a:solidFill>
+          </a:ln>
+          <a:effectLst>
+            <a:outerShdw blurRad="50800" dist="38100" dir="18900000" algn="bl" rotWithShape="0">
+              <a:prstClr val="black">
+                <a:alpha val="40000"/>
+              </a:prstClr>
+            </a:outerShdw>
+          </a:effectLst>
+          <a:scene3d>
+            <a:camera prst="orthographicFront"/>
+            <a:lightRig rig="threePt" dir="t"/>
+          </a:scene3d>
+          <a:sp3d>
+            <a:bevelT/>
+          </a:sp3d>
+        </p:spPr>
+        <p:style>
+          <a:lnRef idx="2">
+            <a:schemeClr val="accent1">
+              <a:shade val="15000"/>
+            </a:schemeClr>
+          </a:lnRef>
+          <a:fillRef idx="1">
+            <a:schemeClr val="accent1"/>
+          </a:fillRef>
+          <a:effectRef idx="0">
+            <a:schemeClr val="accent1"/>
+          </a:effectRef>
+          <a:fontRef idx="minor">
+            <a:schemeClr val="lt1"/>
+          </a:fontRef>
+        </p:style>
+        <p:txBody>
+          <a:bodyPr rtlCol="0" anchor="ctr"/>
+          <a:lstStyle/>
+          <a:p>
+            <a:pPr algn="ctr"/>
+            <a:r>
+              <a:rPr lang="ar-AE" sz="2400" dirty="0"/>
+              <a:t>اِسْتِفْعَالْ</a:t>
+            </a:r>
+            <a:endParaRPr lang="tr-TR" sz="2400" dirty="0"/>
+          </a:p>
+        </p:txBody>
+      </p:sp>
+      <p:sp>
+        <p:nvSpPr>
+          <p:cNvPr id="8" name="Dikdörtgen: Köşeleri Yuvarlatılmış 7">
+            <a:extLst>
+              <a:ext uri="{FF2B5EF4-FFF2-40B4-BE49-F238E27FC236}">
+                <a16:creationId xmlns:a16="http://schemas.microsoft.com/office/drawing/2014/main" id="{F1445398-DE76-9901-EBD8-78A2074808A7}"/>
+              </a:ext>
+            </a:extLst>
+          </p:cNvPr>
+          <p:cNvSpPr/>
+          <p:nvPr/>
+        </p:nvSpPr>
+        <p:spPr>
+          <a:xfrm>
+            <a:off x="9348789" y="4515747"/>
+            <a:ext cx="1366838" cy="508958"/>
+          </a:xfrm>
+          <a:prstGeom prst="roundRect">
+            <a:avLst/>
+          </a:prstGeom>
+          <a:solidFill>
+            <a:schemeClr val="accent3">
+              <a:lumMod val="75000"/>
+            </a:schemeClr>
+          </a:solidFill>
+          <a:ln w="3175">
+            <a:solidFill>
+              <a:schemeClr val="bg2">
+                <a:lumMod val="90000"/>
+              </a:schemeClr>
+            </a:solidFill>
+          </a:ln>
+          <a:effectLst>
+            <a:outerShdw blurRad="50800" dist="38100" dir="18900000" algn="bl" rotWithShape="0">
+              <a:prstClr val="black">
+                <a:alpha val="40000"/>
+              </a:prstClr>
+            </a:outerShdw>
+          </a:effectLst>
+          <a:scene3d>
+            <a:camera prst="orthographicFront"/>
+            <a:lightRig rig="threePt" dir="t"/>
+          </a:scene3d>
+          <a:sp3d>
+            <a:bevelT/>
+          </a:sp3d>
+        </p:spPr>
+        <p:style>
+          <a:lnRef idx="2">
+            <a:schemeClr val="accent1">
+              <a:shade val="15000"/>
+            </a:schemeClr>
+          </a:lnRef>
+          <a:fillRef idx="1">
+            <a:schemeClr val="accent1"/>
+          </a:fillRef>
+          <a:effectRef idx="0">
+            <a:schemeClr val="accent1"/>
+          </a:effectRef>
+          <a:fontRef idx="minor">
+            <a:schemeClr val="lt1"/>
+          </a:fontRef>
+        </p:style>
+        <p:txBody>
+          <a:bodyPr rtlCol="0" anchor="ctr"/>
+          <a:lstStyle/>
+          <a:p>
+            <a:pPr algn="ctr"/>
+            <a:r>
+              <a:rPr lang="ar-AE" sz="2400" dirty="0"/>
+              <a:t>اِفْعِيلَالْ</a:t>
+            </a:r>
+            <a:endParaRPr lang="tr-TR" sz="2400" dirty="0"/>
+          </a:p>
+        </p:txBody>
+      </p:sp>
     </p:spTree>
     <p:extLst>
       <p:ext uri="{BB962C8B-B14F-4D97-AF65-F5344CB8AC3E}">
         <p14:creationId xmlns:p14="http://schemas.microsoft.com/office/powerpoint/2010/main" val="2392851602"/>
+      </p:ext>
+    </p:extLst>
+  </p:cSld>
+  <p:clrMapOvr>
+    <a:masterClrMapping/>
+  </p:clrMapOvr>
+</p:sld>
+</file>
+
+<file path=ppt/slides/slide9.xml><?xml version="1.0" encoding="utf-8"?>
+<p:sld xmlns:a="http://schemas.openxmlformats.org/drawingml/2006/main" xmlns:r="http://schemas.openxmlformats.org/officeDocument/2006/relationships" xmlns:p="http://schemas.openxmlformats.org/presentationml/2006/main">
+  <p:cSld>
+    <p:spTree>
+      <p:nvGrpSpPr>
+        <p:cNvPr id="1" name=""/>
+        <p:cNvGrpSpPr/>
+        <p:nvPr/>
+      </p:nvGrpSpPr>
+      <p:grpSpPr>
+        <a:xfrm>
+          <a:off x="0" y="0"/>
+          <a:ext cx="0" cy="0"/>
+          <a:chOff x="0" y="0"/>
+          <a:chExt cx="0" cy="0"/>
+        </a:xfrm>
+      </p:grpSpPr>
+      <p:sp>
+        <p:nvSpPr>
+          <p:cNvPr id="4" name="Dikdörtgen: Köşeleri Yuvarlatılmış 3">
+            <a:extLst>
+              <a:ext uri="{FF2B5EF4-FFF2-40B4-BE49-F238E27FC236}">
+                <a16:creationId xmlns:a16="http://schemas.microsoft.com/office/drawing/2014/main" id="{24824917-9527-9A35-B85F-969A69D3B615}"/>
+              </a:ext>
+            </a:extLst>
+          </p:cNvPr>
+          <p:cNvSpPr/>
+          <p:nvPr/>
+        </p:nvSpPr>
+        <p:spPr>
+          <a:xfrm>
+            <a:off x="4241320" y="2523226"/>
+            <a:ext cx="3709359" cy="1811548"/>
+          </a:xfrm>
+          <a:prstGeom prst="roundRect">
+            <a:avLst/>
+          </a:prstGeom>
+          <a:scene3d>
+            <a:camera prst="orthographicFront"/>
+            <a:lightRig rig="threePt" dir="t"/>
+          </a:scene3d>
+          <a:sp3d>
+            <a:bevelT w="114300" prst="artDeco"/>
+          </a:sp3d>
+        </p:spPr>
+        <p:style>
+          <a:lnRef idx="2">
+            <a:schemeClr val="accent1">
+              <a:shade val="15000"/>
+            </a:schemeClr>
+          </a:lnRef>
+          <a:fillRef idx="1">
+            <a:schemeClr val="accent1"/>
+          </a:fillRef>
+          <a:effectRef idx="0">
+            <a:schemeClr val="accent1"/>
+          </a:effectRef>
+          <a:fontRef idx="minor">
+            <a:schemeClr val="lt1"/>
+          </a:fontRef>
+        </p:style>
+        <p:txBody>
+          <a:bodyPr rtlCol="0" anchor="ctr"/>
+          <a:lstStyle/>
+          <a:p>
+            <a:pPr algn="ctr"/>
+            <a:r>
+              <a:rPr lang="tr-TR" dirty="0"/>
+              <a:t>SÜLASİ MEZİD 1. NEVİ</a:t>
+            </a:r>
+          </a:p>
+          <a:p>
+            <a:pPr algn="ctr"/>
+            <a:r>
+              <a:rPr lang="tr-TR" dirty="0"/>
+              <a:t>1. BAB</a:t>
+            </a:r>
+          </a:p>
+          <a:p>
+            <a:pPr algn="ctr"/>
+            <a:r>
+              <a:rPr lang="ar-AE" sz="3200" b="1" dirty="0"/>
+              <a:t>اِفْعَل</a:t>
+            </a:r>
+            <a:endParaRPr lang="tr-TR" sz="3200" b="1" dirty="0"/>
+          </a:p>
+        </p:txBody>
+      </p:sp>
+      <p:sp>
+        <p:nvSpPr>
+          <p:cNvPr id="5" name="Dikdörtgen: Üst Köşeleri Yuvarlatılmış 4">
+            <a:extLst>
+              <a:ext uri="{FF2B5EF4-FFF2-40B4-BE49-F238E27FC236}">
+                <a16:creationId xmlns:a16="http://schemas.microsoft.com/office/drawing/2014/main" id="{DE25C558-0A44-EE66-F7E7-E1CB66230352}"/>
+              </a:ext>
+            </a:extLst>
+          </p:cNvPr>
+          <p:cNvSpPr/>
+          <p:nvPr/>
+        </p:nvSpPr>
+        <p:spPr>
+          <a:xfrm>
+            <a:off x="4241320" y="1193319"/>
+            <a:ext cx="3709359" cy="1121255"/>
+          </a:xfrm>
+          <a:prstGeom prst="round2SameRect">
+            <a:avLst>
+              <a:gd name="adj1" fmla="val 0"/>
+              <a:gd name="adj2" fmla="val 0"/>
+            </a:avLst>
+          </a:prstGeom>
+          <a:ln>
+            <a:solidFill>
+              <a:schemeClr val="tx2">
+                <a:lumMod val="50000"/>
+                <a:lumOff val="50000"/>
+              </a:schemeClr>
+            </a:solidFill>
+          </a:ln>
+          <a:effectLst>
+            <a:glow rad="63500">
+              <a:schemeClr val="accent1">
+                <a:satMod val="175000"/>
+                <a:alpha val="40000"/>
+              </a:schemeClr>
+            </a:glow>
+          </a:effectLst>
+        </p:spPr>
+        <p:style>
+          <a:lnRef idx="2">
+            <a:schemeClr val="accent1"/>
+          </a:lnRef>
+          <a:fillRef idx="1">
+            <a:schemeClr val="lt1"/>
+          </a:fillRef>
+          <a:effectRef idx="0">
+            <a:schemeClr val="accent1"/>
+          </a:effectRef>
+          <a:fontRef idx="minor">
+            <a:schemeClr val="dk1"/>
+          </a:fontRef>
+        </p:style>
+        <p:txBody>
+          <a:bodyPr lIns="216000" tIns="72000" rIns="288000" bIns="288000" rtlCol="0" anchor="t"/>
+          <a:lstStyle/>
+          <a:p>
+            <a:r>
+              <a:rPr lang="tr-TR" dirty="0">
+                <a:solidFill>
+                  <a:srgbClr val="C00000"/>
+                </a:solidFill>
+              </a:rPr>
+              <a:t>ALAMETİ: </a:t>
+            </a:r>
+            <a:r>
+              <a:rPr lang="tr-TR" dirty="0">
+                <a:solidFill>
+                  <a:schemeClr val="tx1"/>
+                </a:solidFill>
+              </a:rPr>
+              <a:t>Evveline hemze ziyadesi ile mazisinin 4 harf üzere olmasıdır.</a:t>
+            </a:r>
+            <a:endParaRPr lang="tr-TR" dirty="0">
+              <a:solidFill>
+                <a:srgbClr val="C00000"/>
+              </a:solidFill>
+            </a:endParaRPr>
+          </a:p>
+        </p:txBody>
+      </p:sp>
+      <p:sp>
+        <p:nvSpPr>
+          <p:cNvPr id="7" name="Dikdörtgen: Üst Köşeleri Yuvarlatılmış 6">
+            <a:extLst>
+              <a:ext uri="{FF2B5EF4-FFF2-40B4-BE49-F238E27FC236}">
+                <a16:creationId xmlns:a16="http://schemas.microsoft.com/office/drawing/2014/main" id="{035ECAAF-6A44-611A-A787-ED2E34D3FDD0}"/>
+              </a:ext>
+            </a:extLst>
+          </p:cNvPr>
+          <p:cNvSpPr/>
+          <p:nvPr/>
+        </p:nvSpPr>
+        <p:spPr>
+          <a:xfrm>
+            <a:off x="240820" y="2868372"/>
+            <a:ext cx="3709359" cy="1121255"/>
+          </a:xfrm>
+          <a:prstGeom prst="round2SameRect">
+            <a:avLst>
+              <a:gd name="adj1" fmla="val 0"/>
+              <a:gd name="adj2" fmla="val 0"/>
+            </a:avLst>
+          </a:prstGeom>
+          <a:ln>
+            <a:solidFill>
+              <a:schemeClr val="tx2">
+                <a:lumMod val="50000"/>
+                <a:lumOff val="50000"/>
+              </a:schemeClr>
+            </a:solidFill>
+          </a:ln>
+          <a:effectLst>
+            <a:glow rad="63500">
+              <a:schemeClr val="accent1">
+                <a:satMod val="175000"/>
+                <a:alpha val="40000"/>
+              </a:schemeClr>
+            </a:glow>
+          </a:effectLst>
+        </p:spPr>
+        <p:style>
+          <a:lnRef idx="2">
+            <a:schemeClr val="accent1"/>
+          </a:lnRef>
+          <a:fillRef idx="1">
+            <a:schemeClr val="lt1"/>
+          </a:fillRef>
+          <a:effectRef idx="0">
+            <a:schemeClr val="accent1"/>
+          </a:effectRef>
+          <a:fontRef idx="minor">
+            <a:schemeClr val="dk1"/>
+          </a:fontRef>
+        </p:style>
+        <p:txBody>
+          <a:bodyPr lIns="216000" tIns="72000" rIns="288000" bIns="288000" rtlCol="0" anchor="t"/>
+          <a:lstStyle/>
+          <a:p>
+            <a:r>
+              <a:rPr lang="tr-TR" dirty="0">
+                <a:solidFill>
+                  <a:srgbClr val="C00000"/>
+                </a:solidFill>
+              </a:rPr>
+              <a:t>Binası: </a:t>
+            </a:r>
+            <a:r>
+              <a:rPr lang="tr-TR" dirty="0">
+                <a:solidFill>
+                  <a:schemeClr val="tx1"/>
+                </a:solidFill>
+              </a:rPr>
+              <a:t>Çoğu Kere  </a:t>
+            </a:r>
+            <a:r>
+              <a:rPr lang="tr-TR" dirty="0" err="1">
+                <a:solidFill>
+                  <a:schemeClr val="tx1"/>
+                </a:solidFill>
+              </a:rPr>
+              <a:t>Müteaddi</a:t>
+            </a:r>
+            <a:r>
+              <a:rPr lang="tr-TR" dirty="0">
+                <a:solidFill>
+                  <a:schemeClr val="tx1"/>
+                </a:solidFill>
+              </a:rPr>
+              <a:t>, Bazen Lazım içindir.</a:t>
+            </a:r>
+            <a:endParaRPr lang="tr-TR" dirty="0">
+              <a:solidFill>
+                <a:srgbClr val="C00000"/>
+              </a:solidFill>
+            </a:endParaRPr>
+          </a:p>
+        </p:txBody>
+      </p:sp>
+      <p:sp>
+        <p:nvSpPr>
+          <p:cNvPr id="8" name="Dikdörtgen: Üst Köşeleri Yuvarlatılmış 7">
+            <a:extLst>
+              <a:ext uri="{FF2B5EF4-FFF2-40B4-BE49-F238E27FC236}">
+                <a16:creationId xmlns:a16="http://schemas.microsoft.com/office/drawing/2014/main" id="{30BE5D54-F616-EC32-A7B3-9070EBCFD1C5}"/>
+              </a:ext>
+            </a:extLst>
+          </p:cNvPr>
+          <p:cNvSpPr/>
+          <p:nvPr/>
+        </p:nvSpPr>
+        <p:spPr>
+          <a:xfrm>
+            <a:off x="8241821" y="2868371"/>
+            <a:ext cx="3709359" cy="1121256"/>
+          </a:xfrm>
+          <a:prstGeom prst="round2SameRect">
+            <a:avLst>
+              <a:gd name="adj1" fmla="val 0"/>
+              <a:gd name="adj2" fmla="val 0"/>
+            </a:avLst>
+          </a:prstGeom>
+          <a:ln>
+            <a:solidFill>
+              <a:schemeClr val="tx2">
+                <a:lumMod val="50000"/>
+                <a:lumOff val="50000"/>
+              </a:schemeClr>
+            </a:solidFill>
+          </a:ln>
+          <a:effectLst>
+            <a:glow rad="63500">
+              <a:schemeClr val="accent1">
+                <a:satMod val="175000"/>
+                <a:alpha val="40000"/>
+              </a:schemeClr>
+            </a:glow>
+          </a:effectLst>
+        </p:spPr>
+        <p:style>
+          <a:lnRef idx="2">
+            <a:schemeClr val="accent1"/>
+          </a:lnRef>
+          <a:fillRef idx="1">
+            <a:schemeClr val="lt1"/>
+          </a:fillRef>
+          <a:effectRef idx="0">
+            <a:schemeClr val="accent1"/>
+          </a:effectRef>
+          <a:fontRef idx="minor">
+            <a:schemeClr val="dk1"/>
+          </a:fontRef>
+        </p:style>
+        <p:txBody>
+          <a:bodyPr lIns="216000" tIns="72000" rIns="288000" bIns="288000" rtlCol="0" anchor="t"/>
+          <a:lstStyle/>
+          <a:p>
+            <a:r>
+              <a:rPr lang="tr-TR" dirty="0">
+                <a:solidFill>
+                  <a:srgbClr val="C00000"/>
+                </a:solidFill>
+              </a:rPr>
+              <a:t>Vezni:</a:t>
+            </a:r>
+            <a:endParaRPr lang="ar-AE" dirty="0">
+              <a:solidFill>
+                <a:srgbClr val="C00000"/>
+              </a:solidFill>
+            </a:endParaRPr>
+          </a:p>
+          <a:p>
+            <a:pPr algn="r"/>
+            <a:r>
+              <a:rPr lang="ar-AE" sz="3600" dirty="0">
+                <a:solidFill>
+                  <a:schemeClr val="tx1">
+                    <a:lumMod val="65000"/>
+                    <a:lumOff val="35000"/>
+                  </a:schemeClr>
+                </a:solidFill>
+              </a:rPr>
+              <a:t>اِفْعَلَ – يُفْعِلُ - اِفْعَالًا	</a:t>
+            </a:r>
+            <a:endParaRPr lang="tr-TR" sz="3600" dirty="0">
+              <a:solidFill>
+                <a:schemeClr val="tx1">
+                  <a:lumMod val="65000"/>
+                  <a:lumOff val="35000"/>
+                </a:schemeClr>
+              </a:solidFill>
+            </a:endParaRPr>
+          </a:p>
+        </p:txBody>
+      </p:sp>
+      <p:sp>
+        <p:nvSpPr>
+          <p:cNvPr id="9" name="Dikdörtgen: Üst Köşeleri Yuvarlatılmış 8">
+            <a:extLst>
+              <a:ext uri="{FF2B5EF4-FFF2-40B4-BE49-F238E27FC236}">
+                <a16:creationId xmlns:a16="http://schemas.microsoft.com/office/drawing/2014/main" id="{8960AD68-9065-3C5A-2910-54AD292D8F34}"/>
+              </a:ext>
+            </a:extLst>
+          </p:cNvPr>
+          <p:cNvSpPr/>
+          <p:nvPr/>
+        </p:nvSpPr>
+        <p:spPr>
+          <a:xfrm>
+            <a:off x="4241320" y="4543425"/>
+            <a:ext cx="3822025" cy="1121256"/>
+          </a:xfrm>
+          <a:prstGeom prst="round2SameRect">
+            <a:avLst>
+              <a:gd name="adj1" fmla="val 0"/>
+              <a:gd name="adj2" fmla="val 0"/>
+            </a:avLst>
+          </a:prstGeom>
+          <a:ln>
+            <a:solidFill>
+              <a:schemeClr val="tx2">
+                <a:lumMod val="50000"/>
+                <a:lumOff val="50000"/>
+              </a:schemeClr>
+            </a:solidFill>
+          </a:ln>
+          <a:effectLst>
+            <a:glow rad="63500">
+              <a:schemeClr val="accent1">
+                <a:satMod val="175000"/>
+                <a:alpha val="40000"/>
+              </a:schemeClr>
+            </a:glow>
+          </a:effectLst>
+        </p:spPr>
+        <p:style>
+          <a:lnRef idx="2">
+            <a:schemeClr val="accent1"/>
+          </a:lnRef>
+          <a:fillRef idx="1">
+            <a:schemeClr val="lt1"/>
+          </a:fillRef>
+          <a:effectRef idx="0">
+            <a:schemeClr val="accent1"/>
+          </a:effectRef>
+          <a:fontRef idx="minor">
+            <a:schemeClr val="dk1"/>
+          </a:fontRef>
+        </p:style>
+        <p:txBody>
+          <a:bodyPr lIns="216000" tIns="72000" rIns="288000" bIns="288000" rtlCol="0" anchor="t"/>
+          <a:lstStyle/>
+          <a:p>
+            <a:r>
+              <a:rPr lang="tr-TR" dirty="0">
+                <a:solidFill>
+                  <a:srgbClr val="C00000"/>
+                </a:solidFill>
+              </a:rPr>
+              <a:t>Mevzun:</a:t>
+            </a:r>
+            <a:endParaRPr lang="ar-AE" dirty="0">
+              <a:solidFill>
+                <a:srgbClr val="C00000"/>
+              </a:solidFill>
+            </a:endParaRPr>
+          </a:p>
+          <a:p>
+            <a:pPr algn="r"/>
+            <a:r>
+              <a:rPr lang="ar-AE" sz="3600" dirty="0">
+                <a:solidFill>
+                  <a:schemeClr val="tx1">
+                    <a:lumMod val="65000"/>
+                    <a:lumOff val="35000"/>
+                  </a:schemeClr>
+                </a:solidFill>
+              </a:rPr>
+              <a:t>اَكْرَمَ – يُكْرِمُ - اِكْرَامًا	</a:t>
+            </a:r>
+            <a:endParaRPr lang="tr-TR" sz="3600" dirty="0">
+              <a:solidFill>
+                <a:schemeClr val="tx1">
+                  <a:lumMod val="65000"/>
+                  <a:lumOff val="35000"/>
+                </a:schemeClr>
+              </a:solidFill>
+            </a:endParaRPr>
+          </a:p>
+        </p:txBody>
+      </p:sp>
+      <p:sp>
+        <p:nvSpPr>
+          <p:cNvPr id="2" name="İkizkenar Üçgen 1">
+            <a:extLst>
+              <a:ext uri="{FF2B5EF4-FFF2-40B4-BE49-F238E27FC236}">
+                <a16:creationId xmlns:a16="http://schemas.microsoft.com/office/drawing/2014/main" id="{F761A71F-29CB-9CF0-1D02-9D53577DA23F}"/>
+              </a:ext>
+            </a:extLst>
+          </p:cNvPr>
+          <p:cNvSpPr/>
+          <p:nvPr/>
+        </p:nvSpPr>
+        <p:spPr>
+          <a:xfrm rot="18876393">
+            <a:off x="-810273" y="-176755"/>
+            <a:ext cx="2538637" cy="1259992"/>
+          </a:xfrm>
+          <a:prstGeom prst="triangle">
+            <a:avLst/>
+          </a:prstGeom>
+          <a:solidFill>
+            <a:srgbClr val="FFC000"/>
+          </a:solidFill>
+          <a:ln>
+            <a:solidFill>
+              <a:schemeClr val="accent2">
+                <a:lumMod val="60000"/>
+                <a:lumOff val="40000"/>
+              </a:schemeClr>
+            </a:solidFill>
+          </a:ln>
+        </p:spPr>
+        <p:style>
+          <a:lnRef idx="2">
+            <a:schemeClr val="accent1">
+              <a:shade val="15000"/>
+            </a:schemeClr>
+          </a:lnRef>
+          <a:fillRef idx="1">
+            <a:schemeClr val="accent1"/>
+          </a:fillRef>
+          <a:effectRef idx="0">
+            <a:schemeClr val="accent1"/>
+          </a:effectRef>
+          <a:fontRef idx="minor">
+            <a:schemeClr val="lt1"/>
+          </a:fontRef>
+        </p:style>
+        <p:txBody>
+          <a:bodyPr rtlCol="0" anchor="ctr"/>
+          <a:lstStyle/>
+          <a:p>
+            <a:r>
+              <a:rPr lang="tr-TR" sz="2400" b="1" dirty="0">
+                <a:solidFill>
+                  <a:schemeClr val="tx1">
+                    <a:lumMod val="95000"/>
+                    <a:lumOff val="5000"/>
+                  </a:schemeClr>
+                </a:solidFill>
+              </a:rPr>
+              <a:t>1. NEVİ</a:t>
+            </a:r>
+          </a:p>
+        </p:txBody>
+      </p:sp>
+    </p:spTree>
+    <p:extLst>
+      <p:ext uri="{BB962C8B-B14F-4D97-AF65-F5344CB8AC3E}">
+        <p14:creationId xmlns:p14="http://schemas.microsoft.com/office/powerpoint/2010/main" val="2702794919"/>
       </p:ext>
     </p:extLst>
   </p:cSld>
